--- a/Aula01_Introducao_a_Computacao_e_ao_Pensamento_Computacional/Aula01_Teoria-19-08-26.pptx
+++ b/Aula01_Introducao_a_Computacao_e_ao_Pensamento_Computacional/Aula01_Teoria-19-08-26.pptx
@@ -27,6 +27,7 @@
     <p:sldId id="272" r:id="rId20"/>
     <p:sldId id="273" r:id="rId21"/>
     <p:sldId id="274" r:id="rId22"/>
+    <p:sldId id="275" r:id="rId23"/>
   </p:sldIdLst>
   <p:sldSz cx="12192000" cy="6858000"/>
   <p:notesSz cx="6858000" cy="12192000"/>
@@ -78,24 +79,25 @@
             <a:noAutofit/>
           </a:bodyPr>
           <a:p>
-            <a:r>
-              <a:rPr b="0" lang="pt-BR" sz="1800" strike="noStrike" u="none">
-                <a:solidFill>
-                  <a:schemeClr val="dk1"/>
-                </a:solidFill>
-                <a:effectLst/>
-                <a:uFillTx/>
-                <a:latin typeface="Aptos"/>
+            <a:pPr algn="ctr"/>
+            <a:r>
+              <a:rPr b="0" lang="pt-BR" sz="4400" strike="noStrike" u="none">
+                <a:solidFill>
+                  <a:srgbClr val="000000"/>
+                </a:solidFill>
+                <a:effectLst/>
+                <a:uFillTx/>
+                <a:latin typeface="Arial"/>
               </a:rPr>
               <a:t>Clique para mover o slide</a:t>
             </a:r>
-            <a:endParaRPr b="0" lang="pt-BR" sz="1800" strike="noStrike" u="none">
-              <a:solidFill>
-                <a:schemeClr val="dk1"/>
-              </a:solidFill>
-              <a:effectLst/>
-              <a:uFillTx/>
-              <a:latin typeface="Aptos"/>
+            <a:endParaRPr b="0" lang="pt-BR" sz="4400" strike="noStrike" u="none">
+              <a:solidFill>
+                <a:srgbClr val="000000"/>
+              </a:solidFill>
+              <a:effectLst/>
+              <a:uFillTx/>
+              <a:latin typeface="Arial"/>
             </a:endParaRPr>
           </a:p>
         </p:txBody>
@@ -382,7 +384,7 @@
             <a:pPr indent="0" algn="r">
               <a:buNone/>
             </a:pPr>
-            <a:fld id="{113567D0-11EB-4314-B678-50420D1A79B0}" type="slidenum">
+            <a:fld id="{CA1D73DD-3E15-4DD3-A805-CE1FC8EBA2A4}" type="slidenum">
               <a:rPr b="0" lang="pt-BR" sz="1400" strike="noStrike" u="none">
                 <a:solidFill>
                   <a:srgbClr val="000000"/>
@@ -429,7 +431,7 @@
       </p:grpSpPr>
       <p:sp>
         <p:nvSpPr>
-          <p:cNvPr id="241" name="PlaceHolder 1"/>
+          <p:cNvPr id="257" name="PlaceHolder 1"/>
           <p:cNvSpPr>
             <a:spLocks noGrp="1"/>
           </p:cNvSpPr>
@@ -440,19 +442,19 @@
         <p:spPr>
           <a:xfrm>
             <a:off x="685800" y="1143000"/>
-            <a:ext cx="5486040" cy="3085920"/>
-          </a:xfrm>
-          <a:prstGeom prst="rect">
-            <a:avLst/>
-          </a:prstGeom>
-          <a:ln w="0">
-            <a:noFill/>
-          </a:ln>
-        </p:spPr>
-      </p:sp>
-      <p:sp>
-        <p:nvSpPr>
-          <p:cNvPr id="242" name="PlaceHolder 2"/>
+            <a:ext cx="5485680" cy="3085560"/>
+          </a:xfrm>
+          <a:prstGeom prst="rect">
+            <a:avLst/>
+          </a:prstGeom>
+          <a:ln w="0">
+            <a:noFill/>
+          </a:ln>
+        </p:spPr>
+      </p:sp>
+      <p:sp>
+        <p:nvSpPr>
+          <p:cNvPr id="258" name="PlaceHolder 2"/>
           <p:cNvSpPr>
             <a:spLocks noGrp="1"/>
           </p:cNvSpPr>
@@ -463,7 +465,7 @@
         <p:spPr>
           <a:xfrm>
             <a:off x="685800" y="4400640"/>
-            <a:ext cx="5486040" cy="3600000"/>
+            <a:ext cx="5485680" cy="3599640"/>
           </a:xfrm>
           <a:prstGeom prst="rect">
             <a:avLst/>
@@ -494,7 +496,7 @@
       </p:sp>
       <p:sp>
         <p:nvSpPr>
-          <p:cNvPr id="243" name="PlaceHolder 3"/>
+          <p:cNvPr id="259" name="PlaceHolder 3"/>
           <p:cNvSpPr>
             <a:spLocks noGrp="1"/>
           </p:cNvSpPr>
@@ -505,7 +507,7 @@
         <p:spPr>
           <a:xfrm>
             <a:off x="3884760" y="8685360"/>
-            <a:ext cx="2971440" cy="458280"/>
+            <a:ext cx="2971080" cy="457920"/>
           </a:xfrm>
           <a:prstGeom prst="rect">
             <a:avLst/>
@@ -525,6 +527,9 @@
                 <a:spcPct val="100000"/>
               </a:lnSpc>
               <a:buNone/>
+              <a:tabLst>
+                <a:tab algn="l" pos="0"/>
+              </a:tabLst>
               <a:defRPr b="0" lang="en-US" sz="1200" strike="noStrike" u="none">
                 <a:solidFill>
                   <a:schemeClr val="dk1"/>
@@ -542,8 +547,11 @@
                 <a:spcPct val="100000"/>
               </a:lnSpc>
               <a:buNone/>
-            </a:pPr>
-            <a:fld id="{E89A2D0B-613C-40AD-AFA2-826BD4B497BA}" type="slidenum">
+              <a:tabLst>
+                <a:tab algn="l" pos="0"/>
+              </a:tabLst>
+            </a:pPr>
+            <a:fld id="{BA156D56-00F3-44AF-A764-1D7602C30ED4}" type="slidenum">
               <a:rPr b="0" lang="en-US" sz="1200" strike="noStrike" u="none">
                 <a:solidFill>
                   <a:schemeClr val="dk1"/>
@@ -553,7 +561,7 @@
                 <a:latin typeface="+mn-lt"/>
                 <a:ea typeface="+mn-ea"/>
               </a:rPr>
-              <a:t>19</a:t>
+              <a:t>20</a:t>
             </a:fld>
             <a:endParaRPr b="0" lang="pt-BR" sz="1200" strike="noStrike" u="none">
               <a:solidFill>
@@ -590,7 +598,7 @@
       </p:grpSpPr>
       <p:sp>
         <p:nvSpPr>
-          <p:cNvPr id="250" name="PlaceHolder 1"/>
+          <p:cNvPr id="266" name="PlaceHolder 1"/>
           <p:cNvSpPr>
             <a:spLocks noGrp="1"/>
           </p:cNvSpPr>
@@ -601,19 +609,19 @@
         <p:spPr>
           <a:xfrm>
             <a:off x="685800" y="1143000"/>
-            <a:ext cx="5486040" cy="3085920"/>
-          </a:xfrm>
-          <a:prstGeom prst="rect">
-            <a:avLst/>
-          </a:prstGeom>
-          <a:ln w="0">
-            <a:noFill/>
-          </a:ln>
-        </p:spPr>
-      </p:sp>
-      <p:sp>
-        <p:nvSpPr>
-          <p:cNvPr id="251" name="PlaceHolder 2"/>
+            <a:ext cx="5485680" cy="3085560"/>
+          </a:xfrm>
+          <a:prstGeom prst="rect">
+            <a:avLst/>
+          </a:prstGeom>
+          <a:ln w="0">
+            <a:noFill/>
+          </a:ln>
+        </p:spPr>
+      </p:sp>
+      <p:sp>
+        <p:nvSpPr>
+          <p:cNvPr id="267" name="PlaceHolder 2"/>
           <p:cNvSpPr>
             <a:spLocks noGrp="1"/>
           </p:cNvSpPr>
@@ -624,7 +632,7 @@
         <p:spPr>
           <a:xfrm>
             <a:off x="685800" y="4400640"/>
-            <a:ext cx="5486040" cy="3600000"/>
+            <a:ext cx="5485680" cy="3599640"/>
           </a:xfrm>
           <a:prstGeom prst="rect">
             <a:avLst/>
@@ -655,7 +663,7 @@
       </p:sp>
       <p:sp>
         <p:nvSpPr>
-          <p:cNvPr id="252" name="PlaceHolder 3"/>
+          <p:cNvPr id="268" name="PlaceHolder 3"/>
           <p:cNvSpPr>
             <a:spLocks noGrp="1"/>
           </p:cNvSpPr>
@@ -666,7 +674,7 @@
         <p:spPr>
           <a:xfrm>
             <a:off x="3884760" y="8685360"/>
-            <a:ext cx="2971440" cy="458280"/>
+            <a:ext cx="2971080" cy="457920"/>
           </a:xfrm>
           <a:prstGeom prst="rect">
             <a:avLst/>
@@ -686,6 +694,9 @@
                 <a:spcPct val="100000"/>
               </a:lnSpc>
               <a:buNone/>
+              <a:tabLst>
+                <a:tab algn="l" pos="0"/>
+              </a:tabLst>
               <a:defRPr b="0" lang="en-US" sz="1200" strike="noStrike" u="none">
                 <a:solidFill>
                   <a:schemeClr val="dk1"/>
@@ -703,8 +714,11 @@
                 <a:spcPct val="100000"/>
               </a:lnSpc>
               <a:buNone/>
-            </a:pPr>
-            <a:fld id="{B2F68518-B06A-4164-BB34-E2D214ED343E}" type="slidenum">
+              <a:tabLst>
+                <a:tab algn="l" pos="0"/>
+              </a:tabLst>
+            </a:pPr>
+            <a:fld id="{01497CD5-D56D-4FD4-8A3D-5C0615E6EF63}" type="slidenum">
               <a:rPr b="0" lang="en-US" sz="1200" strike="noStrike" u="none">
                 <a:solidFill>
                   <a:schemeClr val="dk1"/>
@@ -714,7 +728,7 @@
                 <a:latin typeface="+mn-lt"/>
                 <a:ea typeface="+mn-ea"/>
               </a:rPr>
-              <a:t>19</a:t>
+              <a:t>20</a:t>
             </a:fld>
             <a:endParaRPr b="0" lang="pt-BR" sz="1200" strike="noStrike" u="none">
               <a:solidFill>
@@ -751,7 +765,7 @@
       </p:grpSpPr>
       <p:sp>
         <p:nvSpPr>
-          <p:cNvPr id="253" name="PlaceHolder 1"/>
+          <p:cNvPr id="269" name="PlaceHolder 1"/>
           <p:cNvSpPr>
             <a:spLocks noGrp="1"/>
           </p:cNvSpPr>
@@ -762,19 +776,19 @@
         <p:spPr>
           <a:xfrm>
             <a:off x="685800" y="1143000"/>
-            <a:ext cx="5486040" cy="3085920"/>
-          </a:xfrm>
-          <a:prstGeom prst="rect">
-            <a:avLst/>
-          </a:prstGeom>
-          <a:ln w="0">
-            <a:noFill/>
-          </a:ln>
-        </p:spPr>
-      </p:sp>
-      <p:sp>
-        <p:nvSpPr>
-          <p:cNvPr id="254" name="PlaceHolder 2"/>
+            <a:ext cx="5485680" cy="3085560"/>
+          </a:xfrm>
+          <a:prstGeom prst="rect">
+            <a:avLst/>
+          </a:prstGeom>
+          <a:ln w="0">
+            <a:noFill/>
+          </a:ln>
+        </p:spPr>
+      </p:sp>
+      <p:sp>
+        <p:nvSpPr>
+          <p:cNvPr id="270" name="PlaceHolder 2"/>
           <p:cNvSpPr>
             <a:spLocks noGrp="1"/>
           </p:cNvSpPr>
@@ -785,7 +799,7 @@
         <p:spPr>
           <a:xfrm>
             <a:off x="685800" y="4400640"/>
-            <a:ext cx="5486040" cy="3600000"/>
+            <a:ext cx="5485680" cy="3599640"/>
           </a:xfrm>
           <a:prstGeom prst="rect">
             <a:avLst/>
@@ -816,7 +830,7 @@
       </p:sp>
       <p:sp>
         <p:nvSpPr>
-          <p:cNvPr id="255" name="PlaceHolder 3"/>
+          <p:cNvPr id="271" name="PlaceHolder 3"/>
           <p:cNvSpPr>
             <a:spLocks noGrp="1"/>
           </p:cNvSpPr>
@@ -827,7 +841,7 @@
         <p:spPr>
           <a:xfrm>
             <a:off x="3884760" y="8685360"/>
-            <a:ext cx="2971440" cy="458280"/>
+            <a:ext cx="2971080" cy="457920"/>
           </a:xfrm>
           <a:prstGeom prst="rect">
             <a:avLst/>
@@ -847,6 +861,9 @@
                 <a:spcPct val="100000"/>
               </a:lnSpc>
               <a:buNone/>
+              <a:tabLst>
+                <a:tab algn="l" pos="0"/>
+              </a:tabLst>
               <a:defRPr b="0" lang="en-US" sz="1200" strike="noStrike" u="none">
                 <a:solidFill>
                   <a:schemeClr val="dk1"/>
@@ -864,8 +881,11 @@
                 <a:spcPct val="100000"/>
               </a:lnSpc>
               <a:buNone/>
-            </a:pPr>
-            <a:fld id="{020C95B2-93AD-43A3-81FA-6BEBD9CC975D}" type="slidenum">
+              <a:tabLst>
+                <a:tab algn="l" pos="0"/>
+              </a:tabLst>
+            </a:pPr>
+            <a:fld id="{F7ED018F-20DD-42D2-B001-0389580DEA86}" type="slidenum">
               <a:rPr b="0" lang="en-US" sz="1200" strike="noStrike" u="none">
                 <a:solidFill>
                   <a:schemeClr val="dk1"/>
@@ -875,7 +895,7 @@
                 <a:latin typeface="+mn-lt"/>
                 <a:ea typeface="+mn-ea"/>
               </a:rPr>
-              <a:t>19</a:t>
+              <a:t>&lt;número&gt;</a:t>
             </a:fld>
             <a:endParaRPr b="0" lang="pt-BR" sz="1200" strike="noStrike" u="none">
               <a:solidFill>
@@ -912,7 +932,7 @@
       </p:grpSpPr>
       <p:sp>
         <p:nvSpPr>
-          <p:cNvPr id="256" name="PlaceHolder 1"/>
+          <p:cNvPr id="272" name="PlaceHolder 1"/>
           <p:cNvSpPr>
             <a:spLocks noGrp="1"/>
           </p:cNvSpPr>
@@ -923,19 +943,19 @@
         <p:spPr>
           <a:xfrm>
             <a:off x="685800" y="1143000"/>
-            <a:ext cx="5486040" cy="3085920"/>
-          </a:xfrm>
-          <a:prstGeom prst="rect">
-            <a:avLst/>
-          </a:prstGeom>
-          <a:ln w="0">
-            <a:noFill/>
-          </a:ln>
-        </p:spPr>
-      </p:sp>
-      <p:sp>
-        <p:nvSpPr>
-          <p:cNvPr id="257" name="PlaceHolder 2"/>
+            <a:ext cx="5485680" cy="3085560"/>
+          </a:xfrm>
+          <a:prstGeom prst="rect">
+            <a:avLst/>
+          </a:prstGeom>
+          <a:ln w="0">
+            <a:noFill/>
+          </a:ln>
+        </p:spPr>
+      </p:sp>
+      <p:sp>
+        <p:nvSpPr>
+          <p:cNvPr id="273" name="PlaceHolder 2"/>
           <p:cNvSpPr>
             <a:spLocks noGrp="1"/>
           </p:cNvSpPr>
@@ -946,7 +966,7 @@
         <p:spPr>
           <a:xfrm>
             <a:off x="685800" y="4400640"/>
-            <a:ext cx="5486040" cy="3600000"/>
+            <a:ext cx="5485680" cy="3599640"/>
           </a:xfrm>
           <a:prstGeom prst="rect">
             <a:avLst/>
@@ -977,7 +997,7 @@
       </p:sp>
       <p:sp>
         <p:nvSpPr>
-          <p:cNvPr id="258" name="PlaceHolder 3"/>
+          <p:cNvPr id="274" name="PlaceHolder 3"/>
           <p:cNvSpPr>
             <a:spLocks noGrp="1"/>
           </p:cNvSpPr>
@@ -988,7 +1008,7 @@
         <p:spPr>
           <a:xfrm>
             <a:off x="3884760" y="8685360"/>
-            <a:ext cx="2971440" cy="458280"/>
+            <a:ext cx="2971080" cy="457920"/>
           </a:xfrm>
           <a:prstGeom prst="rect">
             <a:avLst/>
@@ -1008,6 +1028,9 @@
                 <a:spcPct val="100000"/>
               </a:lnSpc>
               <a:buNone/>
+              <a:tabLst>
+                <a:tab algn="l" pos="0"/>
+              </a:tabLst>
               <a:defRPr b="0" lang="en-US" sz="1200" strike="noStrike" u="none">
                 <a:solidFill>
                   <a:schemeClr val="dk1"/>
@@ -1025,8 +1048,11 @@
                 <a:spcPct val="100000"/>
               </a:lnSpc>
               <a:buNone/>
-            </a:pPr>
-            <a:fld id="{FC3823C0-5FAB-4A72-8EEC-D36DAECE0F02}" type="slidenum">
+              <a:tabLst>
+                <a:tab algn="l" pos="0"/>
+              </a:tabLst>
+            </a:pPr>
+            <a:fld id="{9F7A0DE2-BD08-4D32-80F1-9DAE93A35095}" type="slidenum">
               <a:rPr b="0" lang="en-US" sz="1200" strike="noStrike" u="none">
                 <a:solidFill>
                   <a:schemeClr val="dk1"/>
@@ -1036,7 +1062,7 @@
                 <a:latin typeface="+mn-lt"/>
                 <a:ea typeface="+mn-ea"/>
               </a:rPr>
-              <a:t>19</a:t>
+              <a:t>&lt;número&gt;</a:t>
             </a:fld>
             <a:endParaRPr b="0" lang="pt-BR" sz="1200" strike="noStrike" u="none">
               <a:solidFill>
@@ -1073,7 +1099,7 @@
       </p:grpSpPr>
       <p:sp>
         <p:nvSpPr>
-          <p:cNvPr id="259" name="PlaceHolder 1"/>
+          <p:cNvPr id="275" name="PlaceHolder 1"/>
           <p:cNvSpPr>
             <a:spLocks noGrp="1"/>
           </p:cNvSpPr>
@@ -1084,19 +1110,19 @@
         <p:spPr>
           <a:xfrm>
             <a:off x="685800" y="1143000"/>
-            <a:ext cx="5486040" cy="3085920"/>
-          </a:xfrm>
-          <a:prstGeom prst="rect">
-            <a:avLst/>
-          </a:prstGeom>
-          <a:ln w="0">
-            <a:noFill/>
-          </a:ln>
-        </p:spPr>
-      </p:sp>
-      <p:sp>
-        <p:nvSpPr>
-          <p:cNvPr id="260" name="PlaceHolder 2"/>
+            <a:ext cx="5485680" cy="3085560"/>
+          </a:xfrm>
+          <a:prstGeom prst="rect">
+            <a:avLst/>
+          </a:prstGeom>
+          <a:ln w="0">
+            <a:noFill/>
+          </a:ln>
+        </p:spPr>
+      </p:sp>
+      <p:sp>
+        <p:nvSpPr>
+          <p:cNvPr id="276" name="PlaceHolder 2"/>
           <p:cNvSpPr>
             <a:spLocks noGrp="1"/>
           </p:cNvSpPr>
@@ -1107,7 +1133,7 @@
         <p:spPr>
           <a:xfrm>
             <a:off x="685800" y="4400640"/>
-            <a:ext cx="5486040" cy="3600000"/>
+            <a:ext cx="5485680" cy="3599640"/>
           </a:xfrm>
           <a:prstGeom prst="rect">
             <a:avLst/>
@@ -1138,7 +1164,7 @@
       </p:sp>
       <p:sp>
         <p:nvSpPr>
-          <p:cNvPr id="261" name="PlaceHolder 3"/>
+          <p:cNvPr id="277" name="PlaceHolder 3"/>
           <p:cNvSpPr>
             <a:spLocks noGrp="1"/>
           </p:cNvSpPr>
@@ -1149,7 +1175,7 @@
         <p:spPr>
           <a:xfrm>
             <a:off x="3884760" y="8685360"/>
-            <a:ext cx="2971440" cy="458280"/>
+            <a:ext cx="2971080" cy="457920"/>
           </a:xfrm>
           <a:prstGeom prst="rect">
             <a:avLst/>
@@ -1169,6 +1195,9 @@
                 <a:spcPct val="100000"/>
               </a:lnSpc>
               <a:buNone/>
+              <a:tabLst>
+                <a:tab algn="l" pos="0"/>
+              </a:tabLst>
               <a:defRPr b="0" lang="en-US" sz="1200" strike="noStrike" u="none">
                 <a:solidFill>
                   <a:schemeClr val="dk1"/>
@@ -1186,8 +1215,11 @@
                 <a:spcPct val="100000"/>
               </a:lnSpc>
               <a:buNone/>
-            </a:pPr>
-            <a:fld id="{B493AFC4-5FF3-41AB-9C91-B8743C5E88A9}" type="slidenum">
+              <a:tabLst>
+                <a:tab algn="l" pos="0"/>
+              </a:tabLst>
+            </a:pPr>
+            <a:fld id="{8484356B-7DDF-4862-8790-47A827B613FD}" type="slidenum">
               <a:rPr b="0" lang="en-US" sz="1200" strike="noStrike" u="none">
                 <a:solidFill>
                   <a:schemeClr val="dk1"/>
@@ -1197,7 +1229,7 @@
                 <a:latin typeface="+mn-lt"/>
                 <a:ea typeface="+mn-ea"/>
               </a:rPr>
-              <a:t>19</a:t>
+              <a:t>&lt;número&gt;</a:t>
             </a:fld>
             <a:endParaRPr b="0" lang="pt-BR" sz="1200" strike="noStrike" u="none">
               <a:solidFill>
@@ -1234,7 +1266,7 @@
       </p:grpSpPr>
       <p:sp>
         <p:nvSpPr>
-          <p:cNvPr id="262" name="PlaceHolder 1"/>
+          <p:cNvPr id="278" name="PlaceHolder 1"/>
           <p:cNvSpPr>
             <a:spLocks noGrp="1"/>
           </p:cNvSpPr>
@@ -1245,19 +1277,19 @@
         <p:spPr>
           <a:xfrm>
             <a:off x="685800" y="1143000"/>
-            <a:ext cx="5486040" cy="3085920"/>
-          </a:xfrm>
-          <a:prstGeom prst="rect">
-            <a:avLst/>
-          </a:prstGeom>
-          <a:ln w="0">
-            <a:noFill/>
-          </a:ln>
-        </p:spPr>
-      </p:sp>
-      <p:sp>
-        <p:nvSpPr>
-          <p:cNvPr id="263" name="PlaceHolder 2"/>
+            <a:ext cx="5485680" cy="3085560"/>
+          </a:xfrm>
+          <a:prstGeom prst="rect">
+            <a:avLst/>
+          </a:prstGeom>
+          <a:ln w="0">
+            <a:noFill/>
+          </a:ln>
+        </p:spPr>
+      </p:sp>
+      <p:sp>
+        <p:nvSpPr>
+          <p:cNvPr id="279" name="PlaceHolder 2"/>
           <p:cNvSpPr>
             <a:spLocks noGrp="1"/>
           </p:cNvSpPr>
@@ -1268,7 +1300,7 @@
         <p:spPr>
           <a:xfrm>
             <a:off x="685800" y="4400640"/>
-            <a:ext cx="5486040" cy="3600000"/>
+            <a:ext cx="5485680" cy="3599640"/>
           </a:xfrm>
           <a:prstGeom prst="rect">
             <a:avLst/>
@@ -1299,7 +1331,7 @@
       </p:sp>
       <p:sp>
         <p:nvSpPr>
-          <p:cNvPr id="264" name="PlaceHolder 3"/>
+          <p:cNvPr id="280" name="PlaceHolder 3"/>
           <p:cNvSpPr>
             <a:spLocks noGrp="1"/>
           </p:cNvSpPr>
@@ -1310,7 +1342,7 @@
         <p:spPr>
           <a:xfrm>
             <a:off x="3884760" y="8685360"/>
-            <a:ext cx="2971440" cy="458280"/>
+            <a:ext cx="2971080" cy="457920"/>
           </a:xfrm>
           <a:prstGeom prst="rect">
             <a:avLst/>
@@ -1330,6 +1362,9 @@
                 <a:spcPct val="100000"/>
               </a:lnSpc>
               <a:buNone/>
+              <a:tabLst>
+                <a:tab algn="l" pos="0"/>
+              </a:tabLst>
               <a:defRPr b="0" lang="en-US" sz="1200" strike="noStrike" u="none">
                 <a:solidFill>
                   <a:schemeClr val="dk1"/>
@@ -1347,8 +1382,11 @@
                 <a:spcPct val="100000"/>
               </a:lnSpc>
               <a:buNone/>
-            </a:pPr>
-            <a:fld id="{88762F01-945F-4F87-BEA3-BC11E6139751}" type="slidenum">
+              <a:tabLst>
+                <a:tab algn="l" pos="0"/>
+              </a:tabLst>
+            </a:pPr>
+            <a:fld id="{F65BB583-AB73-4AA1-AC5B-FA01BD7C64C9}" type="slidenum">
               <a:rPr b="0" lang="en-US" sz="1200" strike="noStrike" u="none">
                 <a:solidFill>
                   <a:schemeClr val="dk1"/>
@@ -1358,7 +1396,7 @@
                 <a:latin typeface="+mn-lt"/>
                 <a:ea typeface="+mn-ea"/>
               </a:rPr>
-              <a:t>19</a:t>
+              <a:t>&lt;número&gt;</a:t>
             </a:fld>
             <a:endParaRPr b="0" lang="pt-BR" sz="1200" strike="noStrike" u="none">
               <a:solidFill>
@@ -1395,7 +1433,7 @@
       </p:grpSpPr>
       <p:sp>
         <p:nvSpPr>
-          <p:cNvPr id="265" name="PlaceHolder 1"/>
+          <p:cNvPr id="281" name="PlaceHolder 1"/>
           <p:cNvSpPr>
             <a:spLocks noGrp="1"/>
           </p:cNvSpPr>
@@ -1406,19 +1444,19 @@
         <p:spPr>
           <a:xfrm>
             <a:off x="685800" y="1143000"/>
-            <a:ext cx="5486040" cy="3085920"/>
-          </a:xfrm>
-          <a:prstGeom prst="rect">
-            <a:avLst/>
-          </a:prstGeom>
-          <a:ln w="0">
-            <a:noFill/>
-          </a:ln>
-        </p:spPr>
-      </p:sp>
-      <p:sp>
-        <p:nvSpPr>
-          <p:cNvPr id="266" name="PlaceHolder 2"/>
+            <a:ext cx="5485680" cy="3085560"/>
+          </a:xfrm>
+          <a:prstGeom prst="rect">
+            <a:avLst/>
+          </a:prstGeom>
+          <a:ln w="0">
+            <a:noFill/>
+          </a:ln>
+        </p:spPr>
+      </p:sp>
+      <p:sp>
+        <p:nvSpPr>
+          <p:cNvPr id="282" name="PlaceHolder 2"/>
           <p:cNvSpPr>
             <a:spLocks noGrp="1"/>
           </p:cNvSpPr>
@@ -1429,7 +1467,7 @@
         <p:spPr>
           <a:xfrm>
             <a:off x="685800" y="4400640"/>
-            <a:ext cx="5486040" cy="3600000"/>
+            <a:ext cx="5485680" cy="3599640"/>
           </a:xfrm>
           <a:prstGeom prst="rect">
             <a:avLst/>
@@ -1460,7 +1498,7 @@
       </p:sp>
       <p:sp>
         <p:nvSpPr>
-          <p:cNvPr id="267" name="PlaceHolder 3"/>
+          <p:cNvPr id="283" name="PlaceHolder 3"/>
           <p:cNvSpPr>
             <a:spLocks noGrp="1"/>
           </p:cNvSpPr>
@@ -1471,7 +1509,7 @@
         <p:spPr>
           <a:xfrm>
             <a:off x="3884760" y="8685360"/>
-            <a:ext cx="2971440" cy="458280"/>
+            <a:ext cx="2971080" cy="457920"/>
           </a:xfrm>
           <a:prstGeom prst="rect">
             <a:avLst/>
@@ -1491,6 +1529,9 @@
                 <a:spcPct val="100000"/>
               </a:lnSpc>
               <a:buNone/>
+              <a:tabLst>
+                <a:tab algn="l" pos="0"/>
+              </a:tabLst>
               <a:defRPr b="0" lang="en-US" sz="1200" strike="noStrike" u="none">
                 <a:solidFill>
                   <a:schemeClr val="dk1"/>
@@ -1508,8 +1549,11 @@
                 <a:spcPct val="100000"/>
               </a:lnSpc>
               <a:buNone/>
-            </a:pPr>
-            <a:fld id="{03C7A48A-45EC-4B12-BCA7-618DFC88E32A}" type="slidenum">
+              <a:tabLst>
+                <a:tab algn="l" pos="0"/>
+              </a:tabLst>
+            </a:pPr>
+            <a:fld id="{5375C8CE-418A-455D-8422-7A7E756064EC}" type="slidenum">
               <a:rPr b="0" lang="en-US" sz="1200" strike="noStrike" u="none">
                 <a:solidFill>
                   <a:schemeClr val="dk1"/>
@@ -1519,7 +1563,7 @@
                 <a:latin typeface="+mn-lt"/>
                 <a:ea typeface="+mn-ea"/>
               </a:rPr>
-              <a:t>19</a:t>
+              <a:t>&lt;número&gt;</a:t>
             </a:fld>
             <a:endParaRPr b="0" lang="pt-BR" sz="1200" strike="noStrike" u="none">
               <a:solidFill>
@@ -1556,7 +1600,7 @@
       </p:grpSpPr>
       <p:sp>
         <p:nvSpPr>
-          <p:cNvPr id="268" name="PlaceHolder 1"/>
+          <p:cNvPr id="284" name="PlaceHolder 1"/>
           <p:cNvSpPr>
             <a:spLocks noGrp="1"/>
           </p:cNvSpPr>
@@ -1567,19 +1611,19 @@
         <p:spPr>
           <a:xfrm>
             <a:off x="685800" y="1143000"/>
-            <a:ext cx="5486040" cy="3085920"/>
-          </a:xfrm>
-          <a:prstGeom prst="rect">
-            <a:avLst/>
-          </a:prstGeom>
-          <a:ln w="0">
-            <a:noFill/>
-          </a:ln>
-        </p:spPr>
-      </p:sp>
-      <p:sp>
-        <p:nvSpPr>
-          <p:cNvPr id="269" name="PlaceHolder 2"/>
+            <a:ext cx="5485680" cy="3085560"/>
+          </a:xfrm>
+          <a:prstGeom prst="rect">
+            <a:avLst/>
+          </a:prstGeom>
+          <a:ln w="0">
+            <a:noFill/>
+          </a:ln>
+        </p:spPr>
+      </p:sp>
+      <p:sp>
+        <p:nvSpPr>
+          <p:cNvPr id="285" name="PlaceHolder 2"/>
           <p:cNvSpPr>
             <a:spLocks noGrp="1"/>
           </p:cNvSpPr>
@@ -1590,7 +1634,7 @@
         <p:spPr>
           <a:xfrm>
             <a:off x="685800" y="4400640"/>
-            <a:ext cx="5486040" cy="3600000"/>
+            <a:ext cx="5485680" cy="3599640"/>
           </a:xfrm>
           <a:prstGeom prst="rect">
             <a:avLst/>
@@ -1621,7 +1665,7 @@
       </p:sp>
       <p:sp>
         <p:nvSpPr>
-          <p:cNvPr id="270" name="PlaceHolder 3"/>
+          <p:cNvPr id="286" name="PlaceHolder 3"/>
           <p:cNvSpPr>
             <a:spLocks noGrp="1"/>
           </p:cNvSpPr>
@@ -1632,7 +1676,7 @@
         <p:spPr>
           <a:xfrm>
             <a:off x="3884760" y="8685360"/>
-            <a:ext cx="2971440" cy="458280"/>
+            <a:ext cx="2971080" cy="457920"/>
           </a:xfrm>
           <a:prstGeom prst="rect">
             <a:avLst/>
@@ -1652,6 +1696,9 @@
                 <a:spcPct val="100000"/>
               </a:lnSpc>
               <a:buNone/>
+              <a:tabLst>
+                <a:tab algn="l" pos="0"/>
+              </a:tabLst>
               <a:defRPr b="0" lang="en-US" sz="1200" strike="noStrike" u="none">
                 <a:solidFill>
                   <a:schemeClr val="dk1"/>
@@ -1669,8 +1716,11 @@
                 <a:spcPct val="100000"/>
               </a:lnSpc>
               <a:buNone/>
-            </a:pPr>
-            <a:fld id="{FA056D3B-559F-4965-8AEE-598FD36E6D57}" type="slidenum">
+              <a:tabLst>
+                <a:tab algn="l" pos="0"/>
+              </a:tabLst>
+            </a:pPr>
+            <a:fld id="{FDEB9CF3-588C-47BA-B951-D6F5C2CE703A}" type="slidenum">
               <a:rPr b="0" lang="en-US" sz="1200" strike="noStrike" u="none">
                 <a:solidFill>
                   <a:schemeClr val="dk1"/>
@@ -1680,7 +1730,7 @@
                 <a:latin typeface="+mn-lt"/>
                 <a:ea typeface="+mn-ea"/>
               </a:rPr>
-              <a:t>19</a:t>
+              <a:t>&lt;número&gt;</a:t>
             </a:fld>
             <a:endParaRPr b="0" lang="pt-BR" sz="1200" strike="noStrike" u="none">
               <a:solidFill>
@@ -1717,7 +1767,7 @@
       </p:grpSpPr>
       <p:sp>
         <p:nvSpPr>
-          <p:cNvPr id="271" name="PlaceHolder 1"/>
+          <p:cNvPr id="287" name="PlaceHolder 1"/>
           <p:cNvSpPr>
             <a:spLocks noGrp="1"/>
           </p:cNvSpPr>
@@ -1728,19 +1778,19 @@
         <p:spPr>
           <a:xfrm>
             <a:off x="685800" y="1143000"/>
-            <a:ext cx="5486040" cy="3085920"/>
-          </a:xfrm>
-          <a:prstGeom prst="rect">
-            <a:avLst/>
-          </a:prstGeom>
-          <a:ln w="0">
-            <a:noFill/>
-          </a:ln>
-        </p:spPr>
-      </p:sp>
-      <p:sp>
-        <p:nvSpPr>
-          <p:cNvPr id="272" name="PlaceHolder 2"/>
+            <a:ext cx="5485680" cy="3085560"/>
+          </a:xfrm>
+          <a:prstGeom prst="rect">
+            <a:avLst/>
+          </a:prstGeom>
+          <a:ln w="0">
+            <a:noFill/>
+          </a:ln>
+        </p:spPr>
+      </p:sp>
+      <p:sp>
+        <p:nvSpPr>
+          <p:cNvPr id="288" name="PlaceHolder 2"/>
           <p:cNvSpPr>
             <a:spLocks noGrp="1"/>
           </p:cNvSpPr>
@@ -1751,7 +1801,7 @@
         <p:spPr>
           <a:xfrm>
             <a:off x="685800" y="4400640"/>
-            <a:ext cx="5486040" cy="3600000"/>
+            <a:ext cx="5485680" cy="3599640"/>
           </a:xfrm>
           <a:prstGeom prst="rect">
             <a:avLst/>
@@ -1782,7 +1832,7 @@
       </p:sp>
       <p:sp>
         <p:nvSpPr>
-          <p:cNvPr id="273" name="PlaceHolder 3"/>
+          <p:cNvPr id="289" name="PlaceHolder 3"/>
           <p:cNvSpPr>
             <a:spLocks noGrp="1"/>
           </p:cNvSpPr>
@@ -1793,7 +1843,7 @@
         <p:spPr>
           <a:xfrm>
             <a:off x="3884760" y="8685360"/>
-            <a:ext cx="2971440" cy="458280"/>
+            <a:ext cx="2971080" cy="457920"/>
           </a:xfrm>
           <a:prstGeom prst="rect">
             <a:avLst/>
@@ -1813,6 +1863,9 @@
                 <a:spcPct val="100000"/>
               </a:lnSpc>
               <a:buNone/>
+              <a:tabLst>
+                <a:tab algn="l" pos="0"/>
+              </a:tabLst>
               <a:defRPr b="0" lang="en-US" sz="1200" strike="noStrike" u="none">
                 <a:solidFill>
                   <a:schemeClr val="dk1"/>
@@ -1830,8 +1883,11 @@
                 <a:spcPct val="100000"/>
               </a:lnSpc>
               <a:buNone/>
-            </a:pPr>
-            <a:fld id="{73CCBED0-37B5-4DD4-85F1-67C6283EF6D6}" type="slidenum">
+              <a:tabLst>
+                <a:tab algn="l" pos="0"/>
+              </a:tabLst>
+            </a:pPr>
+            <a:fld id="{75895A08-4100-4F64-9CA8-1BA61B71AD5A}" type="slidenum">
               <a:rPr b="0" lang="en-US" sz="1200" strike="noStrike" u="none">
                 <a:solidFill>
                   <a:schemeClr val="dk1"/>
@@ -1841,7 +1897,7 @@
                 <a:latin typeface="+mn-lt"/>
                 <a:ea typeface="+mn-ea"/>
               </a:rPr>
-              <a:t>19</a:t>
+              <a:t>&lt;número&gt;</a:t>
             </a:fld>
             <a:endParaRPr b="0" lang="pt-BR" sz="1200" strike="noStrike" u="none">
               <a:solidFill>
@@ -1878,7 +1934,7 @@
       </p:grpSpPr>
       <p:sp>
         <p:nvSpPr>
-          <p:cNvPr id="274" name="PlaceHolder 1"/>
+          <p:cNvPr id="290" name="PlaceHolder 1"/>
           <p:cNvSpPr>
             <a:spLocks noGrp="1"/>
           </p:cNvSpPr>
@@ -1889,19 +1945,19 @@
         <p:spPr>
           <a:xfrm>
             <a:off x="685800" y="1143000"/>
-            <a:ext cx="5486040" cy="3085920"/>
-          </a:xfrm>
-          <a:prstGeom prst="rect">
-            <a:avLst/>
-          </a:prstGeom>
-          <a:ln w="0">
-            <a:noFill/>
-          </a:ln>
-        </p:spPr>
-      </p:sp>
-      <p:sp>
-        <p:nvSpPr>
-          <p:cNvPr id="275" name="PlaceHolder 2"/>
+            <a:ext cx="5485680" cy="3085560"/>
+          </a:xfrm>
+          <a:prstGeom prst="rect">
+            <a:avLst/>
+          </a:prstGeom>
+          <a:ln w="0">
+            <a:noFill/>
+          </a:ln>
+        </p:spPr>
+      </p:sp>
+      <p:sp>
+        <p:nvSpPr>
+          <p:cNvPr id="291" name="PlaceHolder 2"/>
           <p:cNvSpPr>
             <a:spLocks noGrp="1"/>
           </p:cNvSpPr>
@@ -1912,7 +1968,7 @@
         <p:spPr>
           <a:xfrm>
             <a:off x="685800" y="4400640"/>
-            <a:ext cx="5486040" cy="3600000"/>
+            <a:ext cx="5485680" cy="3599640"/>
           </a:xfrm>
           <a:prstGeom prst="rect">
             <a:avLst/>
@@ -1943,7 +1999,7 @@
       </p:sp>
       <p:sp>
         <p:nvSpPr>
-          <p:cNvPr id="276" name="PlaceHolder 3"/>
+          <p:cNvPr id="292" name="PlaceHolder 3"/>
           <p:cNvSpPr>
             <a:spLocks noGrp="1"/>
           </p:cNvSpPr>
@@ -1954,7 +2010,7 @@
         <p:spPr>
           <a:xfrm>
             <a:off x="3884760" y="8685360"/>
-            <a:ext cx="2971440" cy="458280"/>
+            <a:ext cx="2971080" cy="457920"/>
           </a:xfrm>
           <a:prstGeom prst="rect">
             <a:avLst/>
@@ -1974,6 +2030,9 @@
                 <a:spcPct val="100000"/>
               </a:lnSpc>
               <a:buNone/>
+              <a:tabLst>
+                <a:tab algn="l" pos="0"/>
+              </a:tabLst>
               <a:defRPr b="0" lang="en-US" sz="1200" strike="noStrike" u="none">
                 <a:solidFill>
                   <a:schemeClr val="dk1"/>
@@ -1991,8 +2050,11 @@
                 <a:spcPct val="100000"/>
               </a:lnSpc>
               <a:buNone/>
-            </a:pPr>
-            <a:fld id="{CB73446F-B84F-45BA-8AE6-65E5C6F7E39F}" type="slidenum">
+              <a:tabLst>
+                <a:tab algn="l" pos="0"/>
+              </a:tabLst>
+            </a:pPr>
+            <a:fld id="{1CBD5C1D-3381-49A2-B38C-59728594827D}" type="slidenum">
               <a:rPr b="0" lang="en-US" sz="1200" strike="noStrike" u="none">
                 <a:solidFill>
                   <a:schemeClr val="dk1"/>
@@ -2002,7 +2064,7 @@
                 <a:latin typeface="+mn-lt"/>
                 <a:ea typeface="+mn-ea"/>
               </a:rPr>
-              <a:t>19</a:t>
+              <a:t>&lt;número&gt;</a:t>
             </a:fld>
             <a:endParaRPr b="0" lang="pt-BR" sz="1200" strike="noStrike" u="none">
               <a:solidFill>
@@ -2039,7 +2101,7 @@
       </p:grpSpPr>
       <p:sp>
         <p:nvSpPr>
-          <p:cNvPr id="277" name="PlaceHolder 1"/>
+          <p:cNvPr id="293" name="PlaceHolder 1"/>
           <p:cNvSpPr>
             <a:spLocks noGrp="1"/>
           </p:cNvSpPr>
@@ -2050,19 +2112,19 @@
         <p:spPr>
           <a:xfrm>
             <a:off x="685800" y="1143000"/>
-            <a:ext cx="5486040" cy="3085920"/>
-          </a:xfrm>
-          <a:prstGeom prst="rect">
-            <a:avLst/>
-          </a:prstGeom>
-          <a:ln w="0">
-            <a:noFill/>
-          </a:ln>
-        </p:spPr>
-      </p:sp>
-      <p:sp>
-        <p:nvSpPr>
-          <p:cNvPr id="278" name="PlaceHolder 2"/>
+            <a:ext cx="5485680" cy="3085560"/>
+          </a:xfrm>
+          <a:prstGeom prst="rect">
+            <a:avLst/>
+          </a:prstGeom>
+          <a:ln w="0">
+            <a:noFill/>
+          </a:ln>
+        </p:spPr>
+      </p:sp>
+      <p:sp>
+        <p:nvSpPr>
+          <p:cNvPr id="294" name="PlaceHolder 2"/>
           <p:cNvSpPr>
             <a:spLocks noGrp="1"/>
           </p:cNvSpPr>
@@ -2073,7 +2135,7 @@
         <p:spPr>
           <a:xfrm>
             <a:off x="685800" y="4400640"/>
-            <a:ext cx="5486040" cy="3600000"/>
+            <a:ext cx="5485680" cy="3599640"/>
           </a:xfrm>
           <a:prstGeom prst="rect">
             <a:avLst/>
@@ -2104,7 +2166,7 @@
       </p:sp>
       <p:sp>
         <p:nvSpPr>
-          <p:cNvPr id="279" name="PlaceHolder 3"/>
+          <p:cNvPr id="295" name="PlaceHolder 3"/>
           <p:cNvSpPr>
             <a:spLocks noGrp="1"/>
           </p:cNvSpPr>
@@ -2115,7 +2177,7 @@
         <p:spPr>
           <a:xfrm>
             <a:off x="3884760" y="8685360"/>
-            <a:ext cx="2971440" cy="458280"/>
+            <a:ext cx="2971080" cy="457920"/>
           </a:xfrm>
           <a:prstGeom prst="rect">
             <a:avLst/>
@@ -2135,6 +2197,9 @@
                 <a:spcPct val="100000"/>
               </a:lnSpc>
               <a:buNone/>
+              <a:tabLst>
+                <a:tab algn="l" pos="0"/>
+              </a:tabLst>
               <a:defRPr b="0" lang="en-US" sz="1200" strike="noStrike" u="none">
                 <a:solidFill>
                   <a:schemeClr val="dk1"/>
@@ -2152,8 +2217,11 @@
                 <a:spcPct val="100000"/>
               </a:lnSpc>
               <a:buNone/>
-            </a:pPr>
-            <a:fld id="{CC317912-5472-4B96-BC25-3B7531957D3C}" type="slidenum">
+              <a:tabLst>
+                <a:tab algn="l" pos="0"/>
+              </a:tabLst>
+            </a:pPr>
+            <a:fld id="{CCF919D2-2437-47FF-9CC3-5D9A9F1B8BF0}" type="slidenum">
               <a:rPr b="0" lang="en-US" sz="1200" strike="noStrike" u="none">
                 <a:solidFill>
                   <a:schemeClr val="dk1"/>
@@ -2200,7 +2268,7 @@
       </p:grpSpPr>
       <p:sp>
         <p:nvSpPr>
-          <p:cNvPr id="244" name="PlaceHolder 1"/>
+          <p:cNvPr id="260" name="PlaceHolder 1"/>
           <p:cNvSpPr>
             <a:spLocks noGrp="1"/>
           </p:cNvSpPr>
@@ -2211,19 +2279,19 @@
         <p:spPr>
           <a:xfrm>
             <a:off x="685800" y="1143000"/>
-            <a:ext cx="5486040" cy="3085920"/>
-          </a:xfrm>
-          <a:prstGeom prst="rect">
-            <a:avLst/>
-          </a:prstGeom>
-          <a:ln w="0">
-            <a:noFill/>
-          </a:ln>
-        </p:spPr>
-      </p:sp>
-      <p:sp>
-        <p:nvSpPr>
-          <p:cNvPr id="245" name="PlaceHolder 2"/>
+            <a:ext cx="5485680" cy="3085560"/>
+          </a:xfrm>
+          <a:prstGeom prst="rect">
+            <a:avLst/>
+          </a:prstGeom>
+          <a:ln w="0">
+            <a:noFill/>
+          </a:ln>
+        </p:spPr>
+      </p:sp>
+      <p:sp>
+        <p:nvSpPr>
+          <p:cNvPr id="261" name="PlaceHolder 2"/>
           <p:cNvSpPr>
             <a:spLocks noGrp="1"/>
           </p:cNvSpPr>
@@ -2234,7 +2302,7 @@
         <p:spPr>
           <a:xfrm>
             <a:off x="685800" y="4400640"/>
-            <a:ext cx="5486040" cy="3600000"/>
+            <a:ext cx="5485680" cy="3599640"/>
           </a:xfrm>
           <a:prstGeom prst="rect">
             <a:avLst/>
@@ -2265,7 +2333,7 @@
       </p:sp>
       <p:sp>
         <p:nvSpPr>
-          <p:cNvPr id="246" name="PlaceHolder 3"/>
+          <p:cNvPr id="262" name="PlaceHolder 3"/>
           <p:cNvSpPr>
             <a:spLocks noGrp="1"/>
           </p:cNvSpPr>
@@ -2276,7 +2344,7 @@
         <p:spPr>
           <a:xfrm>
             <a:off x="3884760" y="8685360"/>
-            <a:ext cx="2971440" cy="458280"/>
+            <a:ext cx="2971080" cy="457920"/>
           </a:xfrm>
           <a:prstGeom prst="rect">
             <a:avLst/>
@@ -2296,6 +2364,9 @@
                 <a:spcPct val="100000"/>
               </a:lnSpc>
               <a:buNone/>
+              <a:tabLst>
+                <a:tab algn="l" pos="0"/>
+              </a:tabLst>
               <a:defRPr b="0" lang="en-US" sz="1200" strike="noStrike" u="none">
                 <a:solidFill>
                   <a:schemeClr val="dk1"/>
@@ -2313,8 +2384,11 @@
                 <a:spcPct val="100000"/>
               </a:lnSpc>
               <a:buNone/>
-            </a:pPr>
-            <a:fld id="{4CC32A9B-C35E-465F-9BD8-7F0198D51AA0}" type="slidenum">
+              <a:tabLst>
+                <a:tab algn="l" pos="0"/>
+              </a:tabLst>
+            </a:pPr>
+            <a:fld id="{2B1B723F-41FB-440A-8F49-8F63DE57412F}" type="slidenum">
               <a:rPr b="0" lang="en-US" sz="1200" strike="noStrike" u="none">
                 <a:solidFill>
                   <a:schemeClr val="dk1"/>
@@ -2324,7 +2398,174 @@
                 <a:latin typeface="+mn-lt"/>
                 <a:ea typeface="+mn-ea"/>
               </a:rPr>
-              <a:t>19</a:t>
+              <a:t>20</a:t>
+            </a:fld>
+            <a:endParaRPr b="0" lang="pt-BR" sz="1200" strike="noStrike" u="none">
+              <a:solidFill>
+                <a:srgbClr val="000000"/>
+              </a:solidFill>
+              <a:effectLst/>
+              <a:uFillTx/>
+              <a:latin typeface="Times New Roman"/>
+            </a:endParaRPr>
+          </a:p>
+        </p:txBody>
+      </p:sp>
+    </p:spTree>
+  </p:cSld>
+</p:notes>
+</file>
+
+<file path=ppt/notesSlides/notesSlide20.xml><?xml version="1.0" encoding="utf-8"?>
+<p:notes xmlns:a="http://schemas.openxmlformats.org/drawingml/2006/main" xmlns:p="http://schemas.openxmlformats.org/presentationml/2006/main" xmlns:r="http://schemas.openxmlformats.org/officeDocument/2006/relationships" xmlns:p14="http://schemas.microsoft.com/office/powerpoint/2010/main" xmlns:p15="http://schemas.microsoft.com/office/powerpoint/2012/main" xmlns:mc="http://schemas.openxmlformats.org/markup-compatibility/2006">
+  <p:cSld>
+    <p:spTree>
+      <p:nvGrpSpPr>
+        <p:cNvPr id="1" name=""/>
+        <p:cNvGrpSpPr/>
+        <p:nvPr/>
+      </p:nvGrpSpPr>
+      <p:grpSpPr>
+        <a:xfrm>
+          <a:off x="0" y="0"/>
+          <a:ext cx="0" cy="0"/>
+          <a:chOff x="0" y="0"/>
+          <a:chExt cx="0" cy="0"/>
+        </a:xfrm>
+      </p:grpSpPr>
+      <p:sp>
+        <p:nvSpPr>
+          <p:cNvPr id="296" name="PlaceHolder 1"/>
+          <p:cNvSpPr>
+            <a:spLocks noGrp="1"/>
+          </p:cNvSpPr>
+          <p:nvPr>
+            <p:ph type="sldImg"/>
+          </p:nvPr>
+        </p:nvSpPr>
+        <p:spPr>
+          <a:xfrm>
+            <a:off x="685800" y="1143000"/>
+            <a:ext cx="5485680" cy="3085560"/>
+          </a:xfrm>
+          <a:prstGeom prst="rect">
+            <a:avLst/>
+          </a:prstGeom>
+          <a:ln w="0">
+            <a:noFill/>
+          </a:ln>
+        </p:spPr>
+      </p:sp>
+      <p:sp>
+        <p:nvSpPr>
+          <p:cNvPr id="297" name="PlaceHolder 2"/>
+          <p:cNvSpPr>
+            <a:spLocks noGrp="1"/>
+          </p:cNvSpPr>
+          <p:nvPr>
+            <p:ph type="body"/>
+          </p:nvPr>
+        </p:nvSpPr>
+        <p:spPr>
+          <a:xfrm>
+            <a:off x="685800" y="4400640"/>
+            <a:ext cx="5485680" cy="3599640"/>
+          </a:xfrm>
+          <a:prstGeom prst="rect">
+            <a:avLst/>
+          </a:prstGeom>
+          <a:noFill/>
+          <a:ln w="0">
+            <a:noFill/>
+          </a:ln>
+        </p:spPr>
+        <p:txBody>
+          <a:bodyPr lIns="91440" rIns="91440" tIns="45720" bIns="45720" anchor="t">
+            <a:noAutofit/>
+          </a:bodyPr>
+          <a:p>
+            <a:pPr indent="0">
+              <a:buNone/>
+            </a:pPr>
+            <a:endParaRPr b="0" lang="pt-BR" sz="1800" strike="noStrike" u="none">
+              <a:solidFill>
+                <a:srgbClr val="000000"/>
+              </a:solidFill>
+              <a:effectLst/>
+              <a:uFillTx/>
+              <a:latin typeface="Arial"/>
+            </a:endParaRPr>
+          </a:p>
+        </p:txBody>
+      </p:sp>
+      <p:sp>
+        <p:nvSpPr>
+          <p:cNvPr id="298" name="PlaceHolder 3"/>
+          <p:cNvSpPr>
+            <a:spLocks noGrp="1"/>
+          </p:cNvSpPr>
+          <p:nvPr>
+            <p:ph type="sldNum" idx="17"/>
+          </p:nvPr>
+        </p:nvSpPr>
+        <p:spPr>
+          <a:xfrm>
+            <a:off x="3884760" y="8685360"/>
+            <a:ext cx="2971080" cy="457920"/>
+          </a:xfrm>
+          <a:prstGeom prst="rect">
+            <a:avLst/>
+          </a:prstGeom>
+          <a:noFill/>
+          <a:ln w="0">
+            <a:noFill/>
+          </a:ln>
+        </p:spPr>
+        <p:txBody>
+          <a:bodyPr lIns="91440" rIns="91440" tIns="45720" bIns="45720" anchor="b">
+            <a:noAutofit/>
+          </a:bodyPr>
+          <a:lstStyle>
+            <a:lvl1pPr indent="0" algn="r" defTabSz="914400">
+              <a:lnSpc>
+                <a:spcPct val="100000"/>
+              </a:lnSpc>
+              <a:buNone/>
+              <a:tabLst>
+                <a:tab algn="l" pos="0"/>
+              </a:tabLst>
+              <a:defRPr b="0" lang="en-US" sz="1200" strike="noStrike" u="none">
+                <a:solidFill>
+                  <a:schemeClr val="dk1"/>
+                </a:solidFill>
+                <a:effectLst/>
+                <a:uFillTx/>
+                <a:latin typeface="+mn-lt"/>
+                <a:ea typeface="+mn-ea"/>
+              </a:defRPr>
+            </a:lvl1pPr>
+          </a:lstStyle>
+          <a:p>
+            <a:pPr indent="0" algn="r" defTabSz="914400">
+              <a:lnSpc>
+                <a:spcPct val="100000"/>
+              </a:lnSpc>
+              <a:buNone/>
+              <a:tabLst>
+                <a:tab algn="l" pos="0"/>
+              </a:tabLst>
+            </a:pPr>
+            <a:fld id="{2185F44B-1F7F-443E-9817-56994E946209}" type="slidenum">
+              <a:rPr b="0" lang="en-US" sz="1200" strike="noStrike" u="none">
+                <a:solidFill>
+                  <a:schemeClr val="dk1"/>
+                </a:solidFill>
+                <a:effectLst/>
+                <a:uFillTx/>
+                <a:latin typeface="+mn-lt"/>
+                <a:ea typeface="+mn-ea"/>
+              </a:rPr>
+              <a:t>&lt;número&gt;</a:t>
             </a:fld>
             <a:endParaRPr b="0" lang="pt-BR" sz="1200" strike="noStrike" u="none">
               <a:solidFill>
@@ -2361,7 +2602,7 @@
       </p:grpSpPr>
       <p:sp>
         <p:nvSpPr>
-          <p:cNvPr id="247" name="PlaceHolder 1"/>
+          <p:cNvPr id="263" name="PlaceHolder 1"/>
           <p:cNvSpPr>
             <a:spLocks noGrp="1"/>
           </p:cNvSpPr>
@@ -2372,19 +2613,19 @@
         <p:spPr>
           <a:xfrm>
             <a:off x="685800" y="1143000"/>
-            <a:ext cx="5486040" cy="3085920"/>
-          </a:xfrm>
-          <a:prstGeom prst="rect">
-            <a:avLst/>
-          </a:prstGeom>
-          <a:ln w="0">
-            <a:noFill/>
-          </a:ln>
-        </p:spPr>
-      </p:sp>
-      <p:sp>
-        <p:nvSpPr>
-          <p:cNvPr id="248" name="PlaceHolder 2"/>
+            <a:ext cx="5485680" cy="3085560"/>
+          </a:xfrm>
+          <a:prstGeom prst="rect">
+            <a:avLst/>
+          </a:prstGeom>
+          <a:ln w="0">
+            <a:noFill/>
+          </a:ln>
+        </p:spPr>
+      </p:sp>
+      <p:sp>
+        <p:nvSpPr>
+          <p:cNvPr id="264" name="PlaceHolder 2"/>
           <p:cNvSpPr>
             <a:spLocks noGrp="1"/>
           </p:cNvSpPr>
@@ -2395,7 +2636,7 @@
         <p:spPr>
           <a:xfrm>
             <a:off x="685800" y="4400640"/>
-            <a:ext cx="5486040" cy="3600000"/>
+            <a:ext cx="5485680" cy="3599640"/>
           </a:xfrm>
           <a:prstGeom prst="rect">
             <a:avLst/>
@@ -2426,7 +2667,7 @@
       </p:sp>
       <p:sp>
         <p:nvSpPr>
-          <p:cNvPr id="249" name="PlaceHolder 3"/>
+          <p:cNvPr id="265" name="PlaceHolder 3"/>
           <p:cNvSpPr>
             <a:spLocks noGrp="1"/>
           </p:cNvSpPr>
@@ -2437,7 +2678,7 @@
         <p:spPr>
           <a:xfrm>
             <a:off x="3884760" y="8685360"/>
-            <a:ext cx="2971440" cy="458280"/>
+            <a:ext cx="2971080" cy="457920"/>
           </a:xfrm>
           <a:prstGeom prst="rect">
             <a:avLst/>
@@ -2457,6 +2698,9 @@
                 <a:spcPct val="100000"/>
               </a:lnSpc>
               <a:buNone/>
+              <a:tabLst>
+                <a:tab algn="l" pos="0"/>
+              </a:tabLst>
               <a:defRPr b="0" lang="en-US" sz="1200" strike="noStrike" u="none">
                 <a:solidFill>
                   <a:schemeClr val="dk1"/>
@@ -2474,8 +2718,11 @@
                 <a:spcPct val="100000"/>
               </a:lnSpc>
               <a:buNone/>
-            </a:pPr>
-            <a:fld id="{57733C6C-60EE-44B8-A121-0BCD57AFB698}" type="slidenum">
+              <a:tabLst>
+                <a:tab algn="l" pos="0"/>
+              </a:tabLst>
+            </a:pPr>
+            <a:fld id="{AF7B8998-5E03-45A9-90C2-2DDDA525BF24}" type="slidenum">
               <a:rPr b="0" lang="en-US" sz="1200" strike="noStrike" u="none">
                 <a:solidFill>
                   <a:schemeClr val="dk1"/>
@@ -2485,7 +2732,7 @@
                 <a:latin typeface="+mn-lt"/>
                 <a:ea typeface="+mn-ea"/>
               </a:rPr>
-              <a:t>19</a:t>
+              <a:t>20</a:t>
             </a:fld>
             <a:endParaRPr b="0" lang="pt-BR" sz="1200" strike="noStrike" u="none">
               <a:solidFill>
@@ -2562,7 +2809,7 @@
         <p:spPr>
           <a:xfrm>
             <a:off x="609480" y="273600"/>
-            <a:ext cx="10972080" cy="1144800"/>
+            <a:ext cx="10972440" cy="1144800"/>
           </a:xfrm>
           <a:prstGeom prst="rect">
             <a:avLst/>
@@ -2577,27 +2824,27 @@
             <a:noAutofit/>
           </a:bodyPr>
           <a:p>
-            <a:pPr indent="0">
+            <a:pPr indent="0" algn="ctr">
               <a:buNone/>
             </a:pPr>
             <a:r>
-              <a:rPr b="0" lang="pt-BR" sz="1800" strike="noStrike" u="none">
-                <a:solidFill>
-                  <a:schemeClr val="dk1"/>
-                </a:solidFill>
-                <a:effectLst/>
-                <a:uFillTx/>
-                <a:latin typeface="Aptos"/>
+              <a:rPr b="0" lang="pt-BR" sz="4400" strike="noStrike" u="none">
+                <a:solidFill>
+                  <a:srgbClr val="000000"/>
+                </a:solidFill>
+                <a:effectLst/>
+                <a:uFillTx/>
+                <a:latin typeface="Arial"/>
               </a:rPr>
               <a:t>Clique para editar o formato do texto do título</a:t>
             </a:r>
-            <a:endParaRPr b="0" lang="pt-BR" sz="1800" strike="noStrike" u="none">
-              <a:solidFill>
-                <a:schemeClr val="dk1"/>
-              </a:solidFill>
-              <a:effectLst/>
-              <a:uFillTx/>
-              <a:latin typeface="Aptos"/>
+            <a:endParaRPr b="0" lang="pt-BR" sz="4400" strike="noStrike" u="none">
+              <a:solidFill>
+                <a:srgbClr val="000000"/>
+              </a:solidFill>
+              <a:effectLst/>
+              <a:uFillTx/>
+              <a:latin typeface="Arial"/>
             </a:endParaRPr>
           </a:p>
         </p:txBody>
@@ -2615,7 +2862,7 @@
         <p:spPr>
           <a:xfrm>
             <a:off x="609480" y="1604520"/>
-            <a:ext cx="10972080" cy="3977280"/>
+            <a:ext cx="10972440" cy="3977280"/>
           </a:xfrm>
           <a:prstGeom prst="rect">
             <a:avLst/>
@@ -2644,21 +2891,21 @@
             <a:r>
               <a:rPr b="0" lang="pt-BR" sz="3200" strike="noStrike" u="none">
                 <a:solidFill>
-                  <a:schemeClr val="dk1"/>
-                </a:solidFill>
-                <a:effectLst/>
-                <a:uFillTx/>
-                <a:latin typeface="Aptos"/>
+                  <a:srgbClr val="000000"/>
+                </a:solidFill>
+                <a:effectLst/>
+                <a:uFillTx/>
+                <a:latin typeface="Arial"/>
               </a:rPr>
               <a:t>Clique para editar o formato de texto dos tópicos</a:t>
             </a:r>
             <a:endParaRPr b="0" lang="pt-BR" sz="3200" strike="noStrike" u="none">
               <a:solidFill>
-                <a:schemeClr val="dk1"/>
-              </a:solidFill>
-              <a:effectLst/>
-              <a:uFillTx/>
-              <a:latin typeface="Aptos"/>
+                <a:srgbClr val="000000"/>
+              </a:solidFill>
+              <a:effectLst/>
+              <a:uFillTx/>
+              <a:latin typeface="Arial"/>
             </a:endParaRPr>
           </a:p>
           <a:p>
@@ -2674,23 +2921,23 @@
               <a:buChar char=""/>
             </a:pPr>
             <a:r>
-              <a:rPr b="0" lang="pt-BR" sz="2400" strike="noStrike" u="none">
-                <a:solidFill>
-                  <a:schemeClr val="dk1"/>
-                </a:solidFill>
-                <a:effectLst/>
-                <a:uFillTx/>
-                <a:latin typeface="Aptos"/>
+              <a:rPr b="0" lang="pt-BR" sz="2800" strike="noStrike" u="none">
+                <a:solidFill>
+                  <a:srgbClr val="000000"/>
+                </a:solidFill>
+                <a:effectLst/>
+                <a:uFillTx/>
+                <a:latin typeface="Arial"/>
               </a:rPr>
               <a:t>2.º nível de tópicos</a:t>
             </a:r>
-            <a:endParaRPr b="0" lang="pt-BR" sz="2400" strike="noStrike" u="none">
-              <a:solidFill>
-                <a:schemeClr val="dk1"/>
-              </a:solidFill>
-              <a:effectLst/>
-              <a:uFillTx/>
-              <a:latin typeface="Aptos"/>
+            <a:endParaRPr b="0" lang="pt-BR" sz="2800" strike="noStrike" u="none">
+              <a:solidFill>
+                <a:srgbClr val="000000"/>
+              </a:solidFill>
+              <a:effectLst/>
+              <a:uFillTx/>
+              <a:latin typeface="Arial"/>
             </a:endParaRPr>
           </a:p>
           <a:p>
@@ -2706,23 +2953,23 @@
               <a:buChar char=""/>
             </a:pPr>
             <a:r>
-              <a:rPr b="0" lang="pt-BR" sz="2000" strike="noStrike" u="none">
-                <a:solidFill>
-                  <a:schemeClr val="dk1"/>
-                </a:solidFill>
-                <a:effectLst/>
-                <a:uFillTx/>
-                <a:latin typeface="Aptos"/>
+              <a:rPr b="0" lang="pt-BR" sz="2400" strike="noStrike" u="none">
+                <a:solidFill>
+                  <a:srgbClr val="000000"/>
+                </a:solidFill>
+                <a:effectLst/>
+                <a:uFillTx/>
+                <a:latin typeface="Arial"/>
               </a:rPr>
               <a:t>3.º nível de tópicos</a:t>
             </a:r>
-            <a:endParaRPr b="0" lang="pt-BR" sz="2000" strike="noStrike" u="none">
-              <a:solidFill>
-                <a:schemeClr val="dk1"/>
-              </a:solidFill>
-              <a:effectLst/>
-              <a:uFillTx/>
-              <a:latin typeface="Aptos"/>
+            <a:endParaRPr b="0" lang="pt-BR" sz="2400" strike="noStrike" u="none">
+              <a:solidFill>
+                <a:srgbClr val="000000"/>
+              </a:solidFill>
+              <a:effectLst/>
+              <a:uFillTx/>
+              <a:latin typeface="Arial"/>
             </a:endParaRPr>
           </a:p>
           <a:p>
@@ -2740,21 +2987,21 @@
             <a:r>
               <a:rPr b="0" lang="pt-BR" sz="2000" strike="noStrike" u="none">
                 <a:solidFill>
-                  <a:schemeClr val="dk1"/>
-                </a:solidFill>
-                <a:effectLst/>
-                <a:uFillTx/>
-                <a:latin typeface="Aptos"/>
+                  <a:srgbClr val="000000"/>
+                </a:solidFill>
+                <a:effectLst/>
+                <a:uFillTx/>
+                <a:latin typeface="Arial"/>
               </a:rPr>
               <a:t>4.º nível de tópicos</a:t>
             </a:r>
             <a:endParaRPr b="0" lang="pt-BR" sz="2000" strike="noStrike" u="none">
               <a:solidFill>
-                <a:schemeClr val="dk1"/>
-              </a:solidFill>
-              <a:effectLst/>
-              <a:uFillTx/>
-              <a:latin typeface="Aptos"/>
+                <a:srgbClr val="000000"/>
+              </a:solidFill>
+              <a:effectLst/>
+              <a:uFillTx/>
+              <a:latin typeface="Arial"/>
             </a:endParaRPr>
           </a:p>
           <a:p>
@@ -2772,21 +3019,21 @@
             <a:r>
               <a:rPr b="0" lang="pt-BR" sz="2000" strike="noStrike" u="none">
                 <a:solidFill>
-                  <a:schemeClr val="dk1"/>
-                </a:solidFill>
-                <a:effectLst/>
-                <a:uFillTx/>
-                <a:latin typeface="Aptos"/>
+                  <a:srgbClr val="000000"/>
+                </a:solidFill>
+                <a:effectLst/>
+                <a:uFillTx/>
+                <a:latin typeface="Arial"/>
               </a:rPr>
               <a:t>5.º nível de tópicos</a:t>
             </a:r>
             <a:endParaRPr b="0" lang="pt-BR" sz="2000" strike="noStrike" u="none">
               <a:solidFill>
-                <a:schemeClr val="dk1"/>
-              </a:solidFill>
-              <a:effectLst/>
-              <a:uFillTx/>
-              <a:latin typeface="Aptos"/>
+                <a:srgbClr val="000000"/>
+              </a:solidFill>
+              <a:effectLst/>
+              <a:uFillTx/>
+              <a:latin typeface="Arial"/>
             </a:endParaRPr>
           </a:p>
           <a:p>
@@ -2804,21 +3051,21 @@
             <a:r>
               <a:rPr b="0" lang="pt-BR" sz="2000" strike="noStrike" u="none">
                 <a:solidFill>
-                  <a:schemeClr val="dk1"/>
-                </a:solidFill>
-                <a:effectLst/>
-                <a:uFillTx/>
-                <a:latin typeface="Aptos"/>
+                  <a:srgbClr val="000000"/>
+                </a:solidFill>
+                <a:effectLst/>
+                <a:uFillTx/>
+                <a:latin typeface="Arial"/>
               </a:rPr>
               <a:t>6.º nível de tópicos</a:t>
             </a:r>
             <a:endParaRPr b="0" lang="pt-BR" sz="2000" strike="noStrike" u="none">
               <a:solidFill>
-                <a:schemeClr val="dk1"/>
-              </a:solidFill>
-              <a:effectLst/>
-              <a:uFillTx/>
-              <a:latin typeface="Aptos"/>
+                <a:srgbClr val="000000"/>
+              </a:solidFill>
+              <a:effectLst/>
+              <a:uFillTx/>
+              <a:latin typeface="Arial"/>
             </a:endParaRPr>
           </a:p>
           <a:p>
@@ -2836,21 +3083,21 @@
             <a:r>
               <a:rPr b="0" lang="pt-BR" sz="2000" strike="noStrike" u="none">
                 <a:solidFill>
-                  <a:schemeClr val="dk1"/>
-                </a:solidFill>
-                <a:effectLst/>
-                <a:uFillTx/>
-                <a:latin typeface="Aptos"/>
+                  <a:srgbClr val="000000"/>
+                </a:solidFill>
+                <a:effectLst/>
+                <a:uFillTx/>
+                <a:latin typeface="Arial"/>
               </a:rPr>
               <a:t>7.º nível de tópicos</a:t>
             </a:r>
             <a:endParaRPr b="0" lang="pt-BR" sz="2000" strike="noStrike" u="none">
               <a:solidFill>
-                <a:schemeClr val="dk1"/>
-              </a:solidFill>
-              <a:effectLst/>
-              <a:uFillTx/>
-              <a:latin typeface="Aptos"/>
+                <a:srgbClr val="000000"/>
+              </a:solidFill>
+              <a:effectLst/>
+              <a:uFillTx/>
+              <a:latin typeface="Arial"/>
             </a:endParaRPr>
           </a:p>
         </p:txBody>
@@ -2897,7 +3144,7 @@
         <p:spPr>
           <a:xfrm>
             <a:off x="640080" y="685800"/>
-            <a:ext cx="1005480" cy="1005480"/>
+            <a:ext cx="1005120" cy="1005120"/>
           </a:xfrm>
           <a:prstGeom prst="rect">
             <a:avLst/>
@@ -2958,7 +3205,7 @@
         <p:spPr>
           <a:xfrm>
             <a:off x="1828800" y="749880"/>
-            <a:ext cx="9417960" cy="594000"/>
+            <a:ext cx="9417600" cy="593640"/>
           </a:xfrm>
           <a:prstGeom prst="rect">
             <a:avLst/>
@@ -3019,7 +3266,7 @@
         <p:spPr>
           <a:xfrm>
             <a:off x="1828800" y="1481400"/>
-            <a:ext cx="9417960" cy="411120"/>
+            <a:ext cx="9417600" cy="410760"/>
           </a:xfrm>
           <a:prstGeom prst="rect">
             <a:avLst/>
@@ -3080,7 +3327,7 @@
         <p:spPr>
           <a:xfrm>
             <a:off x="777240" y="2880360"/>
-            <a:ext cx="10606680" cy="914040"/>
+            <a:ext cx="10606320" cy="913680"/>
           </a:xfrm>
           <a:prstGeom prst="rect">
             <a:avLst/>
@@ -3141,7 +3388,7 @@
         <p:spPr>
           <a:xfrm>
             <a:off x="777240" y="4389120"/>
-            <a:ext cx="10606680" cy="502560"/>
+            <a:ext cx="10606320" cy="502200"/>
           </a:xfrm>
           <a:prstGeom prst="rect">
             <a:avLst/>
@@ -3202,7 +3449,7 @@
         <p:spPr>
           <a:xfrm>
             <a:off x="777240" y="5623560"/>
-            <a:ext cx="10606680" cy="502560"/>
+            <a:ext cx="10606320" cy="502200"/>
           </a:xfrm>
           <a:prstGeom prst="rect">
             <a:avLst/>
@@ -3300,7 +3547,7 @@
         <p:spPr>
           <a:xfrm>
             <a:off x="502920" y="164520"/>
-            <a:ext cx="7131960" cy="228240"/>
+            <a:ext cx="7131600" cy="227880"/>
           </a:xfrm>
           <a:prstGeom prst="rect">
             <a:avLst/>
@@ -3361,7 +3608,7 @@
         <p:spPr>
           <a:xfrm>
             <a:off x="7955280" y="164520"/>
-            <a:ext cx="2925720" cy="228240"/>
+            <a:ext cx="2925360" cy="227880"/>
           </a:xfrm>
           <a:prstGeom prst="rect">
             <a:avLst/>
@@ -3422,7 +3669,7 @@
         <p:spPr>
           <a:xfrm>
             <a:off x="11064240" y="109800"/>
-            <a:ext cx="731160" cy="319680"/>
+            <a:ext cx="730800" cy="319320"/>
           </a:xfrm>
           <a:prstGeom prst="rect">
             <a:avLst/>
@@ -3526,7 +3773,7 @@
         <p:spPr>
           <a:xfrm>
             <a:off x="530280" y="749880"/>
-            <a:ext cx="411120" cy="502560"/>
+            <a:ext cx="410760" cy="502200"/>
           </a:xfrm>
           <a:prstGeom prst="rect">
             <a:avLst/>
@@ -3587,7 +3834,7 @@
         <p:spPr>
           <a:xfrm>
             <a:off x="960120" y="859680"/>
-            <a:ext cx="731160" cy="228240"/>
+            <a:ext cx="730800" cy="227880"/>
           </a:xfrm>
           <a:prstGeom prst="rect">
             <a:avLst/>
@@ -3648,7 +3895,7 @@
         <p:spPr>
           <a:xfrm>
             <a:off x="960120" y="667440"/>
-            <a:ext cx="10698120" cy="639720"/>
+            <a:ext cx="10697760" cy="639360"/>
           </a:xfrm>
           <a:prstGeom prst="rect">
             <a:avLst/>
@@ -3709,7 +3956,7 @@
         <p:spPr>
           <a:xfrm>
             <a:off x="594360" y="1481400"/>
-            <a:ext cx="5120280" cy="255600"/>
+            <a:ext cx="5119920" cy="255240"/>
           </a:xfrm>
           <a:prstGeom prst="rect">
             <a:avLst/>
@@ -3770,7 +4017,7 @@
         <p:spPr>
           <a:xfrm>
             <a:off x="594360" y="1783080"/>
-            <a:ext cx="5074560" cy="1234080"/>
+            <a:ext cx="5074200" cy="1233720"/>
           </a:xfrm>
           <a:prstGeom prst="rect">
             <a:avLst/>
@@ -3894,7 +4141,7 @@
         <p:spPr>
           <a:xfrm>
             <a:off x="5925240" y="1481400"/>
-            <a:ext cx="5623200" cy="255600"/>
+            <a:ext cx="5622840" cy="255240"/>
           </a:xfrm>
           <a:prstGeom prst="rect">
             <a:avLst/>
@@ -3955,7 +4202,7 @@
         <p:spPr>
           <a:xfrm>
             <a:off x="5925240" y="1755720"/>
-            <a:ext cx="5623200" cy="1371240"/>
+            <a:ext cx="5622840" cy="1370880"/>
           </a:xfrm>
           <a:prstGeom prst="rect">
             <a:avLst/>
@@ -4078,7 +4325,7 @@
         <p:spPr>
           <a:xfrm>
             <a:off x="594360" y="3364920"/>
-            <a:ext cx="11018160" cy="255600"/>
+            <a:ext cx="11017800" cy="255240"/>
           </a:xfrm>
           <a:prstGeom prst="rect">
             <a:avLst/>
@@ -4139,7 +4386,7 @@
         <p:spPr>
           <a:xfrm>
             <a:off x="594360" y="3675960"/>
-            <a:ext cx="11018160" cy="1234080"/>
+            <a:ext cx="11017800" cy="1233720"/>
           </a:xfrm>
           <a:prstGeom prst="rect">
             <a:avLst/>
@@ -4290,7 +4537,7 @@
         <p:spPr>
           <a:xfrm>
             <a:off x="594360" y="5074920"/>
-            <a:ext cx="11018160" cy="255600"/>
+            <a:ext cx="11017800" cy="255240"/>
           </a:xfrm>
           <a:prstGeom prst="rect">
             <a:avLst/>
@@ -4351,7 +4598,7 @@
         <p:spPr>
           <a:xfrm>
             <a:off x="594360" y="5376600"/>
-            <a:ext cx="11018160" cy="658080"/>
+            <a:ext cx="11017800" cy="657720"/>
           </a:xfrm>
           <a:prstGeom prst="rect">
             <a:avLst/>
@@ -4412,7 +4659,7 @@
         <p:spPr>
           <a:xfrm>
             <a:off x="594360" y="6263640"/>
-            <a:ext cx="11018160" cy="319680"/>
+            <a:ext cx="11017800" cy="319320"/>
           </a:xfrm>
           <a:prstGeom prst="rect">
             <a:avLst/>
@@ -4510,7 +4757,7 @@
         <p:spPr>
           <a:xfrm>
             <a:off x="502920" y="164520"/>
-            <a:ext cx="7131960" cy="228240"/>
+            <a:ext cx="7131600" cy="227880"/>
           </a:xfrm>
           <a:prstGeom prst="rect">
             <a:avLst/>
@@ -4571,7 +4818,7 @@
         <p:spPr>
           <a:xfrm>
             <a:off x="7955280" y="164520"/>
-            <a:ext cx="2925720" cy="228240"/>
+            <a:ext cx="2925360" cy="227880"/>
           </a:xfrm>
           <a:prstGeom prst="rect">
             <a:avLst/>
@@ -4632,7 +4879,7 @@
         <p:spPr>
           <a:xfrm>
             <a:off x="11064240" y="109800"/>
-            <a:ext cx="731160" cy="319680"/>
+            <a:ext cx="730800" cy="319320"/>
           </a:xfrm>
           <a:prstGeom prst="rect">
             <a:avLst/>
@@ -4736,7 +4983,7 @@
         <p:spPr>
           <a:xfrm>
             <a:off x="530280" y="749880"/>
-            <a:ext cx="411120" cy="502560"/>
+            <a:ext cx="410760" cy="502200"/>
           </a:xfrm>
           <a:prstGeom prst="rect">
             <a:avLst/>
@@ -4797,7 +5044,7 @@
         <p:spPr>
           <a:xfrm>
             <a:off x="960120" y="859680"/>
-            <a:ext cx="731160" cy="228240"/>
+            <a:ext cx="730800" cy="227880"/>
           </a:xfrm>
           <a:prstGeom prst="rect">
             <a:avLst/>
@@ -4858,7 +5105,7 @@
         <p:spPr>
           <a:xfrm>
             <a:off x="960120" y="667440"/>
-            <a:ext cx="10698120" cy="639720"/>
+            <a:ext cx="10697760" cy="639360"/>
           </a:xfrm>
           <a:prstGeom prst="rect">
             <a:avLst/>
@@ -4919,7 +5166,7 @@
         <p:spPr>
           <a:xfrm>
             <a:off x="594360" y="1481400"/>
-            <a:ext cx="5120280" cy="255600"/>
+            <a:ext cx="5119920" cy="255240"/>
           </a:xfrm>
           <a:prstGeom prst="rect">
             <a:avLst/>
@@ -4980,7 +5227,7 @@
         <p:spPr>
           <a:xfrm>
             <a:off x="594360" y="1783080"/>
-            <a:ext cx="5074560" cy="1234080"/>
+            <a:ext cx="5074200" cy="1233720"/>
           </a:xfrm>
           <a:prstGeom prst="rect">
             <a:avLst/>
@@ -5104,7 +5351,7 @@
         <p:spPr>
           <a:xfrm>
             <a:off x="5925240" y="1481400"/>
-            <a:ext cx="5623200" cy="255600"/>
+            <a:ext cx="5622840" cy="255240"/>
           </a:xfrm>
           <a:prstGeom prst="rect">
             <a:avLst/>
@@ -5165,7 +5412,7 @@
         <p:spPr>
           <a:xfrm>
             <a:off x="5925240" y="1755720"/>
-            <a:ext cx="5623200" cy="1371240"/>
+            <a:ext cx="5622840" cy="1370880"/>
           </a:xfrm>
           <a:prstGeom prst="rect">
             <a:avLst/>
@@ -5288,7 +5535,7 @@
         <p:spPr>
           <a:xfrm>
             <a:off x="594360" y="3364920"/>
-            <a:ext cx="11018160" cy="255600"/>
+            <a:ext cx="11017800" cy="255240"/>
           </a:xfrm>
           <a:prstGeom prst="rect">
             <a:avLst/>
@@ -5349,7 +5596,7 @@
         <p:spPr>
           <a:xfrm>
             <a:off x="594360" y="3675960"/>
-            <a:ext cx="11018160" cy="1234080"/>
+            <a:ext cx="11017800" cy="1233720"/>
           </a:xfrm>
           <a:prstGeom prst="rect">
             <a:avLst/>
@@ -5500,7 +5747,7 @@
         <p:spPr>
           <a:xfrm>
             <a:off x="594360" y="5074920"/>
-            <a:ext cx="11018160" cy="255600"/>
+            <a:ext cx="11017800" cy="255240"/>
           </a:xfrm>
           <a:prstGeom prst="rect">
             <a:avLst/>
@@ -5561,7 +5808,7 @@
         <p:spPr>
           <a:xfrm>
             <a:off x="594360" y="5376600"/>
-            <a:ext cx="11018160" cy="658080"/>
+            <a:ext cx="11017800" cy="657720"/>
           </a:xfrm>
           <a:prstGeom prst="rect">
             <a:avLst/>
@@ -5622,7 +5869,7 @@
         <p:spPr>
           <a:xfrm>
             <a:off x="594360" y="6263640"/>
-            <a:ext cx="11018160" cy="319680"/>
+            <a:ext cx="11017800" cy="319320"/>
           </a:xfrm>
           <a:prstGeom prst="rect">
             <a:avLst/>
@@ -5720,7 +5967,7 @@
         <p:spPr>
           <a:xfrm>
             <a:off x="502920" y="164520"/>
-            <a:ext cx="7131960" cy="228240"/>
+            <a:ext cx="7131600" cy="227880"/>
           </a:xfrm>
           <a:prstGeom prst="rect">
             <a:avLst/>
@@ -5781,7 +6028,7 @@
         <p:spPr>
           <a:xfrm>
             <a:off x="7955280" y="164520"/>
-            <a:ext cx="2925720" cy="228240"/>
+            <a:ext cx="2925360" cy="227880"/>
           </a:xfrm>
           <a:prstGeom prst="rect">
             <a:avLst/>
@@ -5842,7 +6089,7 @@
         <p:spPr>
           <a:xfrm>
             <a:off x="11064240" y="109800"/>
-            <a:ext cx="731160" cy="319680"/>
+            <a:ext cx="730800" cy="319320"/>
           </a:xfrm>
           <a:prstGeom prst="rect">
             <a:avLst/>
@@ -5946,7 +6193,7 @@
         <p:spPr>
           <a:xfrm>
             <a:off x="530280" y="749880"/>
-            <a:ext cx="411120" cy="502560"/>
+            <a:ext cx="410760" cy="502200"/>
           </a:xfrm>
           <a:prstGeom prst="rect">
             <a:avLst/>
@@ -6007,7 +6254,7 @@
         <p:spPr>
           <a:xfrm>
             <a:off x="960120" y="859680"/>
-            <a:ext cx="731160" cy="228240"/>
+            <a:ext cx="730800" cy="227880"/>
           </a:xfrm>
           <a:prstGeom prst="rect">
             <a:avLst/>
@@ -6068,7 +6315,7 @@
         <p:spPr>
           <a:xfrm>
             <a:off x="960120" y="667440"/>
-            <a:ext cx="10698120" cy="639720"/>
+            <a:ext cx="10697760" cy="639360"/>
           </a:xfrm>
           <a:prstGeom prst="rect">
             <a:avLst/>
@@ -6129,7 +6376,7 @@
         <p:spPr>
           <a:xfrm>
             <a:off x="594360" y="1481400"/>
-            <a:ext cx="5120280" cy="255600"/>
+            <a:ext cx="5119920" cy="255240"/>
           </a:xfrm>
           <a:prstGeom prst="rect">
             <a:avLst/>
@@ -6190,7 +6437,7 @@
         <p:spPr>
           <a:xfrm>
             <a:off x="594360" y="1783080"/>
-            <a:ext cx="5074560" cy="1234080"/>
+            <a:ext cx="5074200" cy="1233720"/>
           </a:xfrm>
           <a:prstGeom prst="rect">
             <a:avLst/>
@@ -6314,7 +6561,7 @@
         <p:spPr>
           <a:xfrm>
             <a:off x="5925240" y="1481400"/>
-            <a:ext cx="5623200" cy="255600"/>
+            <a:ext cx="5622840" cy="255240"/>
           </a:xfrm>
           <a:prstGeom prst="rect">
             <a:avLst/>
@@ -6375,7 +6622,7 @@
         <p:spPr>
           <a:xfrm>
             <a:off x="5925240" y="1755720"/>
-            <a:ext cx="5623200" cy="1371240"/>
+            <a:ext cx="5622840" cy="1370880"/>
           </a:xfrm>
           <a:prstGeom prst="rect">
             <a:avLst/>
@@ -6498,7 +6745,7 @@
         <p:spPr>
           <a:xfrm>
             <a:off x="594360" y="3364920"/>
-            <a:ext cx="11018160" cy="255600"/>
+            <a:ext cx="11017800" cy="255240"/>
           </a:xfrm>
           <a:prstGeom prst="rect">
             <a:avLst/>
@@ -6559,7 +6806,7 @@
         <p:spPr>
           <a:xfrm>
             <a:off x="594360" y="3675960"/>
-            <a:ext cx="11018160" cy="1234080"/>
+            <a:ext cx="11017800" cy="1233720"/>
           </a:xfrm>
           <a:prstGeom prst="rect">
             <a:avLst/>
@@ -6710,7 +6957,7 @@
         <p:spPr>
           <a:xfrm>
             <a:off x="594360" y="5074920"/>
-            <a:ext cx="11018160" cy="255600"/>
+            <a:ext cx="11017800" cy="255240"/>
           </a:xfrm>
           <a:prstGeom prst="rect">
             <a:avLst/>
@@ -6771,7 +7018,7 @@
         <p:spPr>
           <a:xfrm>
             <a:off x="594360" y="5376600"/>
-            <a:ext cx="11018160" cy="658080"/>
+            <a:ext cx="11017800" cy="657720"/>
           </a:xfrm>
           <a:prstGeom prst="rect">
             <a:avLst/>
@@ -6832,7 +7079,7 @@
         <p:spPr>
           <a:xfrm>
             <a:off x="594360" y="6263640"/>
-            <a:ext cx="11018160" cy="319680"/>
+            <a:ext cx="11017800" cy="319320"/>
           </a:xfrm>
           <a:prstGeom prst="rect">
             <a:avLst/>
@@ -6930,7 +7177,7 @@
         <p:spPr>
           <a:xfrm>
             <a:off x="502920" y="164520"/>
-            <a:ext cx="7131960" cy="228240"/>
+            <a:ext cx="7131600" cy="227880"/>
           </a:xfrm>
           <a:prstGeom prst="rect">
             <a:avLst/>
@@ -6991,7 +7238,7 @@
         <p:spPr>
           <a:xfrm>
             <a:off x="7955280" y="164520"/>
-            <a:ext cx="2925720" cy="228240"/>
+            <a:ext cx="2925360" cy="227880"/>
           </a:xfrm>
           <a:prstGeom prst="rect">
             <a:avLst/>
@@ -7052,7 +7299,7 @@
         <p:spPr>
           <a:xfrm>
             <a:off x="11064240" y="109800"/>
-            <a:ext cx="731160" cy="319680"/>
+            <a:ext cx="730800" cy="319320"/>
           </a:xfrm>
           <a:prstGeom prst="rect">
             <a:avLst/>
@@ -7156,7 +7403,7 @@
         <p:spPr>
           <a:xfrm>
             <a:off x="530280" y="749880"/>
-            <a:ext cx="411120" cy="502560"/>
+            <a:ext cx="410760" cy="502200"/>
           </a:xfrm>
           <a:prstGeom prst="rect">
             <a:avLst/>
@@ -7217,7 +7464,7 @@
         <p:spPr>
           <a:xfrm>
             <a:off x="960120" y="859680"/>
-            <a:ext cx="731160" cy="228240"/>
+            <a:ext cx="730800" cy="227880"/>
           </a:xfrm>
           <a:prstGeom prst="rect">
             <a:avLst/>
@@ -7278,7 +7525,7 @@
         <p:spPr>
           <a:xfrm>
             <a:off x="960120" y="667440"/>
-            <a:ext cx="10698120" cy="639720"/>
+            <a:ext cx="10697760" cy="639360"/>
           </a:xfrm>
           <a:prstGeom prst="rect">
             <a:avLst/>
@@ -7339,7 +7586,7 @@
         <p:spPr>
           <a:xfrm>
             <a:off x="594360" y="1481400"/>
-            <a:ext cx="5120280" cy="255600"/>
+            <a:ext cx="5119920" cy="255240"/>
           </a:xfrm>
           <a:prstGeom prst="rect">
             <a:avLst/>
@@ -7400,7 +7647,7 @@
         <p:spPr>
           <a:xfrm>
             <a:off x="594360" y="1783080"/>
-            <a:ext cx="5074560" cy="1234080"/>
+            <a:ext cx="5074200" cy="1233720"/>
           </a:xfrm>
           <a:prstGeom prst="rect">
             <a:avLst/>
@@ -7524,7 +7771,7 @@
         <p:spPr>
           <a:xfrm>
             <a:off x="5925240" y="1481400"/>
-            <a:ext cx="5623200" cy="255600"/>
+            <a:ext cx="5622840" cy="255240"/>
           </a:xfrm>
           <a:prstGeom prst="rect">
             <a:avLst/>
@@ -7585,7 +7832,7 @@
         <p:spPr>
           <a:xfrm>
             <a:off x="5925240" y="1755720"/>
-            <a:ext cx="5623200" cy="1371240"/>
+            <a:ext cx="5622840" cy="1370880"/>
           </a:xfrm>
           <a:prstGeom prst="rect">
             <a:avLst/>
@@ -7708,7 +7955,7 @@
         <p:spPr>
           <a:xfrm>
             <a:off x="594360" y="3364920"/>
-            <a:ext cx="11018160" cy="255600"/>
+            <a:ext cx="11017800" cy="255240"/>
           </a:xfrm>
           <a:prstGeom prst="rect">
             <a:avLst/>
@@ -7769,7 +8016,7 @@
         <p:spPr>
           <a:xfrm>
             <a:off x="594360" y="3675960"/>
-            <a:ext cx="11018160" cy="1234080"/>
+            <a:ext cx="11017800" cy="1233720"/>
           </a:xfrm>
           <a:prstGeom prst="rect">
             <a:avLst/>
@@ -7920,7 +8167,7 @@
         <p:spPr>
           <a:xfrm>
             <a:off x="594360" y="5074920"/>
-            <a:ext cx="11018160" cy="255600"/>
+            <a:ext cx="11017800" cy="255240"/>
           </a:xfrm>
           <a:prstGeom prst="rect">
             <a:avLst/>
@@ -7981,7 +8228,7 @@
         <p:spPr>
           <a:xfrm>
             <a:off x="594360" y="5376600"/>
-            <a:ext cx="11018160" cy="658080"/>
+            <a:ext cx="11017800" cy="657720"/>
           </a:xfrm>
           <a:prstGeom prst="rect">
             <a:avLst/>
@@ -8042,7 +8289,7 @@
         <p:spPr>
           <a:xfrm>
             <a:off x="594360" y="6263640"/>
-            <a:ext cx="11018160" cy="319680"/>
+            <a:ext cx="11017800" cy="319320"/>
           </a:xfrm>
           <a:prstGeom prst="rect">
             <a:avLst/>
@@ -8140,7 +8387,7 @@
         <p:spPr>
           <a:xfrm>
             <a:off x="502920" y="164520"/>
-            <a:ext cx="7131960" cy="228240"/>
+            <a:ext cx="7131600" cy="227880"/>
           </a:xfrm>
           <a:prstGeom prst="rect">
             <a:avLst/>
@@ -8201,7 +8448,7 @@
         <p:spPr>
           <a:xfrm>
             <a:off x="7955280" y="164520"/>
-            <a:ext cx="2925720" cy="228240"/>
+            <a:ext cx="2925360" cy="227880"/>
           </a:xfrm>
           <a:prstGeom prst="rect">
             <a:avLst/>
@@ -8262,7 +8509,7 @@
         <p:spPr>
           <a:xfrm>
             <a:off x="11064240" y="109800"/>
-            <a:ext cx="731160" cy="319680"/>
+            <a:ext cx="730800" cy="319320"/>
           </a:xfrm>
           <a:prstGeom prst="rect">
             <a:avLst/>
@@ -8366,7 +8613,7 @@
         <p:spPr>
           <a:xfrm>
             <a:off x="530280" y="749880"/>
-            <a:ext cx="411120" cy="502560"/>
+            <a:ext cx="410760" cy="502200"/>
           </a:xfrm>
           <a:prstGeom prst="rect">
             <a:avLst/>
@@ -8427,7 +8674,7 @@
         <p:spPr>
           <a:xfrm>
             <a:off x="960120" y="859680"/>
-            <a:ext cx="731160" cy="228240"/>
+            <a:ext cx="730800" cy="227880"/>
           </a:xfrm>
           <a:prstGeom prst="rect">
             <a:avLst/>
@@ -8488,7 +8735,7 @@
         <p:spPr>
           <a:xfrm>
             <a:off x="960120" y="667440"/>
-            <a:ext cx="10698120" cy="639720"/>
+            <a:ext cx="10697760" cy="639360"/>
           </a:xfrm>
           <a:prstGeom prst="rect">
             <a:avLst/>
@@ -8549,7 +8796,7 @@
         <p:spPr>
           <a:xfrm>
             <a:off x="594360" y="1481400"/>
-            <a:ext cx="5120280" cy="255600"/>
+            <a:ext cx="5119920" cy="255240"/>
           </a:xfrm>
           <a:prstGeom prst="rect">
             <a:avLst/>
@@ -8610,7 +8857,7 @@
         <p:spPr>
           <a:xfrm>
             <a:off x="594360" y="1783080"/>
-            <a:ext cx="5074560" cy="1234080"/>
+            <a:ext cx="5074200" cy="1233720"/>
           </a:xfrm>
           <a:prstGeom prst="rect">
             <a:avLst/>
@@ -8734,7 +8981,7 @@
         <p:spPr>
           <a:xfrm>
             <a:off x="5925240" y="1481400"/>
-            <a:ext cx="5623200" cy="255600"/>
+            <a:ext cx="5622840" cy="255240"/>
           </a:xfrm>
           <a:prstGeom prst="rect">
             <a:avLst/>
@@ -8795,7 +9042,7 @@
         <p:spPr>
           <a:xfrm>
             <a:off x="5925240" y="1755720"/>
-            <a:ext cx="5623200" cy="1371240"/>
+            <a:ext cx="5622840" cy="1370880"/>
           </a:xfrm>
           <a:prstGeom prst="rect">
             <a:avLst/>
@@ -8888,7 +9135,7 @@
         <p:spPr>
           <a:xfrm>
             <a:off x="594360" y="3364920"/>
-            <a:ext cx="11018160" cy="255600"/>
+            <a:ext cx="11017800" cy="255240"/>
           </a:xfrm>
           <a:prstGeom prst="rect">
             <a:avLst/>
@@ -8949,7 +9196,7 @@
         <p:spPr>
           <a:xfrm>
             <a:off x="594360" y="3675960"/>
-            <a:ext cx="11018160" cy="1234080"/>
+            <a:ext cx="11017800" cy="1233720"/>
           </a:xfrm>
           <a:prstGeom prst="rect">
             <a:avLst/>
@@ -9100,7 +9347,7 @@
         <p:spPr>
           <a:xfrm>
             <a:off x="594360" y="5074920"/>
-            <a:ext cx="11018160" cy="255600"/>
+            <a:ext cx="11017800" cy="255240"/>
           </a:xfrm>
           <a:prstGeom prst="rect">
             <a:avLst/>
@@ -9161,7 +9408,7 @@
         <p:spPr>
           <a:xfrm>
             <a:off x="594360" y="5376600"/>
-            <a:ext cx="11018160" cy="658080"/>
+            <a:ext cx="11017800" cy="657720"/>
           </a:xfrm>
           <a:prstGeom prst="rect">
             <a:avLst/>
@@ -9222,7 +9469,7 @@
         <p:spPr>
           <a:xfrm>
             <a:off x="594360" y="6263640"/>
-            <a:ext cx="11018160" cy="319680"/>
+            <a:ext cx="11017800" cy="319320"/>
           </a:xfrm>
           <a:prstGeom prst="rect">
             <a:avLst/>
@@ -9320,7 +9567,7 @@
         <p:spPr>
           <a:xfrm>
             <a:off x="502920" y="164520"/>
-            <a:ext cx="7131960" cy="228240"/>
+            <a:ext cx="7131600" cy="227880"/>
           </a:xfrm>
           <a:prstGeom prst="rect">
             <a:avLst/>
@@ -9381,7 +9628,7 @@
         <p:spPr>
           <a:xfrm>
             <a:off x="7955280" y="164520"/>
-            <a:ext cx="2925720" cy="228240"/>
+            <a:ext cx="2925360" cy="227880"/>
           </a:xfrm>
           <a:prstGeom prst="rect">
             <a:avLst/>
@@ -9442,7 +9689,7 @@
         <p:spPr>
           <a:xfrm>
             <a:off x="11064240" y="109800"/>
-            <a:ext cx="731160" cy="319680"/>
+            <a:ext cx="730800" cy="319320"/>
           </a:xfrm>
           <a:prstGeom prst="rect">
             <a:avLst/>
@@ -9546,7 +9793,7 @@
         <p:spPr>
           <a:xfrm>
             <a:off x="530280" y="749880"/>
-            <a:ext cx="411120" cy="502560"/>
+            <a:ext cx="410760" cy="502200"/>
           </a:xfrm>
           <a:prstGeom prst="rect">
             <a:avLst/>
@@ -9607,7 +9854,7 @@
         <p:spPr>
           <a:xfrm>
             <a:off x="960120" y="859680"/>
-            <a:ext cx="731160" cy="228240"/>
+            <a:ext cx="730800" cy="227880"/>
           </a:xfrm>
           <a:prstGeom prst="rect">
             <a:avLst/>
@@ -9668,7 +9915,7 @@
         <p:spPr>
           <a:xfrm>
             <a:off x="960120" y="667440"/>
-            <a:ext cx="10698120" cy="639720"/>
+            <a:ext cx="10697760" cy="639360"/>
           </a:xfrm>
           <a:prstGeom prst="rect">
             <a:avLst/>
@@ -9729,7 +9976,7 @@
         <p:spPr>
           <a:xfrm>
             <a:off x="594360" y="1481400"/>
-            <a:ext cx="5120280" cy="255600"/>
+            <a:ext cx="5119920" cy="255240"/>
           </a:xfrm>
           <a:prstGeom prst="rect">
             <a:avLst/>
@@ -9790,7 +10037,7 @@
         <p:spPr>
           <a:xfrm>
             <a:off x="594360" y="1783080"/>
-            <a:ext cx="5074560" cy="1234080"/>
+            <a:ext cx="5074200" cy="1233720"/>
           </a:xfrm>
           <a:prstGeom prst="rect">
             <a:avLst/>
@@ -9914,7 +10161,7 @@
         <p:spPr>
           <a:xfrm>
             <a:off x="5925240" y="1481400"/>
-            <a:ext cx="5623200" cy="255600"/>
+            <a:ext cx="5622840" cy="255240"/>
           </a:xfrm>
           <a:prstGeom prst="rect">
             <a:avLst/>
@@ -9974,8 +10221,8 @@
         </p:nvSpPr>
         <p:spPr>
           <a:xfrm>
-            <a:off x="5925240" y="1755720"/>
-            <a:ext cx="5623200" cy="1371240"/>
+            <a:off x="5925240" y="1750320"/>
+            <a:ext cx="5622840" cy="2209680"/>
           </a:xfrm>
           <a:prstGeom prst="rect">
             <a:avLst/>
@@ -10016,8 +10263,26 @@
                 <a:latin typeface="Cascadia Mono"/>
                 <a:ea typeface="Cascadia Mono"/>
               </a:rPr>
-              <a:t>dados = [1, 2, 3, 4]</a:t>
-            </a:r>
+              <a:t>Dados = [1, 2, 3, 4]</a:t>
+            </a:r>
+            <a:endParaRPr b="0" lang="pt-BR" sz="970" strike="noStrike" u="none">
+              <a:solidFill>
+                <a:srgbClr val="ffffff"/>
+              </a:solidFill>
+              <a:effectLst/>
+              <a:uFillTx/>
+              <a:latin typeface="Arial"/>
+            </a:endParaRPr>
+          </a:p>
+          <a:p>
+            <a:pPr defTabSz="914400">
+              <a:lnSpc>
+                <a:spcPct val="100000"/>
+              </a:lnSpc>
+              <a:tabLst>
+                <a:tab algn="l" pos="0"/>
+              </a:tabLst>
+            </a:pPr>
             <a:endParaRPr b="0" lang="pt-BR" sz="970" strike="noStrike" u="none">
               <a:solidFill>
                 <a:srgbClr val="ffffff"/>
@@ -10066,6 +10331,24 @@
                 <a:tab algn="l" pos="0"/>
               </a:tabLst>
             </a:pPr>
+            <a:endParaRPr b="0" lang="pt-BR" sz="970" strike="noStrike" u="none">
+              <a:solidFill>
+                <a:srgbClr val="ffffff"/>
+              </a:solidFill>
+              <a:effectLst/>
+              <a:uFillTx/>
+              <a:latin typeface="Arial"/>
+            </a:endParaRPr>
+          </a:p>
+          <a:p>
+            <a:pPr defTabSz="914400">
+              <a:lnSpc>
+                <a:spcPct val="100000"/>
+              </a:lnSpc>
+              <a:tabLst>
+                <a:tab algn="l" pos="0"/>
+              </a:tabLst>
+            </a:pPr>
             <a:r>
               <a:rPr b="0" lang="en-US" sz="970" strike="noStrike" u="none">
                 <a:solidFill>
@@ -10076,7 +10359,7 @@
                 <a:latin typeface="Cascadia Mono"/>
                 <a:ea typeface="Cascadia Mono"/>
               </a:rPr>
-              <a:t>collect(zip(dados, quadrados))</a:t>
+              <a:t>1 ^ 2 → 1</a:t>
             </a:r>
             <a:endParaRPr b="0" lang="pt-BR" sz="970" strike="noStrike" u="none">
               <a:solidFill>
@@ -10087,6 +10370,96 @@
               <a:latin typeface="Arial"/>
             </a:endParaRPr>
           </a:p>
+          <a:p>
+            <a:pPr defTabSz="914400">
+              <a:lnSpc>
+                <a:spcPct val="100000"/>
+              </a:lnSpc>
+              <a:tabLst>
+                <a:tab algn="l" pos="0"/>
+              </a:tabLst>
+            </a:pPr>
+            <a:r>
+              <a:rPr b="0" lang="en-US" sz="970" strike="noStrike" u="none">
+                <a:solidFill>
+                  <a:srgbClr val="f9fafb"/>
+                </a:solidFill>
+                <a:effectLst/>
+                <a:uFillTx/>
+                <a:latin typeface="Cascadia Mono"/>
+                <a:ea typeface="Cascadia Mono"/>
+              </a:rPr>
+              <a:t>2 ^ 2 → 4</a:t>
+            </a:r>
+            <a:endParaRPr b="0" lang="pt-BR" sz="970" strike="noStrike" u="none">
+              <a:solidFill>
+                <a:srgbClr val="ffffff"/>
+              </a:solidFill>
+              <a:effectLst/>
+              <a:uFillTx/>
+              <a:latin typeface="Arial"/>
+            </a:endParaRPr>
+          </a:p>
+          <a:p>
+            <a:pPr defTabSz="914400">
+              <a:lnSpc>
+                <a:spcPct val="100000"/>
+              </a:lnSpc>
+              <a:tabLst>
+                <a:tab algn="l" pos="0"/>
+              </a:tabLst>
+            </a:pPr>
+            <a:r>
+              <a:rPr b="0" lang="en-US" sz="970" strike="noStrike" u="none">
+                <a:solidFill>
+                  <a:srgbClr val="f9fafb"/>
+                </a:solidFill>
+                <a:effectLst/>
+                <a:uFillTx/>
+                <a:latin typeface="Cascadia Mono"/>
+                <a:ea typeface="Cascadia Mono"/>
+              </a:rPr>
+              <a:t>3 ^ 2 → 9</a:t>
+            </a:r>
+            <a:endParaRPr b="0" lang="pt-BR" sz="970" strike="noStrike" u="none">
+              <a:solidFill>
+                <a:srgbClr val="ffffff"/>
+              </a:solidFill>
+              <a:effectLst/>
+              <a:uFillTx/>
+              <a:latin typeface="Arial"/>
+            </a:endParaRPr>
+          </a:p>
+          <a:p>
+            <a:pPr defTabSz="914400">
+              <a:lnSpc>
+                <a:spcPct val="100000"/>
+              </a:lnSpc>
+              <a:tabLst>
+                <a:tab algn="l" pos="0"/>
+              </a:tabLst>
+            </a:pPr>
+            <a:r>
+              <a:rPr b="0" lang="en-US" sz="970" strike="noStrike" u="none">
+                <a:solidFill>
+                  <a:srgbClr val="f9fafb"/>
+                </a:solidFill>
+                <a:effectLst/>
+                <a:uFillTx/>
+                <a:latin typeface="Cascadia Mono"/>
+                <a:ea typeface="Cascadia Mono"/>
+              </a:rPr>
+              <a:t>4 ^ 2 → 16</a:t>
+            </a:r>
+            <a:endParaRPr b="0" lang="pt-BR" sz="970" strike="noStrike" u="none">
+              <a:solidFill>
+                <a:srgbClr val="ffffff"/>
+              </a:solidFill>
+              <a:effectLst/>
+              <a:uFillTx/>
+              <a:latin typeface="Arial"/>
+            </a:endParaRPr>
+          </a:p>
         </p:txBody>
       </p:sp>
       <p:sp>
@@ -10098,7 +10471,7 @@
         <p:spPr>
           <a:xfrm>
             <a:off x="594360" y="3364920"/>
-            <a:ext cx="11018160" cy="255600"/>
+            <a:ext cx="11017800" cy="255240"/>
           </a:xfrm>
           <a:prstGeom prst="rect">
             <a:avLst/>
@@ -10159,7 +10532,7 @@
         <p:spPr>
           <a:xfrm>
             <a:off x="594360" y="3675960"/>
-            <a:ext cx="11018160" cy="1234080"/>
+            <a:ext cx="11017800" cy="1233720"/>
           </a:xfrm>
           <a:prstGeom prst="rect">
             <a:avLst/>
@@ -10310,7 +10683,7 @@
         <p:spPr>
           <a:xfrm>
             <a:off x="594360" y="5074920"/>
-            <a:ext cx="11018160" cy="255600"/>
+            <a:ext cx="11017800" cy="255240"/>
           </a:xfrm>
           <a:prstGeom prst="rect">
             <a:avLst/>
@@ -10371,7 +10744,7 @@
         <p:spPr>
           <a:xfrm>
             <a:off x="594360" y="5376600"/>
-            <a:ext cx="11018160" cy="658080"/>
+            <a:ext cx="11017800" cy="657720"/>
           </a:xfrm>
           <a:prstGeom prst="rect">
             <a:avLst/>
@@ -10432,7 +10805,7 @@
         <p:spPr>
           <a:xfrm>
             <a:off x="594360" y="6263640"/>
-            <a:ext cx="11018160" cy="319680"/>
+            <a:ext cx="11017800" cy="319320"/>
           </a:xfrm>
           <a:prstGeom prst="rect">
             <a:avLst/>
@@ -10523,14 +10896,14 @@
       </p:grpSpPr>
       <p:sp>
         <p:nvSpPr>
-          <p:cNvPr id="177" name="Text 0"/>
+          <p:cNvPr id="177" name="Text 16"/>
           <p:cNvSpPr/>
           <p:nvPr/>
         </p:nvSpPr>
         <p:spPr>
           <a:xfrm>
             <a:off x="502920" y="164520"/>
-            <a:ext cx="7131960" cy="228240"/>
+            <a:ext cx="7131600" cy="227880"/>
           </a:xfrm>
           <a:prstGeom prst="rect">
             <a:avLst/>
@@ -10584,14 +10957,14 @@
       </p:sp>
       <p:sp>
         <p:nvSpPr>
-          <p:cNvPr id="178" name="Text 1"/>
+          <p:cNvPr id="178" name="Text 17"/>
           <p:cNvSpPr/>
           <p:nvPr/>
         </p:nvSpPr>
         <p:spPr>
           <a:xfrm>
             <a:off x="7955280" y="164520"/>
-            <a:ext cx="2925720" cy="228240"/>
+            <a:ext cx="2925360" cy="227880"/>
           </a:xfrm>
           <a:prstGeom prst="rect">
             <a:avLst/>
@@ -10645,14 +11018,14 @@
       </p:sp>
       <p:sp>
         <p:nvSpPr>
-          <p:cNvPr id="179" name="Text 2"/>
+          <p:cNvPr id="179" name="Text 18"/>
           <p:cNvSpPr/>
           <p:nvPr/>
         </p:nvSpPr>
         <p:spPr>
           <a:xfrm>
             <a:off x="11064240" y="109800"/>
-            <a:ext cx="731160" cy="319680"/>
+            <a:ext cx="730800" cy="319320"/>
           </a:xfrm>
           <a:prstGeom prst="rect">
             <a:avLst/>
@@ -10691,7 +11064,7 @@
                 <a:latin typeface="Aptos Display"/>
                 <a:ea typeface="Aptos Display"/>
               </a:rPr>
-              <a:t>16</a:t>
+              <a:t>15</a:t>
             </a:r>
             <a:endParaRPr b="0" lang="pt-BR" sz="1200" strike="noStrike" u="none">
               <a:solidFill>
@@ -10706,7 +11079,7 @@
       </p:sp>
       <p:sp>
         <p:nvSpPr>
-          <p:cNvPr id="180" name="Shape 3"/>
+          <p:cNvPr id="180" name="Shape 1"/>
           <p:cNvSpPr/>
           <p:nvPr/>
         </p:nvSpPr>
@@ -10749,14 +11122,14 @@
       </p:sp>
       <p:sp>
         <p:nvSpPr>
-          <p:cNvPr id="181" name="Text 4"/>
+          <p:cNvPr id="181" name="Text 19"/>
           <p:cNvSpPr/>
           <p:nvPr/>
         </p:nvSpPr>
         <p:spPr>
           <a:xfrm>
             <a:off x="530280" y="749880"/>
-            <a:ext cx="411120" cy="502560"/>
+            <a:ext cx="410760" cy="502200"/>
           </a:xfrm>
           <a:prstGeom prst="rect">
             <a:avLst/>
@@ -10810,14 +11183,14 @@
       </p:sp>
       <p:sp>
         <p:nvSpPr>
-          <p:cNvPr id="182" name="Text 5"/>
+          <p:cNvPr id="182" name="Text 20"/>
           <p:cNvSpPr/>
           <p:nvPr/>
         </p:nvSpPr>
         <p:spPr>
           <a:xfrm>
             <a:off x="960120" y="859680"/>
-            <a:ext cx="731160" cy="228240"/>
+            <a:ext cx="730800" cy="227880"/>
           </a:xfrm>
           <a:prstGeom prst="rect">
             <a:avLst/>
@@ -10856,7 +11229,7 @@
                 <a:latin typeface="Aptos"/>
                 <a:ea typeface="Aptos"/>
               </a:rPr>
-              <a:t>1.7</a:t>
+              <a:t>1.6</a:t>
             </a:r>
             <a:endParaRPr b="0" lang="pt-BR" sz="850" strike="noStrike" u="none">
               <a:solidFill>
@@ -10871,14 +11244,14 @@
       </p:sp>
       <p:sp>
         <p:nvSpPr>
-          <p:cNvPr id="183" name="Text 6"/>
+          <p:cNvPr id="183" name="Text 21"/>
           <p:cNvSpPr/>
           <p:nvPr/>
         </p:nvSpPr>
         <p:spPr>
           <a:xfrm>
             <a:off x="960120" y="667440"/>
-            <a:ext cx="10698120" cy="639720"/>
+            <a:ext cx="10697760" cy="639360"/>
           </a:xfrm>
           <a:prstGeom prst="rect">
             <a:avLst/>
@@ -10917,7 +11290,7 @@
                 <a:latin typeface="Aptos Display"/>
                 <a:ea typeface="Aptos Display"/>
               </a:rPr>
-              <a:t>Como uma função sintetiza uma ideia computacional?</a:t>
+              <a:t>O que muda quando a saída vira tabela?</a:t>
             </a:r>
             <a:endParaRPr b="0" lang="pt-BR" sz="2350" strike="noStrike" u="none">
               <a:solidFill>
@@ -10932,14 +11305,14 @@
       </p:sp>
       <p:sp>
         <p:nvSpPr>
-          <p:cNvPr id="184" name="Text 7"/>
+          <p:cNvPr id="184" name="Text 22"/>
           <p:cNvSpPr/>
           <p:nvPr/>
         </p:nvSpPr>
         <p:spPr>
           <a:xfrm>
             <a:off x="594360" y="1481400"/>
-            <a:ext cx="5120280" cy="255600"/>
+            <a:ext cx="5119920" cy="255240"/>
           </a:xfrm>
           <a:prstGeom prst="rect">
             <a:avLst/>
@@ -10993,14 +11366,14 @@
       </p:sp>
       <p:sp>
         <p:nvSpPr>
-          <p:cNvPr id="185" name="Text 8"/>
+          <p:cNvPr id="185" name="Text 23"/>
           <p:cNvSpPr/>
           <p:nvPr/>
         </p:nvSpPr>
         <p:spPr>
           <a:xfrm>
             <a:off x="594360" y="1783080"/>
-            <a:ext cx="5074560" cy="1234080"/>
+            <a:ext cx="5074200" cy="1233720"/>
           </a:xfrm>
           <a:prstGeom prst="rect">
             <a:avLst/>
@@ -11039,7 +11412,7 @@
               <a:t>• </a:t>
             </a:r>
             <a:r>
-              <a:rPr b="0" lang="en-US" sz="1200" strike="noStrike" u="none">
+              <a:rPr b="0" lang="en-US" sz="1100" strike="noStrike" u="none">
                 <a:solidFill>
                   <a:srgbClr val="243447"/>
                 </a:solidFill>
@@ -11048,25 +11421,25 @@
                 <a:latin typeface="Aptos"/>
                 <a:ea typeface="Aptos"/>
               </a:rPr>
-              <a:t>Transforme uma conta repetida em função.</a:t>
-            </a:r>
-            <a:endParaRPr b="0" lang="pt-BR" sz="1200" strike="noStrike" u="none">
-              <a:solidFill>
-                <a:srgbClr val="000000"/>
-              </a:solidFill>
-              <a:effectLst/>
-              <a:uFillTx/>
-              <a:latin typeface="Arial"/>
-            </a:endParaRPr>
-          </a:p>
-          <a:p>
-            <a:pPr defTabSz="914400">
-              <a:lnSpc>
-                <a:spcPct val="100000"/>
-              </a:lnSpc>
-            </a:pPr>
-            <a:r>
-              <a:rPr b="0" lang="en-US" sz="1200" strike="noStrike" u="none">
+              <a:t>Calcule quadrados.</a:t>
+            </a:r>
+            <a:endParaRPr b="0" lang="pt-BR" sz="1100" strike="noStrike" u="none">
+              <a:solidFill>
+                <a:srgbClr val="000000"/>
+              </a:solidFill>
+              <a:effectLst/>
+              <a:uFillTx/>
+              <a:latin typeface="Arial"/>
+            </a:endParaRPr>
+          </a:p>
+          <a:p>
+            <a:pPr defTabSz="914400">
+              <a:lnSpc>
+                <a:spcPct val="100000"/>
+              </a:lnSpc>
+            </a:pPr>
+            <a:r>
+              <a:rPr b="0" lang="en-US" sz="1100" strike="noStrike" u="none">
                 <a:solidFill>
                   <a:srgbClr val="243447"/>
                 </a:solidFill>
@@ -11075,25 +11448,25 @@
                 <a:latin typeface="Aptos"/>
                 <a:ea typeface="Aptos"/>
               </a:rPr>
-              <a:t>• Teste diferentes entradas.</a:t>
-            </a:r>
-            <a:endParaRPr b="0" lang="pt-BR" sz="1200" strike="noStrike" u="none">
-              <a:solidFill>
-                <a:srgbClr val="000000"/>
-              </a:solidFill>
-              <a:effectLst/>
-              <a:uFillTx/>
-              <a:latin typeface="Arial"/>
-            </a:endParaRPr>
-          </a:p>
-          <a:p>
-            <a:pPr defTabSz="914400">
-              <a:lnSpc>
-                <a:spcPct val="100000"/>
-              </a:lnSpc>
-            </a:pPr>
-            <a:r>
-              <a:rPr b="0" lang="en-US" sz="1200" strike="noStrike" u="none">
+              <a:t>• Agrupe entrada e saída.</a:t>
+            </a:r>
+            <a:endParaRPr b="0" lang="pt-BR" sz="1100" strike="noStrike" u="none">
+              <a:solidFill>
+                <a:srgbClr val="000000"/>
+              </a:solidFill>
+              <a:effectLst/>
+              <a:uFillTx/>
+              <a:latin typeface="Arial"/>
+            </a:endParaRPr>
+          </a:p>
+          <a:p>
+            <a:pPr defTabSz="914400">
+              <a:lnSpc>
+                <a:spcPct val="100000"/>
+              </a:lnSpc>
+            </a:pPr>
+            <a:r>
+              <a:rPr b="0" lang="en-US" sz="1100" strike="noStrike" u="none">
                 <a:solidFill>
                   <a:srgbClr val="243447"/>
                 </a:solidFill>
@@ -11102,29 +11475,29 @@
                 <a:latin typeface="Aptos"/>
                 <a:ea typeface="Aptos"/>
               </a:rPr>
-              <a:t>• Compare os resultados.</a:t>
-            </a:r>
-            <a:endParaRPr b="0" lang="pt-BR" sz="1200" strike="noStrike" u="none">
-              <a:solidFill>
-                <a:srgbClr val="000000"/>
-              </a:solidFill>
-              <a:effectLst/>
-              <a:uFillTx/>
-              <a:latin typeface="Arial"/>
-            </a:endParaRPr>
-          </a:p>
-        </p:txBody>
-      </p:sp>
-      <p:sp>
-        <p:nvSpPr>
-          <p:cNvPr id="186" name="Text 9"/>
+              <a:t>• Interprete a correspondência em pares.</a:t>
+            </a:r>
+            <a:endParaRPr b="0" lang="pt-BR" sz="1100" strike="noStrike" u="none">
+              <a:solidFill>
+                <a:srgbClr val="000000"/>
+              </a:solidFill>
+              <a:effectLst/>
+              <a:uFillTx/>
+              <a:latin typeface="Arial"/>
+            </a:endParaRPr>
+          </a:p>
+        </p:txBody>
+      </p:sp>
+      <p:sp>
+        <p:nvSpPr>
+          <p:cNvPr id="186" name="Text 24"/>
           <p:cNvSpPr/>
           <p:nvPr/>
         </p:nvSpPr>
         <p:spPr>
           <a:xfrm>
             <a:off x="5925240" y="1481400"/>
-            <a:ext cx="5623200" cy="255600"/>
+            <a:ext cx="5622840" cy="255240"/>
           </a:xfrm>
           <a:prstGeom prst="rect">
             <a:avLst/>
@@ -11178,14 +11551,14 @@
       </p:sp>
       <p:sp>
         <p:nvSpPr>
-          <p:cNvPr id="187" name="Text 10"/>
-          <p:cNvSpPr/>
-          <p:nvPr/>
-        </p:nvSpPr>
-        <p:spPr>
-          <a:xfrm>
-            <a:off x="5925240" y="1755720"/>
-            <a:ext cx="5623200" cy="1371240"/>
+          <p:cNvPr id="187" name="Text 25"/>
+          <p:cNvSpPr/>
+          <p:nvPr/>
+        </p:nvSpPr>
+        <p:spPr>
+          <a:xfrm>
+            <a:off x="5897160" y="1886040"/>
+            <a:ext cx="5622840" cy="1893960"/>
           </a:xfrm>
           <a:prstGeom prst="rect">
             <a:avLst/>
@@ -11205,8 +11578,26 @@
         </p:style>
         <p:txBody>
           <a:bodyPr lIns="90000" rIns="90000" tIns="45000" bIns="45000" anchor="ctr">
-            <a:normAutofit/>
-          </a:bodyPr>
+            <a:normAutofit lnSpcReduction="9999"/>
+          </a:bodyPr>
+          <a:p>
+            <a:pPr defTabSz="914400">
+              <a:lnSpc>
+                <a:spcPct val="100000"/>
+              </a:lnSpc>
+              <a:tabLst>
+                <a:tab algn="l" pos="0"/>
+              </a:tabLst>
+            </a:pPr>
+            <a:endParaRPr b="0" lang="pt-BR" sz="970" strike="noStrike" u="none">
+              <a:solidFill>
+                <a:srgbClr val="ffffff"/>
+              </a:solidFill>
+              <a:effectLst/>
+              <a:uFillTx/>
+              <a:latin typeface="Arial"/>
+            </a:endParaRPr>
+          </a:p>
           <a:p>
             <a:pPr defTabSz="914400">
               <a:lnSpc>
@@ -11226,8 +11617,26 @@
                 <a:latin typeface="Cascadia Mono"/>
                 <a:ea typeface="Cascadia Mono"/>
               </a:rPr>
-              <a:t>dobro(x) = 2x</a:t>
-            </a:r>
+              <a:t>collect(zip(dados, quadrados))</a:t>
+            </a:r>
+            <a:endParaRPr b="0" lang="pt-BR" sz="970" strike="noStrike" u="none">
+              <a:solidFill>
+                <a:srgbClr val="ffffff"/>
+              </a:solidFill>
+              <a:effectLst/>
+              <a:uFillTx/>
+              <a:latin typeface="Arial"/>
+            </a:endParaRPr>
+          </a:p>
+          <a:p>
+            <a:pPr defTabSz="914400">
+              <a:lnSpc>
+                <a:spcPct val="100000"/>
+              </a:lnSpc>
+              <a:tabLst>
+                <a:tab algn="l" pos="0"/>
+              </a:tabLst>
+            </a:pPr>
             <a:endParaRPr b="0" lang="pt-BR" sz="970" strike="noStrike" u="none">
               <a:solidFill>
                 <a:srgbClr val="ffffff"/>
@@ -11256,7 +11665,7 @@
                 <a:latin typeface="Cascadia Mono"/>
                 <a:ea typeface="Cascadia Mono"/>
               </a:rPr>
-              <a:t>dobro(4)</a:t>
+              <a:t>dados      → [1, 2, 3, 4]</a:t>
             </a:r>
             <a:endParaRPr b="0" lang="pt-BR" sz="970" strike="noStrike" u="none">
               <a:solidFill>
@@ -11286,7 +11695,7 @@
                 <a:latin typeface="Cascadia Mono"/>
                 <a:ea typeface="Cascadia Mono"/>
               </a:rPr>
-              <a:t>dobro(10)</a:t>
+              <a:t>quadrados  → [1, 4, 9, 16]</a:t>
             </a:r>
             <a:endParaRPr b="0" lang="pt-BR" sz="970" strike="noStrike" u="none">
               <a:solidFill>
@@ -11297,18 +11706,234 @@
               <a:latin typeface="Arial"/>
             </a:endParaRPr>
           </a:p>
-        </p:txBody>
-      </p:sp>
-      <p:sp>
-        <p:nvSpPr>
-          <p:cNvPr id="188" name="Text 11"/>
+          <a:p>
+            <a:pPr defTabSz="914400">
+              <a:lnSpc>
+                <a:spcPct val="100000"/>
+              </a:lnSpc>
+              <a:tabLst>
+                <a:tab algn="l" pos="0"/>
+              </a:tabLst>
+            </a:pPr>
+            <a:endParaRPr b="0" lang="pt-BR" sz="970" strike="noStrike" u="none">
+              <a:solidFill>
+                <a:srgbClr val="ffffff"/>
+              </a:solidFill>
+              <a:effectLst/>
+              <a:uFillTx/>
+              <a:latin typeface="Arial"/>
+            </a:endParaRPr>
+          </a:p>
+          <a:p>
+            <a:pPr defTabSz="914400">
+              <a:lnSpc>
+                <a:spcPct val="100000"/>
+              </a:lnSpc>
+              <a:tabLst>
+                <a:tab algn="l" pos="0"/>
+              </a:tabLst>
+            </a:pPr>
+            <a:r>
+              <a:rPr b="0" lang="en-US" sz="970" strike="noStrike" u="none">
+                <a:solidFill>
+                  <a:srgbClr val="f9fafb"/>
+                </a:solidFill>
+                <a:effectLst/>
+                <a:uFillTx/>
+                <a:latin typeface="Cascadia Mono"/>
+                <a:ea typeface="Cascadia Mono"/>
+              </a:rPr>
+              <a:t>zip        → associa:</a:t>
+            </a:r>
+            <a:endParaRPr b="0" lang="pt-BR" sz="970" strike="noStrike" u="none">
+              <a:solidFill>
+                <a:srgbClr val="ffffff"/>
+              </a:solidFill>
+              <a:effectLst/>
+              <a:uFillTx/>
+              <a:latin typeface="Arial"/>
+            </a:endParaRPr>
+          </a:p>
+          <a:p>
+            <a:pPr defTabSz="914400">
+              <a:lnSpc>
+                <a:spcPct val="100000"/>
+              </a:lnSpc>
+              <a:tabLst>
+                <a:tab algn="l" pos="0"/>
+              </a:tabLst>
+            </a:pPr>
+            <a:r>
+              <a:rPr b="0" lang="en-US" sz="970" strike="noStrike" u="none">
+                <a:solidFill>
+                  <a:srgbClr val="f9fafb"/>
+                </a:solidFill>
+                <a:effectLst/>
+                <a:uFillTx/>
+                <a:latin typeface="Cascadia Mono"/>
+                <a:ea typeface="Cascadia Mono"/>
+              </a:rPr>
+              <a:t>              (1, 1)</a:t>
+            </a:r>
+            <a:endParaRPr b="0" lang="pt-BR" sz="970" strike="noStrike" u="none">
+              <a:solidFill>
+                <a:srgbClr val="ffffff"/>
+              </a:solidFill>
+              <a:effectLst/>
+              <a:uFillTx/>
+              <a:latin typeface="Arial"/>
+            </a:endParaRPr>
+          </a:p>
+          <a:p>
+            <a:pPr defTabSz="914400">
+              <a:lnSpc>
+                <a:spcPct val="100000"/>
+              </a:lnSpc>
+              <a:tabLst>
+                <a:tab algn="l" pos="0"/>
+              </a:tabLst>
+            </a:pPr>
+            <a:r>
+              <a:rPr b="0" lang="en-US" sz="970" strike="noStrike" u="none">
+                <a:solidFill>
+                  <a:srgbClr val="f9fafb"/>
+                </a:solidFill>
+                <a:effectLst/>
+                <a:uFillTx/>
+                <a:latin typeface="Cascadia Mono"/>
+                <a:ea typeface="Cascadia Mono"/>
+              </a:rPr>
+              <a:t>              (2, 4)</a:t>
+            </a:r>
+            <a:endParaRPr b="0" lang="pt-BR" sz="970" strike="noStrike" u="none">
+              <a:solidFill>
+                <a:srgbClr val="ffffff"/>
+              </a:solidFill>
+              <a:effectLst/>
+              <a:uFillTx/>
+              <a:latin typeface="Arial"/>
+            </a:endParaRPr>
+          </a:p>
+          <a:p>
+            <a:pPr defTabSz="914400">
+              <a:lnSpc>
+                <a:spcPct val="100000"/>
+              </a:lnSpc>
+              <a:tabLst>
+                <a:tab algn="l" pos="0"/>
+              </a:tabLst>
+            </a:pPr>
+            <a:r>
+              <a:rPr b="0" lang="en-US" sz="970" strike="noStrike" u="none">
+                <a:solidFill>
+                  <a:srgbClr val="f9fafb"/>
+                </a:solidFill>
+                <a:effectLst/>
+                <a:uFillTx/>
+                <a:latin typeface="Cascadia Mono"/>
+                <a:ea typeface="Cascadia Mono"/>
+              </a:rPr>
+              <a:t>              (3, 9)</a:t>
+            </a:r>
+            <a:endParaRPr b="0" lang="pt-BR" sz="970" strike="noStrike" u="none">
+              <a:solidFill>
+                <a:srgbClr val="ffffff"/>
+              </a:solidFill>
+              <a:effectLst/>
+              <a:uFillTx/>
+              <a:latin typeface="Arial"/>
+            </a:endParaRPr>
+          </a:p>
+          <a:p>
+            <a:pPr defTabSz="914400">
+              <a:lnSpc>
+                <a:spcPct val="100000"/>
+              </a:lnSpc>
+              <a:tabLst>
+                <a:tab algn="l" pos="0"/>
+              </a:tabLst>
+            </a:pPr>
+            <a:r>
+              <a:rPr b="0" lang="en-US" sz="970" strike="noStrike" u="none">
+                <a:solidFill>
+                  <a:srgbClr val="f9fafb"/>
+                </a:solidFill>
+                <a:effectLst/>
+                <a:uFillTx/>
+                <a:latin typeface="Cascadia Mono"/>
+                <a:ea typeface="Cascadia Mono"/>
+              </a:rPr>
+              <a:t>              (4, 16)</a:t>
+            </a:r>
+            <a:endParaRPr b="0" lang="pt-BR" sz="970" strike="noStrike" u="none">
+              <a:solidFill>
+                <a:srgbClr val="ffffff"/>
+              </a:solidFill>
+              <a:effectLst/>
+              <a:uFillTx/>
+              <a:latin typeface="Arial"/>
+            </a:endParaRPr>
+          </a:p>
+          <a:p>
+            <a:pPr defTabSz="914400">
+              <a:lnSpc>
+                <a:spcPct val="100000"/>
+              </a:lnSpc>
+              <a:tabLst>
+                <a:tab algn="l" pos="0"/>
+              </a:tabLst>
+            </a:pPr>
+            <a:endParaRPr b="0" lang="pt-BR" sz="970" strike="noStrike" u="none">
+              <a:solidFill>
+                <a:srgbClr val="ffffff"/>
+              </a:solidFill>
+              <a:effectLst/>
+              <a:uFillTx/>
+              <a:latin typeface="Arial"/>
+            </a:endParaRPr>
+          </a:p>
+          <a:p>
+            <a:pPr defTabSz="914400">
+              <a:lnSpc>
+                <a:spcPct val="100000"/>
+              </a:lnSpc>
+              <a:tabLst>
+                <a:tab algn="l" pos="0"/>
+              </a:tabLst>
+            </a:pPr>
+            <a:r>
+              <a:rPr b="0" lang="en-US" sz="970" strike="noStrike" u="none">
+                <a:solidFill>
+                  <a:srgbClr val="f9fafb"/>
+                </a:solidFill>
+                <a:effectLst/>
+                <a:uFillTx/>
+                <a:latin typeface="Cascadia Mono"/>
+                <a:ea typeface="Cascadia Mono"/>
+              </a:rPr>
+              <a:t>collect    → [(1, 1), (2, 4), (3, 9), (4, 16)]</a:t>
+            </a:r>
+            <a:endParaRPr b="0" lang="pt-BR" sz="970" strike="noStrike" u="none">
+              <a:solidFill>
+                <a:srgbClr val="ffffff"/>
+              </a:solidFill>
+              <a:effectLst/>
+              <a:uFillTx/>
+              <a:latin typeface="Arial"/>
+            </a:endParaRPr>
+          </a:p>
+        </p:txBody>
+      </p:sp>
+      <p:sp>
+        <p:nvSpPr>
+          <p:cNvPr id="188" name="Text 26"/>
           <p:cNvSpPr/>
           <p:nvPr/>
         </p:nvSpPr>
         <p:spPr>
           <a:xfrm>
             <a:off x="594360" y="3364920"/>
-            <a:ext cx="11018160" cy="255600"/>
+            <a:ext cx="11017800" cy="255240"/>
           </a:xfrm>
           <a:prstGeom prst="rect">
             <a:avLst/>
@@ -11362,14 +11987,14 @@
       </p:sp>
       <p:sp>
         <p:nvSpPr>
-          <p:cNvPr id="189" name="Text 12"/>
+          <p:cNvPr id="189" name="Text 27"/>
           <p:cNvSpPr/>
           <p:nvPr/>
         </p:nvSpPr>
         <p:spPr>
           <a:xfrm>
             <a:off x="594360" y="3675960"/>
-            <a:ext cx="11018160" cy="1234080"/>
+            <a:ext cx="11017800" cy="1233720"/>
           </a:xfrm>
           <a:prstGeom prst="rect">
             <a:avLst/>
@@ -11408,7 +12033,7 @@
               <a:t>• </a:t>
             </a:r>
             <a:r>
-              <a:rPr b="0" lang="en-US" sz="1100" strike="noStrike" u="none">
+              <a:rPr b="0" lang="en-US" sz="1050" strike="noStrike" u="none">
                 <a:solidFill>
                   <a:srgbClr val="243447"/>
                 </a:solidFill>
@@ -11417,25 +12042,25 @@
                 <a:latin typeface="Aptos"/>
                 <a:ea typeface="Aptos"/>
               </a:rPr>
-              <a:t>Generalização inicial e relação entrada–saída.</a:t>
-            </a:r>
-            <a:endParaRPr b="0" lang="pt-BR" sz="1100" strike="noStrike" u="none">
-              <a:solidFill>
-                <a:srgbClr val="000000"/>
-              </a:solidFill>
-              <a:effectLst/>
-              <a:uFillTx/>
-              <a:latin typeface="Arial"/>
-            </a:endParaRPr>
-          </a:p>
-          <a:p>
-            <a:pPr defTabSz="914400">
-              <a:lnSpc>
-                <a:spcPct val="100000"/>
-              </a:lnSpc>
-            </a:pPr>
-            <a:r>
-              <a:rPr b="0" lang="en-US" sz="1100" strike="noStrike" u="none">
+              <a:t>Transnumeração: lista para pares interpretáveis.</a:t>
+            </a:r>
+            <a:endParaRPr b="0" lang="pt-BR" sz="1050" strike="noStrike" u="none">
+              <a:solidFill>
+                <a:srgbClr val="000000"/>
+              </a:solidFill>
+              <a:effectLst/>
+              <a:uFillTx/>
+              <a:latin typeface="Arial"/>
+            </a:endParaRPr>
+          </a:p>
+          <a:p>
+            <a:pPr defTabSz="914400">
+              <a:lnSpc>
+                <a:spcPct val="100000"/>
+              </a:lnSpc>
+            </a:pPr>
+            <a:r>
+              <a:rPr b="0" lang="en-US" sz="1050" strike="noStrike" u="none">
                 <a:solidFill>
                   <a:srgbClr val="243447"/>
                 </a:solidFill>
@@ -11444,25 +12069,25 @@
                 <a:latin typeface="Aptos"/>
                 <a:ea typeface="Aptos"/>
               </a:rPr>
-              <a:t>• Wessels: níveis SOLO ajudam a observar respostas de menor a maior integração.</a:t>
-            </a:r>
-            <a:endParaRPr b="0" lang="pt-BR" sz="1100" strike="noStrike" u="none">
-              <a:solidFill>
-                <a:srgbClr val="000000"/>
-              </a:solidFill>
-              <a:effectLst/>
-              <a:uFillTx/>
-              <a:latin typeface="Arial"/>
-            </a:endParaRPr>
-          </a:p>
-          <a:p>
-            <a:pPr defTabSz="914400">
-              <a:lnSpc>
-                <a:spcPct val="100000"/>
-              </a:lnSpc>
-            </a:pPr>
-            <a:r>
-              <a:rPr b="0" lang="en-US" sz="1100" strike="noStrike" u="none">
+              <a:t>• Wessels: transnumeração torna dados interpretáveis em nova forma.</a:t>
+            </a:r>
+            <a:endParaRPr b="0" lang="pt-BR" sz="1050" strike="noStrike" u="none">
+              <a:solidFill>
+                <a:srgbClr val="000000"/>
+              </a:solidFill>
+              <a:effectLst/>
+              <a:uFillTx/>
+              <a:latin typeface="Arial"/>
+            </a:endParaRPr>
+          </a:p>
+          <a:p>
+            <a:pPr defTabSz="914400">
+              <a:lnSpc>
+                <a:spcPct val="100000"/>
+              </a:lnSpc>
+            </a:pPr>
+            <a:r>
+              <a:rPr b="0" lang="en-US" sz="1050" strike="noStrike" u="none">
                 <a:solidFill>
                   <a:srgbClr val="243447"/>
                 </a:solidFill>
@@ -11471,25 +12096,25 @@
                 <a:latin typeface="Aptos"/>
                 <a:ea typeface="Aptos"/>
               </a:rPr>
-              <a:t>• Queiroz: a análise qualitativa observa invariantes e relações mobilizadas na ação.</a:t>
-            </a:r>
-            <a:endParaRPr b="0" lang="pt-BR" sz="1100" strike="noStrike" u="none">
-              <a:solidFill>
-                <a:srgbClr val="000000"/>
-              </a:solidFill>
-              <a:effectLst/>
-              <a:uFillTx/>
-              <a:latin typeface="Arial"/>
-            </a:endParaRPr>
-          </a:p>
-          <a:p>
-            <a:pPr defTabSz="914400">
-              <a:lnSpc>
-                <a:spcPct val="100000"/>
-              </a:lnSpc>
-            </a:pPr>
-            <a:r>
-              <a:rPr b="0" lang="en-US" sz="1100" strike="noStrike" u="none">
+              <a:t>• Queiroz: representações ampliam a percepção de propriedades e relações.</a:t>
+            </a:r>
+            <a:endParaRPr b="0" lang="pt-BR" sz="1050" strike="noStrike" u="none">
+              <a:solidFill>
+                <a:srgbClr val="000000"/>
+              </a:solidFill>
+              <a:effectLst/>
+              <a:uFillTx/>
+              <a:latin typeface="Arial"/>
+            </a:endParaRPr>
+          </a:p>
+          <a:p>
+            <a:pPr defTabSz="914400">
+              <a:lnSpc>
+                <a:spcPct val="100000"/>
+              </a:lnSpc>
+            </a:pPr>
+            <a:r>
+              <a:rPr b="0" lang="en-US" sz="1050" strike="noStrike" u="none">
                 <a:solidFill>
                   <a:srgbClr val="243447"/>
                 </a:solidFill>
@@ -11498,29 +12123,29 @@
                 <a:latin typeface="Aptos"/>
                 <a:ea typeface="Aptos"/>
               </a:rPr>
-              <a:t>• Relato: avaliar o percurso de pensamento, não apenas o código final.</a:t>
-            </a:r>
-            <a:endParaRPr b="0" lang="pt-BR" sz="1100" strike="noStrike" u="none">
-              <a:solidFill>
-                <a:srgbClr val="000000"/>
-              </a:solidFill>
-              <a:effectLst/>
-              <a:uFillTx/>
-              <a:latin typeface="Arial"/>
-            </a:endParaRPr>
-          </a:p>
-        </p:txBody>
-      </p:sp>
-      <p:sp>
-        <p:nvSpPr>
-          <p:cNvPr id="190" name="Text 13"/>
+              <a:t>• Relato: solicitar explicação do raciocínio desenvolvido.</a:t>
+            </a:r>
+            <a:endParaRPr b="0" lang="pt-BR" sz="1050" strike="noStrike" u="none">
+              <a:solidFill>
+                <a:srgbClr val="000000"/>
+              </a:solidFill>
+              <a:effectLst/>
+              <a:uFillTx/>
+              <a:latin typeface="Arial"/>
+            </a:endParaRPr>
+          </a:p>
+        </p:txBody>
+      </p:sp>
+      <p:sp>
+        <p:nvSpPr>
+          <p:cNvPr id="190" name="Text 28"/>
           <p:cNvSpPr/>
           <p:nvPr/>
         </p:nvSpPr>
         <p:spPr>
           <a:xfrm>
             <a:off x="594360" y="5074920"/>
-            <a:ext cx="11018160" cy="255600"/>
+            <a:ext cx="11017800" cy="255240"/>
           </a:xfrm>
           <a:prstGeom prst="rect">
             <a:avLst/>
@@ -11574,14 +12199,14 @@
       </p:sp>
       <p:sp>
         <p:nvSpPr>
-          <p:cNvPr id="191" name="Text 14"/>
+          <p:cNvPr id="191" name="Text 29"/>
           <p:cNvSpPr/>
           <p:nvPr/>
         </p:nvSpPr>
         <p:spPr>
           <a:xfrm>
             <a:off x="594360" y="5376600"/>
-            <a:ext cx="11018160" cy="658080"/>
+            <a:ext cx="11017800" cy="657720"/>
           </a:xfrm>
           <a:prstGeom prst="rect">
             <a:avLst/>
@@ -11611,7 +12236,7 @@
               </a:tabLst>
             </a:pPr>
             <a:r>
-              <a:rPr b="0" lang="en-US" sz="1010" strike="noStrike" u="none">
+              <a:rPr b="0" lang="en-US" sz="1100" strike="noStrike" u="none">
                 <a:solidFill>
                   <a:srgbClr val="243447"/>
                 </a:solidFill>
@@ -11620,29 +12245,29 @@
                 <a:latin typeface="Aptos"/>
                 <a:ea typeface="Aptos"/>
               </a:rPr>
-              <a:t>A função introduz a ideia de regra reutilizável e permite discutir domínio, imagem e transformação.</a:t>
-            </a:r>
-            <a:endParaRPr b="0" lang="pt-BR" sz="1010" strike="noStrike" u="none">
-              <a:solidFill>
-                <a:srgbClr val="000000"/>
-              </a:solidFill>
-              <a:effectLst/>
-              <a:uFillTx/>
-              <a:latin typeface="Arial"/>
-            </a:endParaRPr>
-          </a:p>
-        </p:txBody>
-      </p:sp>
-      <p:sp>
-        <p:nvSpPr>
-          <p:cNvPr id="192" name="Text 15"/>
+              <a:t>A tabela de pares faz aparecer a relação funcional que ficaria escondida em uma lista de resultados.</a:t>
+            </a:r>
+            <a:endParaRPr b="0" lang="pt-BR" sz="1100" strike="noStrike" u="none">
+              <a:solidFill>
+                <a:srgbClr val="000000"/>
+              </a:solidFill>
+              <a:effectLst/>
+              <a:uFillTx/>
+              <a:latin typeface="Arial"/>
+            </a:endParaRPr>
+          </a:p>
+        </p:txBody>
+      </p:sp>
+      <p:sp>
+        <p:nvSpPr>
+          <p:cNvPr id="192" name="Text 30"/>
           <p:cNvSpPr/>
           <p:nvPr/>
         </p:nvSpPr>
         <p:spPr>
           <a:xfrm>
             <a:off x="594360" y="6263640"/>
-            <a:ext cx="11018160" cy="319680"/>
+            <a:ext cx="11017800" cy="319320"/>
           </a:xfrm>
           <a:prstGeom prst="rect">
             <a:avLst/>
@@ -11740,7 +12365,7 @@
         <p:spPr>
           <a:xfrm>
             <a:off x="502920" y="164520"/>
-            <a:ext cx="7131960" cy="228240"/>
+            <a:ext cx="7131600" cy="227880"/>
           </a:xfrm>
           <a:prstGeom prst="rect">
             <a:avLst/>
@@ -11801,7 +12426,7 @@
         <p:spPr>
           <a:xfrm>
             <a:off x="7955280" y="164520"/>
-            <a:ext cx="2925720" cy="228240"/>
+            <a:ext cx="2925360" cy="227880"/>
           </a:xfrm>
           <a:prstGeom prst="rect">
             <a:avLst/>
@@ -11862,7 +12487,7 @@
         <p:spPr>
           <a:xfrm>
             <a:off x="11064240" y="109800"/>
-            <a:ext cx="731160" cy="319680"/>
+            <a:ext cx="730800" cy="319320"/>
           </a:xfrm>
           <a:prstGeom prst="rect">
             <a:avLst/>
@@ -11901,7 +12526,7 @@
                 <a:latin typeface="Aptos Display"/>
                 <a:ea typeface="Aptos Display"/>
               </a:rPr>
-              <a:t>17</a:t>
+              <a:t>16</a:t>
             </a:r>
             <a:endParaRPr b="0" lang="pt-BR" sz="1200" strike="noStrike" u="none">
               <a:solidFill>
@@ -11966,7 +12591,7 @@
         <p:spPr>
           <a:xfrm>
             <a:off x="530280" y="749880"/>
-            <a:ext cx="411120" cy="502560"/>
+            <a:ext cx="410760" cy="502200"/>
           </a:xfrm>
           <a:prstGeom prst="rect">
             <a:avLst/>
@@ -12027,7 +12652,7 @@
         <p:spPr>
           <a:xfrm>
             <a:off x="960120" y="859680"/>
-            <a:ext cx="731160" cy="228240"/>
+            <a:ext cx="730800" cy="227880"/>
           </a:xfrm>
           <a:prstGeom prst="rect">
             <a:avLst/>
@@ -12066,7 +12691,7 @@
                 <a:latin typeface="Aptos"/>
                 <a:ea typeface="Aptos"/>
               </a:rPr>
-              <a:t>1.8</a:t>
+              <a:t>1.7</a:t>
             </a:r>
             <a:endParaRPr b="0" lang="pt-BR" sz="850" strike="noStrike" u="none">
               <a:solidFill>
@@ -12088,7 +12713,7 @@
         <p:spPr>
           <a:xfrm>
             <a:off x="960120" y="667440"/>
-            <a:ext cx="10698120" cy="639720"/>
+            <a:ext cx="10697760" cy="639360"/>
           </a:xfrm>
           <a:prstGeom prst="rect">
             <a:avLst/>
@@ -12127,7 +12752,7 @@
                 <a:latin typeface="Aptos Display"/>
                 <a:ea typeface="Aptos Display"/>
               </a:rPr>
-              <a:t>Como o computador representa decisões?</a:t>
+              <a:t>Como uma função sintetiza uma ideia computacional?</a:t>
             </a:r>
             <a:endParaRPr b="0" lang="pt-BR" sz="2350" strike="noStrike" u="none">
               <a:solidFill>
@@ -12149,7 +12774,7 @@
         <p:spPr>
           <a:xfrm>
             <a:off x="594360" y="1481400"/>
-            <a:ext cx="5120280" cy="255600"/>
+            <a:ext cx="5119920" cy="255240"/>
           </a:xfrm>
           <a:prstGeom prst="rect">
             <a:avLst/>
@@ -12210,7 +12835,7 @@
         <p:spPr>
           <a:xfrm>
             <a:off x="594360" y="1783080"/>
-            <a:ext cx="5074560" cy="1234080"/>
+            <a:ext cx="5074200" cy="1233720"/>
           </a:xfrm>
           <a:prstGeom prst="rect">
             <a:avLst/>
@@ -12258,7 +12883,7 @@
                 <a:latin typeface="Aptos"/>
                 <a:ea typeface="Aptos"/>
               </a:rPr>
-              <a:t>Use uma condição simples.</a:t>
+              <a:t>Transforme uma conta repetida em função.</a:t>
             </a:r>
             <a:endParaRPr b="0" lang="pt-BR" sz="1200" strike="noStrike" u="none">
               <a:solidFill>
@@ -12285,7 +12910,7 @@
                 <a:latin typeface="Aptos"/>
                 <a:ea typeface="Aptos"/>
               </a:rPr>
-              <a:t>• Teste dois casos.</a:t>
+              <a:t>• Teste diferentes entradas.</a:t>
             </a:r>
             <a:endParaRPr b="0" lang="pt-BR" sz="1200" strike="noStrike" u="none">
               <a:solidFill>
@@ -12312,7 +12937,7 @@
                 <a:latin typeface="Aptos"/>
                 <a:ea typeface="Aptos"/>
               </a:rPr>
-              <a:t>• Discuta a regra antes de executar.</a:t>
+              <a:t>• Compare os resultados.</a:t>
             </a:r>
             <a:endParaRPr b="0" lang="pt-BR" sz="1200" strike="noStrike" u="none">
               <a:solidFill>
@@ -12334,7 +12959,7 @@
         <p:spPr>
           <a:xfrm>
             <a:off x="5925240" y="1481400"/>
-            <a:ext cx="5623200" cy="255600"/>
+            <a:ext cx="5622840" cy="255240"/>
           </a:xfrm>
           <a:prstGeom prst="rect">
             <a:avLst/>
@@ -12395,7 +13020,7 @@
         <p:spPr>
           <a:xfrm>
             <a:off x="5925240" y="1755720"/>
-            <a:ext cx="5623200" cy="1371240"/>
+            <a:ext cx="5622840" cy="1370880"/>
           </a:xfrm>
           <a:prstGeom prst="rect">
             <a:avLst/>
@@ -12436,7 +13061,7 @@
                 <a:latin typeface="Cascadia Mono"/>
                 <a:ea typeface="Cascadia Mono"/>
               </a:rPr>
-              <a:t>nota = 6.5</a:t>
+              <a:t>dobro(x) = 2x</a:t>
             </a:r>
             <a:endParaRPr b="0" lang="pt-BR" sz="970" strike="noStrike" u="none">
               <a:solidFill>
@@ -12466,7 +13091,7 @@
                 <a:latin typeface="Cascadia Mono"/>
                 <a:ea typeface="Cascadia Mono"/>
               </a:rPr>
-              <a:t>situacao = nota &gt;= 7 ? "aprovado" : "rever"</a:t>
+              <a:t>dobro(4)</a:t>
             </a:r>
             <a:endParaRPr b="0" lang="pt-BR" sz="970" strike="noStrike" u="none">
               <a:solidFill>
@@ -12477,6 +13102,36 @@
               <a:latin typeface="Arial"/>
             </a:endParaRPr>
           </a:p>
+          <a:p>
+            <a:pPr defTabSz="914400">
+              <a:lnSpc>
+                <a:spcPct val="100000"/>
+              </a:lnSpc>
+              <a:tabLst>
+                <a:tab algn="l" pos="0"/>
+              </a:tabLst>
+            </a:pPr>
+            <a:r>
+              <a:rPr b="0" lang="en-US" sz="970" strike="noStrike" u="none">
+                <a:solidFill>
+                  <a:srgbClr val="f9fafb"/>
+                </a:solidFill>
+                <a:effectLst/>
+                <a:uFillTx/>
+                <a:latin typeface="Cascadia Mono"/>
+                <a:ea typeface="Cascadia Mono"/>
+              </a:rPr>
+              <a:t>dobro(10)</a:t>
+            </a:r>
+            <a:endParaRPr b="0" lang="pt-BR" sz="970" strike="noStrike" u="none">
+              <a:solidFill>
+                <a:srgbClr val="ffffff"/>
+              </a:solidFill>
+              <a:effectLst/>
+              <a:uFillTx/>
+              <a:latin typeface="Arial"/>
+            </a:endParaRPr>
+          </a:p>
         </p:txBody>
       </p:sp>
       <p:sp>
@@ -12488,7 +13143,7 @@
         <p:spPr>
           <a:xfrm>
             <a:off x="594360" y="3364920"/>
-            <a:ext cx="11018160" cy="255600"/>
+            <a:ext cx="11017800" cy="255240"/>
           </a:xfrm>
           <a:prstGeom prst="rect">
             <a:avLst/>
@@ -12549,7 +13204,7 @@
         <p:spPr>
           <a:xfrm>
             <a:off x="594360" y="3675960"/>
-            <a:ext cx="11018160" cy="1234080"/>
+            <a:ext cx="11017800" cy="1233720"/>
           </a:xfrm>
           <a:prstGeom prst="rect">
             <a:avLst/>
@@ -12597,7 +13252,7 @@
                 <a:latin typeface="Aptos"/>
                 <a:ea typeface="Aptos"/>
               </a:rPr>
-              <a:t>Representação de regra e classificação.</a:t>
+              <a:t>Generalização inicial e relação entrada–saída.</a:t>
             </a:r>
             <a:endParaRPr b="0" lang="pt-BR" sz="1100" strike="noStrike" u="none">
               <a:solidFill>
@@ -12624,7 +13279,7 @@
                 <a:latin typeface="Aptos"/>
                 <a:ea typeface="Aptos"/>
               </a:rPr>
-              <a:t>• Relato: solicitar explicação do raciocínio desenvolvido.</a:t>
+              <a:t>• Wessels: níveis SOLO ajudam a observar respostas de menor a maior integração.</a:t>
             </a:r>
             <a:endParaRPr b="0" lang="pt-BR" sz="1100" strike="noStrike" u="none">
               <a:solidFill>
@@ -12651,7 +13306,7 @@
                 <a:latin typeface="Aptos"/>
                 <a:ea typeface="Aptos"/>
               </a:rPr>
-              <a:t>• Queiroz: feedback visual/textual deve orientar interpretação, não apenas corrigir.</a:t>
+              <a:t>• Queiroz: a análise qualitativa observa invariantes e relações mobilizadas na ação.</a:t>
             </a:r>
             <a:endParaRPr b="0" lang="pt-BR" sz="1100" strike="noStrike" u="none">
               <a:solidFill>
@@ -12678,7 +13333,7 @@
                 <a:latin typeface="Aptos"/>
                 <a:ea typeface="Aptos"/>
               </a:rPr>
-              <a:t>• Wessels: atividades planejadas desenvolvem representação e pensamento de ordem superior.</a:t>
+              <a:t>• Relato: avaliar o percurso de pensamento, não apenas o código final.</a:t>
             </a:r>
             <a:endParaRPr b="0" lang="pt-BR" sz="1100" strike="noStrike" u="none">
               <a:solidFill>
@@ -12700,7 +13355,7 @@
         <p:spPr>
           <a:xfrm>
             <a:off x="594360" y="5074920"/>
-            <a:ext cx="11018160" cy="255600"/>
+            <a:ext cx="11017800" cy="255240"/>
           </a:xfrm>
           <a:prstGeom prst="rect">
             <a:avLst/>
@@ -12761,7 +13416,7 @@
         <p:spPr>
           <a:xfrm>
             <a:off x="594360" y="5376600"/>
-            <a:ext cx="11018160" cy="658080"/>
+            <a:ext cx="11017800" cy="657720"/>
           </a:xfrm>
           <a:prstGeom prst="rect">
             <a:avLst/>
@@ -12791,7 +13446,7 @@
               </a:tabLst>
             </a:pPr>
             <a:r>
-              <a:rPr b="0" lang="en-US" sz="1050" strike="noStrike" u="none">
+              <a:rPr b="0" lang="en-US" sz="1010" strike="noStrike" u="none">
                 <a:solidFill>
                   <a:srgbClr val="243447"/>
                 </a:solidFill>
@@ -12800,9 +13455,9 @@
                 <a:latin typeface="Aptos"/>
                 <a:ea typeface="Aptos"/>
               </a:rPr>
-              <a:t>A decisão computacional mostra que regras precisam ser formuladas, testadas e interpretadas.</a:t>
-            </a:r>
-            <a:endParaRPr b="0" lang="pt-BR" sz="1050" strike="noStrike" u="none">
+              <a:t>A função introduz a ideia de regra reutilizável e permite discutir domínio, imagem e transformação.</a:t>
+            </a:r>
+            <a:endParaRPr b="0" lang="pt-BR" sz="1010" strike="noStrike" u="none">
               <a:solidFill>
                 <a:srgbClr val="000000"/>
               </a:solidFill>
@@ -12822,7 +13477,7 @@
         <p:spPr>
           <a:xfrm>
             <a:off x="594360" y="6263640"/>
-            <a:ext cx="11018160" cy="319680"/>
+            <a:ext cx="11017800" cy="319320"/>
           </a:xfrm>
           <a:prstGeom prst="rect">
             <a:avLst/>
@@ -12920,7 +13575,7 @@
         <p:spPr>
           <a:xfrm>
             <a:off x="502920" y="164520"/>
-            <a:ext cx="7131960" cy="228240"/>
+            <a:ext cx="7131600" cy="227880"/>
           </a:xfrm>
           <a:prstGeom prst="rect">
             <a:avLst/>
@@ -12981,7 +13636,7 @@
         <p:spPr>
           <a:xfrm>
             <a:off x="7955280" y="164520"/>
-            <a:ext cx="2925720" cy="228240"/>
+            <a:ext cx="2925360" cy="227880"/>
           </a:xfrm>
           <a:prstGeom prst="rect">
             <a:avLst/>
@@ -13042,7 +13697,7 @@
         <p:spPr>
           <a:xfrm>
             <a:off x="11064240" y="109800"/>
-            <a:ext cx="731160" cy="319680"/>
+            <a:ext cx="730800" cy="319320"/>
           </a:xfrm>
           <a:prstGeom prst="rect">
             <a:avLst/>
@@ -13081,7 +13736,7 @@
                 <a:latin typeface="Aptos Display"/>
                 <a:ea typeface="Aptos Display"/>
               </a:rPr>
-              <a:t>18</a:t>
+              <a:t>17</a:t>
             </a:r>
             <a:endParaRPr b="0" lang="pt-BR" sz="1200" strike="noStrike" u="none">
               <a:solidFill>
@@ -13146,7 +13801,7 @@
         <p:spPr>
           <a:xfrm>
             <a:off x="530280" y="749880"/>
-            <a:ext cx="411120" cy="502560"/>
+            <a:ext cx="410760" cy="502200"/>
           </a:xfrm>
           <a:prstGeom prst="rect">
             <a:avLst/>
@@ -13207,7 +13862,7 @@
         <p:spPr>
           <a:xfrm>
             <a:off x="960120" y="859680"/>
-            <a:ext cx="731160" cy="228240"/>
+            <a:ext cx="730800" cy="227880"/>
           </a:xfrm>
           <a:prstGeom prst="rect">
             <a:avLst/>
@@ -13246,7 +13901,7 @@
                 <a:latin typeface="Aptos"/>
                 <a:ea typeface="Aptos"/>
               </a:rPr>
-              <a:t>1.9</a:t>
+              <a:t>1.8</a:t>
             </a:r>
             <a:endParaRPr b="0" lang="pt-BR" sz="850" strike="noStrike" u="none">
               <a:solidFill>
@@ -13268,7 +13923,7 @@
         <p:spPr>
           <a:xfrm>
             <a:off x="960120" y="667440"/>
-            <a:ext cx="10698120" cy="639720"/>
+            <a:ext cx="10697760" cy="639360"/>
           </a:xfrm>
           <a:prstGeom prst="rect">
             <a:avLst/>
@@ -13307,7 +13962,7 @@
                 <a:latin typeface="Aptos Display"/>
                 <a:ea typeface="Aptos Display"/>
               </a:rPr>
-              <a:t>Como um erro pode virar dado de aprendizagem?</a:t>
+              <a:t>Como o computador representa decisões?</a:t>
             </a:r>
             <a:endParaRPr b="0" lang="pt-BR" sz="2350" strike="noStrike" u="none">
               <a:solidFill>
@@ -13329,7 +13984,7 @@
         <p:spPr>
           <a:xfrm>
             <a:off x="594360" y="1481400"/>
-            <a:ext cx="5120280" cy="255600"/>
+            <a:ext cx="5119920" cy="255240"/>
           </a:xfrm>
           <a:prstGeom prst="rect">
             <a:avLst/>
@@ -13390,7 +14045,7 @@
         <p:spPr>
           <a:xfrm>
             <a:off x="594360" y="1783080"/>
-            <a:ext cx="5074560" cy="1234080"/>
+            <a:ext cx="5074200" cy="1233720"/>
           </a:xfrm>
           <a:prstGeom prst="rect">
             <a:avLst/>
@@ -13438,7 +14093,7 @@
                 <a:latin typeface="Aptos"/>
                 <a:ea typeface="Aptos"/>
               </a:rPr>
-              <a:t>Altere uma variável inexistente.</a:t>
+              <a:t>Use uma condição simples.</a:t>
             </a:r>
             <a:endParaRPr b="0" lang="pt-BR" sz="1200" strike="noStrike" u="none">
               <a:solidFill>
@@ -13465,7 +14120,7 @@
                 <a:latin typeface="Aptos"/>
                 <a:ea typeface="Aptos"/>
               </a:rPr>
-              <a:t>• Observe a mensagem de erro.</a:t>
+              <a:t>• Teste dois casos.</a:t>
             </a:r>
             <a:endParaRPr b="0" lang="pt-BR" sz="1200" strike="noStrike" u="none">
               <a:solidFill>
@@ -13492,7 +14147,7 @@
                 <a:latin typeface="Aptos"/>
                 <a:ea typeface="Aptos"/>
               </a:rPr>
-              <a:t>• Explique que relação estava faltando.</a:t>
+              <a:t>• Discuta a regra antes de executar.</a:t>
             </a:r>
             <a:endParaRPr b="0" lang="pt-BR" sz="1200" strike="noStrike" u="none">
               <a:solidFill>
@@ -13514,7 +14169,7 @@
         <p:spPr>
           <a:xfrm>
             <a:off x="5925240" y="1481400"/>
-            <a:ext cx="5623200" cy="255600"/>
+            <a:ext cx="5622840" cy="255240"/>
           </a:xfrm>
           <a:prstGeom prst="rect">
             <a:avLst/>
@@ -13575,7 +14230,7 @@
         <p:spPr>
           <a:xfrm>
             <a:off x="5925240" y="1755720"/>
-            <a:ext cx="5623200" cy="1371240"/>
+            <a:ext cx="5622840" cy="1370880"/>
           </a:xfrm>
           <a:prstGeom prst="rect">
             <a:avLst/>
@@ -13616,7 +14271,7 @@
                 <a:latin typeface="Cascadia Mono"/>
                 <a:ea typeface="Cascadia Mono"/>
               </a:rPr>
-              <a:t>x = 10</a:t>
+              <a:t>nota = 6.5</a:t>
             </a:r>
             <a:endParaRPr b="0" lang="pt-BR" sz="970" strike="noStrike" u="none">
               <a:solidFill>
@@ -13646,7 +14301,7 @@
                 <a:latin typeface="Cascadia Mono"/>
                 <a:ea typeface="Cascadia Mono"/>
               </a:rPr>
-              <a:t>y = x + z</a:t>
+              <a:t>situacao = nota &gt;= 7 ? "aprovado" : "rever"</a:t>
             </a:r>
             <a:endParaRPr b="0" lang="pt-BR" sz="970" strike="noStrike" u="none">
               <a:solidFill>
@@ -13668,7 +14323,7 @@
         <p:spPr>
           <a:xfrm>
             <a:off x="594360" y="3364920"/>
-            <a:ext cx="11018160" cy="255600"/>
+            <a:ext cx="11017800" cy="255240"/>
           </a:xfrm>
           <a:prstGeom prst="rect">
             <a:avLst/>
@@ -13729,7 +14384,7 @@
         <p:spPr>
           <a:xfrm>
             <a:off x="594360" y="3675960"/>
-            <a:ext cx="11018160" cy="1234080"/>
+            <a:ext cx="11017800" cy="1233720"/>
           </a:xfrm>
           <a:prstGeom prst="rect">
             <a:avLst/>
@@ -13765,10 +14420,10 @@
                 <a:latin typeface="Aptos"/>
                 <a:ea typeface="Aptos"/>
               </a:rPr>
-              <a:t>•</a:t>
-            </a:r>
-            <a:r>
-              <a:rPr b="0" lang="en-US" sz="1050" strike="noStrike" u="none">
+              <a:t>• </a:t>
+            </a:r>
+            <a:r>
+              <a:rPr b="0" lang="en-US" sz="1100" strike="noStrike" u="none">
                 <a:solidFill>
                   <a:srgbClr val="243447"/>
                 </a:solidFill>
@@ -13777,25 +14432,25 @@
                 <a:latin typeface="Aptos"/>
                 <a:ea typeface="Aptos"/>
               </a:rPr>
-              <a:t> Feedback como informação para reconstrução.</a:t>
-            </a:r>
-            <a:endParaRPr b="0" lang="pt-BR" sz="1050" strike="noStrike" u="none">
-              <a:solidFill>
-                <a:srgbClr val="000000"/>
-              </a:solidFill>
-              <a:effectLst/>
-              <a:uFillTx/>
-              <a:latin typeface="Arial"/>
-            </a:endParaRPr>
-          </a:p>
-          <a:p>
-            <a:pPr defTabSz="914400">
-              <a:lnSpc>
-                <a:spcPct val="100000"/>
-              </a:lnSpc>
-            </a:pPr>
-            <a:r>
-              <a:rPr b="0" lang="en-US" sz="1050" strike="noStrike" u="none">
+              <a:t>Representação de regra e classificação.</a:t>
+            </a:r>
+            <a:endParaRPr b="0" lang="pt-BR" sz="1100" strike="noStrike" u="none">
+              <a:solidFill>
+                <a:srgbClr val="000000"/>
+              </a:solidFill>
+              <a:effectLst/>
+              <a:uFillTx/>
+              <a:latin typeface="Arial"/>
+            </a:endParaRPr>
+          </a:p>
+          <a:p>
+            <a:pPr defTabSz="914400">
+              <a:lnSpc>
+                <a:spcPct val="100000"/>
+              </a:lnSpc>
+            </a:pPr>
+            <a:r>
+              <a:rPr b="0" lang="en-US" sz="1100" strike="noStrike" u="none">
                 <a:solidFill>
                   <a:srgbClr val="243447"/>
                 </a:solidFill>
@@ -13804,25 +14459,52 @@
                 <a:latin typeface="Aptos"/>
                 <a:ea typeface="Aptos"/>
               </a:rPr>
+              <a:t>• Relato: solicitar explicação do raciocínio desenvolvido.</a:t>
+            </a:r>
+            <a:endParaRPr b="0" lang="pt-BR" sz="1100" strike="noStrike" u="none">
+              <a:solidFill>
+                <a:srgbClr val="000000"/>
+              </a:solidFill>
+              <a:effectLst/>
+              <a:uFillTx/>
+              <a:latin typeface="Arial"/>
+            </a:endParaRPr>
+          </a:p>
+          <a:p>
+            <a:pPr defTabSz="914400">
+              <a:lnSpc>
+                <a:spcPct val="100000"/>
+              </a:lnSpc>
+            </a:pPr>
+            <a:r>
+              <a:rPr b="0" lang="en-US" sz="1100" strike="noStrike" u="none">
+                <a:solidFill>
+                  <a:srgbClr val="243447"/>
+                </a:solidFill>
+                <a:effectLst/>
+                <a:uFillTx/>
+                <a:latin typeface="Aptos"/>
+                <a:ea typeface="Aptos"/>
+              </a:rPr>
               <a:t>• Queiroz: feedback visual/textual deve orientar interpretação, não apenas corrigir.</a:t>
             </a:r>
-            <a:endParaRPr b="0" lang="pt-BR" sz="1050" strike="noStrike" u="none">
-              <a:solidFill>
-                <a:srgbClr val="000000"/>
-              </a:solidFill>
-              <a:effectLst/>
-              <a:uFillTx/>
-              <a:latin typeface="Arial"/>
-            </a:endParaRPr>
-          </a:p>
-          <a:p>
-            <a:pPr defTabSz="914400">
-              <a:lnSpc>
-                <a:spcPct val="100000"/>
-              </a:lnSpc>
-            </a:pPr>
-            <a:r>
-              <a:rPr b="0" lang="en-US" sz="1050" strike="noStrike" u="none">
+            <a:endParaRPr b="0" lang="pt-BR" sz="1100" strike="noStrike" u="none">
+              <a:solidFill>
+                <a:srgbClr val="000000"/>
+              </a:solidFill>
+              <a:effectLst/>
+              <a:uFillTx/>
+              <a:latin typeface="Arial"/>
+            </a:endParaRPr>
+          </a:p>
+          <a:p>
+            <a:pPr defTabSz="914400">
+              <a:lnSpc>
+                <a:spcPct val="100000"/>
+              </a:lnSpc>
+            </a:pPr>
+            <a:r>
+              <a:rPr b="0" lang="en-US" sz="1100" strike="noStrike" u="none">
                 <a:solidFill>
                   <a:srgbClr val="243447"/>
                 </a:solidFill>
@@ -13831,36 +14513,9 @@
                 <a:latin typeface="Aptos"/>
                 <a:ea typeface="Aptos"/>
               </a:rPr>
-              <a:t>• Relato: incluir revisão, depuração e reconstrução.</a:t>
-            </a:r>
-            <a:endParaRPr b="0" lang="pt-BR" sz="1050" strike="noStrike" u="none">
-              <a:solidFill>
-                <a:srgbClr val="000000"/>
-              </a:solidFill>
-              <a:effectLst/>
-              <a:uFillTx/>
-              <a:latin typeface="Arial"/>
-            </a:endParaRPr>
-          </a:p>
-          <a:p>
-            <a:pPr defTabSz="914400">
-              <a:lnSpc>
-                <a:spcPct val="100000"/>
-              </a:lnSpc>
-            </a:pPr>
-            <a:r>
-              <a:rPr b="0" lang="en-US" sz="1050" strike="noStrike" u="none">
-                <a:solidFill>
-                  <a:srgbClr val="243447"/>
-                </a:solidFill>
-                <a:effectLst/>
-                <a:uFillTx/>
-                <a:latin typeface="Aptos"/>
-                <a:ea typeface="Aptos"/>
-              </a:rPr>
-              <a:t>• Wessels: respostas idiossincráticas também revelam modos de pensar.</a:t>
-            </a:r>
-            <a:endParaRPr b="0" lang="pt-BR" sz="1050" strike="noStrike" u="none">
+              <a:t>• Wessels: atividades planejadas desenvolvem representação e pensamento de ordem superior.</a:t>
+            </a:r>
+            <a:endParaRPr b="0" lang="pt-BR" sz="1100" strike="noStrike" u="none">
               <a:solidFill>
                 <a:srgbClr val="000000"/>
               </a:solidFill>
@@ -13880,7 +14535,7 @@
         <p:spPr>
           <a:xfrm>
             <a:off x="594360" y="5074920"/>
-            <a:ext cx="11018160" cy="255600"/>
+            <a:ext cx="11017800" cy="255240"/>
           </a:xfrm>
           <a:prstGeom prst="rect">
             <a:avLst/>
@@ -13941,7 +14596,7 @@
         <p:spPr>
           <a:xfrm>
             <a:off x="594360" y="5376600"/>
-            <a:ext cx="11018160" cy="658080"/>
+            <a:ext cx="11017800" cy="657720"/>
           </a:xfrm>
           <a:prstGeom prst="rect">
             <a:avLst/>
@@ -13971,7 +14626,7 @@
               </a:tabLst>
             </a:pPr>
             <a:r>
-              <a:rPr b="0" lang="en-US" sz="1010" strike="noStrike" u="none">
+              <a:rPr b="0" lang="en-US" sz="1050" strike="noStrike" u="none">
                 <a:solidFill>
                   <a:srgbClr val="243447"/>
                 </a:solidFill>
@@ -13980,9 +14635,9 @@
                 <a:latin typeface="Aptos"/>
                 <a:ea typeface="Aptos"/>
               </a:rPr>
-              <a:t>O erro revela dependências ausentes e ajuda a discutir a estrutura necessária para o modelo funcionar.</a:t>
-            </a:r>
-            <a:endParaRPr b="0" lang="pt-BR" sz="1010" strike="noStrike" u="none">
+              <a:t>A decisão computacional mostra que regras precisam ser formuladas, testadas e interpretadas.</a:t>
+            </a:r>
+            <a:endParaRPr b="0" lang="pt-BR" sz="1050" strike="noStrike" u="none">
               <a:solidFill>
                 <a:srgbClr val="000000"/>
               </a:solidFill>
@@ -14002,7 +14657,7 @@
         <p:spPr>
           <a:xfrm>
             <a:off x="594360" y="6263640"/>
-            <a:ext cx="11018160" cy="319680"/>
+            <a:ext cx="11017800" cy="319320"/>
           </a:xfrm>
           <a:prstGeom prst="rect">
             <a:avLst/>
@@ -14100,7 +14755,7 @@
         <p:spPr>
           <a:xfrm>
             <a:off x="502920" y="164520"/>
-            <a:ext cx="7131960" cy="228240"/>
+            <a:ext cx="7131600" cy="227880"/>
           </a:xfrm>
           <a:prstGeom prst="rect">
             <a:avLst/>
@@ -14161,7 +14816,7 @@
         <p:spPr>
           <a:xfrm>
             <a:off x="7955280" y="164520"/>
-            <a:ext cx="2925720" cy="228240"/>
+            <a:ext cx="2925360" cy="227880"/>
           </a:xfrm>
           <a:prstGeom prst="rect">
             <a:avLst/>
@@ -14222,7 +14877,7 @@
         <p:spPr>
           <a:xfrm>
             <a:off x="11064240" y="109800"/>
-            <a:ext cx="731160" cy="319680"/>
+            <a:ext cx="730800" cy="319320"/>
           </a:xfrm>
           <a:prstGeom prst="rect">
             <a:avLst/>
@@ -14261,7 +14916,7 @@
                 <a:latin typeface="Aptos Display"/>
                 <a:ea typeface="Aptos Display"/>
               </a:rPr>
-              <a:t>19</a:t>
+              <a:t>18</a:t>
             </a:r>
             <a:endParaRPr b="0" lang="pt-BR" sz="1200" strike="noStrike" u="none">
               <a:solidFill>
@@ -14326,7 +14981,7 @@
         <p:spPr>
           <a:xfrm>
             <a:off x="530280" y="749880"/>
-            <a:ext cx="411120" cy="502560"/>
+            <a:ext cx="410760" cy="502200"/>
           </a:xfrm>
           <a:prstGeom prst="rect">
             <a:avLst/>
@@ -14387,7 +15042,7 @@
         <p:spPr>
           <a:xfrm>
             <a:off x="960120" y="859680"/>
-            <a:ext cx="731160" cy="228240"/>
+            <a:ext cx="730800" cy="227880"/>
           </a:xfrm>
           <a:prstGeom prst="rect">
             <a:avLst/>
@@ -14426,7 +15081,7 @@
                 <a:latin typeface="Aptos"/>
                 <a:ea typeface="Aptos"/>
               </a:rPr>
-              <a:t>1.10</a:t>
+              <a:t>1.9</a:t>
             </a:r>
             <a:endParaRPr b="0" lang="pt-BR" sz="850" strike="noStrike" u="none">
               <a:solidFill>
@@ -14448,7 +15103,7 @@
         <p:spPr>
           <a:xfrm>
             <a:off x="960120" y="667440"/>
-            <a:ext cx="10698120" cy="639720"/>
+            <a:ext cx="10697760" cy="639360"/>
           </a:xfrm>
           <a:prstGeom prst="rect">
             <a:avLst/>
@@ -14487,7 +15142,7 @@
                 <a:latin typeface="Aptos Display"/>
                 <a:ea typeface="Aptos Display"/>
               </a:rPr>
-              <a:t>Como avaliar a primeira experiência com Pluto?</a:t>
+              <a:t>Como um erro pode virar dado de aprendizagem?</a:t>
             </a:r>
             <a:endParaRPr b="0" lang="pt-BR" sz="2350" strike="noStrike" u="none">
               <a:solidFill>
@@ -14509,7 +15164,7 @@
         <p:spPr>
           <a:xfrm>
             <a:off x="594360" y="1481400"/>
-            <a:ext cx="5120280" cy="255600"/>
+            <a:ext cx="5119920" cy="255240"/>
           </a:xfrm>
           <a:prstGeom prst="rect">
             <a:avLst/>
@@ -14570,7 +15225,7 @@
         <p:spPr>
           <a:xfrm>
             <a:off x="594360" y="1783080"/>
-            <a:ext cx="5074560" cy="1234080"/>
+            <a:ext cx="5074200" cy="1233720"/>
           </a:xfrm>
           <a:prstGeom prst="rect">
             <a:avLst/>
@@ -14609,7 +15264,7 @@
               <a:t>• </a:t>
             </a:r>
             <a:r>
-              <a:rPr b="0" lang="en-US" sz="1100" strike="noStrike" u="none">
+              <a:rPr b="0" lang="en-US" sz="1200" strike="noStrike" u="none">
                 <a:solidFill>
                   <a:srgbClr val="243447"/>
                 </a:solidFill>
@@ -14618,25 +15273,25 @@
                 <a:latin typeface="Aptos"/>
                 <a:ea typeface="Aptos"/>
               </a:rPr>
-              <a:t>Peça um registro curto.</a:t>
-            </a:r>
-            <a:endParaRPr b="0" lang="pt-BR" sz="1100" strike="noStrike" u="none">
-              <a:solidFill>
-                <a:srgbClr val="000000"/>
-              </a:solidFill>
-              <a:effectLst/>
-              <a:uFillTx/>
-              <a:latin typeface="Arial"/>
-            </a:endParaRPr>
-          </a:p>
-          <a:p>
-            <a:pPr defTabSz="914400">
-              <a:lnSpc>
-                <a:spcPct val="100000"/>
-              </a:lnSpc>
-            </a:pPr>
-            <a:r>
-              <a:rPr b="0" lang="en-US" sz="1100" strike="noStrike" u="none">
+              <a:t>Altere uma variável inexistente.</a:t>
+            </a:r>
+            <a:endParaRPr b="0" lang="pt-BR" sz="1200" strike="noStrike" u="none">
+              <a:solidFill>
+                <a:srgbClr val="000000"/>
+              </a:solidFill>
+              <a:effectLst/>
+              <a:uFillTx/>
+              <a:latin typeface="Arial"/>
+            </a:endParaRPr>
+          </a:p>
+          <a:p>
+            <a:pPr defTabSz="914400">
+              <a:lnSpc>
+                <a:spcPct val="100000"/>
+              </a:lnSpc>
+            </a:pPr>
+            <a:r>
+              <a:rPr b="0" lang="en-US" sz="1200" strike="noStrike" u="none">
                 <a:solidFill>
                   <a:srgbClr val="243447"/>
                 </a:solidFill>
@@ -14645,25 +15300,25 @@
                 <a:latin typeface="Aptos"/>
                 <a:ea typeface="Aptos"/>
               </a:rPr>
-              <a:t>• Liste o que ficou visível.</a:t>
-            </a:r>
-            <a:endParaRPr b="0" lang="pt-BR" sz="1100" strike="noStrike" u="none">
-              <a:solidFill>
-                <a:srgbClr val="000000"/>
-              </a:solidFill>
-              <a:effectLst/>
-              <a:uFillTx/>
-              <a:latin typeface="Arial"/>
-            </a:endParaRPr>
-          </a:p>
-          <a:p>
-            <a:pPr defTabSz="914400">
-              <a:lnSpc>
-                <a:spcPct val="100000"/>
-              </a:lnSpc>
-            </a:pPr>
-            <a:r>
-              <a:rPr b="0" lang="en-US" sz="1100" strike="noStrike" u="none">
+              <a:t>• Observe a mensagem de erro.</a:t>
+            </a:r>
+            <a:endParaRPr b="0" lang="pt-BR" sz="1200" strike="noStrike" u="none">
+              <a:solidFill>
+                <a:srgbClr val="000000"/>
+              </a:solidFill>
+              <a:effectLst/>
+              <a:uFillTx/>
+              <a:latin typeface="Arial"/>
+            </a:endParaRPr>
+          </a:p>
+          <a:p>
+            <a:pPr defTabSz="914400">
+              <a:lnSpc>
+                <a:spcPct val="100000"/>
+              </a:lnSpc>
+            </a:pPr>
+            <a:r>
+              <a:rPr b="0" lang="en-US" sz="1200" strike="noStrike" u="none">
                 <a:solidFill>
                   <a:srgbClr val="243447"/>
                 </a:solidFill>
@@ -14672,9 +15327,9 @@
                 <a:latin typeface="Aptos"/>
                 <a:ea typeface="Aptos"/>
               </a:rPr>
-              <a:t>• Classifique uma dificuldade como dado, regra ou saída.</a:t>
-            </a:r>
-            <a:endParaRPr b="0" lang="pt-BR" sz="1100" strike="noStrike" u="none">
+              <a:t>• Explique que relação estava faltando.</a:t>
+            </a:r>
+            <a:endParaRPr b="0" lang="pt-BR" sz="1200" strike="noStrike" u="none">
               <a:solidFill>
                 <a:srgbClr val="000000"/>
               </a:solidFill>
@@ -14694,7 +15349,7 @@
         <p:spPr>
           <a:xfrm>
             <a:off x="5925240" y="1481400"/>
-            <a:ext cx="5623200" cy="255600"/>
+            <a:ext cx="5622840" cy="255240"/>
           </a:xfrm>
           <a:prstGeom prst="rect">
             <a:avLst/>
@@ -14755,7 +15410,7 @@
         <p:spPr>
           <a:xfrm>
             <a:off x="5925240" y="1755720"/>
-            <a:ext cx="5623200" cy="1371240"/>
+            <a:ext cx="5622840" cy="1370880"/>
           </a:xfrm>
           <a:prstGeom prst="rect">
             <a:avLst/>
@@ -14796,7 +15451,7 @@
                 <a:latin typeface="Cascadia Mono"/>
                 <a:ea typeface="Cascadia Mono"/>
               </a:rPr>
-              <a:t>reflexao = "Expliquei a relação entre dados e saída"</a:t>
+              <a:t>x = 10</a:t>
             </a:r>
             <a:endParaRPr b="0" lang="pt-BR" sz="970" strike="noStrike" u="none">
               <a:solidFill>
@@ -14826,7 +15481,7 @@
                 <a:latin typeface="Cascadia Mono"/>
                 <a:ea typeface="Cascadia Mono"/>
               </a:rPr>
-              <a:t>length(reflexao)</a:t>
+              <a:t>y = x + z</a:t>
             </a:r>
             <a:endParaRPr b="0" lang="pt-BR" sz="970" strike="noStrike" u="none">
               <a:solidFill>
@@ -14848,7 +15503,7 @@
         <p:spPr>
           <a:xfrm>
             <a:off x="594360" y="3364920"/>
-            <a:ext cx="11018160" cy="255600"/>
+            <a:ext cx="11017800" cy="255240"/>
           </a:xfrm>
           <a:prstGeom prst="rect">
             <a:avLst/>
@@ -14909,7 +15564,7 @@
         <p:spPr>
           <a:xfrm>
             <a:off x="594360" y="3675960"/>
-            <a:ext cx="11018160" cy="1234080"/>
+            <a:ext cx="11017800" cy="1233720"/>
           </a:xfrm>
           <a:prstGeom prst="rect">
             <a:avLst/>
@@ -14945,10 +15600,10 @@
                 <a:latin typeface="Aptos"/>
                 <a:ea typeface="Aptos"/>
               </a:rPr>
-              <a:t>• </a:t>
-            </a:r>
-            <a:r>
-              <a:rPr b="0" lang="en-US" sz="1100" strike="noStrike" u="none">
+              <a:t>•</a:t>
+            </a:r>
+            <a:r>
+              <a:rPr b="0" lang="en-US" sz="1050" strike="noStrike" u="none">
                 <a:solidFill>
                   <a:srgbClr val="243447"/>
                 </a:solidFill>
@@ -14957,25 +15612,25 @@
                 <a:latin typeface="Aptos"/>
                 <a:ea typeface="Aptos"/>
               </a:rPr>
-              <a:t>Reflexão metaconceitual sobre o percurso.</a:t>
-            </a:r>
-            <a:endParaRPr b="0" lang="pt-BR" sz="1100" strike="noStrike" u="none">
-              <a:solidFill>
-                <a:srgbClr val="000000"/>
-              </a:solidFill>
-              <a:effectLst/>
-              <a:uFillTx/>
-              <a:latin typeface="Arial"/>
-            </a:endParaRPr>
-          </a:p>
-          <a:p>
-            <a:pPr defTabSz="914400">
-              <a:lnSpc>
-                <a:spcPct val="100000"/>
-              </a:lnSpc>
-            </a:pPr>
-            <a:r>
-              <a:rPr b="0" lang="en-US" sz="1100" strike="noStrike" u="none">
+              <a:t> Feedback como informação para reconstrução.</a:t>
+            </a:r>
+            <a:endParaRPr b="0" lang="pt-BR" sz="1050" strike="noStrike" u="none">
+              <a:solidFill>
+                <a:srgbClr val="000000"/>
+              </a:solidFill>
+              <a:effectLst/>
+              <a:uFillTx/>
+              <a:latin typeface="Arial"/>
+            </a:endParaRPr>
+          </a:p>
+          <a:p>
+            <a:pPr defTabSz="914400">
+              <a:lnSpc>
+                <a:spcPct val="100000"/>
+              </a:lnSpc>
+            </a:pPr>
+            <a:r>
+              <a:rPr b="0" lang="en-US" sz="1050" strike="noStrike" u="none">
                 <a:solidFill>
                   <a:srgbClr val="243447"/>
                 </a:solidFill>
@@ -14984,25 +15639,25 @@
                 <a:latin typeface="Aptos"/>
                 <a:ea typeface="Aptos"/>
               </a:rPr>
-              <a:t>• Relato: avaliar o percurso de pensamento, não apenas o código final.</a:t>
-            </a:r>
-            <a:endParaRPr b="0" lang="pt-BR" sz="1100" strike="noStrike" u="none">
-              <a:solidFill>
-                <a:srgbClr val="000000"/>
-              </a:solidFill>
-              <a:effectLst/>
-              <a:uFillTx/>
-              <a:latin typeface="Arial"/>
-            </a:endParaRPr>
-          </a:p>
-          <a:p>
-            <a:pPr defTabSz="914400">
-              <a:lnSpc>
-                <a:spcPct val="100000"/>
-              </a:lnSpc>
-            </a:pPr>
-            <a:r>
-              <a:rPr b="0" lang="en-US" sz="1100" strike="noStrike" u="none">
+              <a:t>• Queiroz: feedback visual/textual deve orientar interpretação, não apenas corrigir.</a:t>
+            </a:r>
+            <a:endParaRPr b="0" lang="pt-BR" sz="1050" strike="noStrike" u="none">
+              <a:solidFill>
+                <a:srgbClr val="000000"/>
+              </a:solidFill>
+              <a:effectLst/>
+              <a:uFillTx/>
+              <a:latin typeface="Arial"/>
+            </a:endParaRPr>
+          </a:p>
+          <a:p>
+            <a:pPr defTabSz="914400">
+              <a:lnSpc>
+                <a:spcPct val="100000"/>
+              </a:lnSpc>
+            </a:pPr>
+            <a:r>
+              <a:rPr b="0" lang="en-US" sz="1050" strike="noStrike" u="none">
                 <a:solidFill>
                   <a:srgbClr val="243447"/>
                 </a:solidFill>
@@ -15011,25 +15666,25 @@
                 <a:latin typeface="Aptos"/>
                 <a:ea typeface="Aptos"/>
               </a:rPr>
-              <a:t>• Queiroz: o percurso da tarefa revela mudanças no discurso e na ação.</a:t>
-            </a:r>
-            <a:endParaRPr b="0" lang="pt-BR" sz="1100" strike="noStrike" u="none">
-              <a:solidFill>
-                <a:srgbClr val="000000"/>
-              </a:solidFill>
-              <a:effectLst/>
-              <a:uFillTx/>
-              <a:latin typeface="Arial"/>
-            </a:endParaRPr>
-          </a:p>
-          <a:p>
-            <a:pPr defTabSz="914400">
-              <a:lnSpc>
-                <a:spcPct val="100000"/>
-              </a:lnSpc>
-            </a:pPr>
-            <a:r>
-              <a:rPr b="0" lang="en-US" sz="1100" strike="noStrike" u="none">
+              <a:t>• Relato: incluir revisão, depuração e reconstrução.</a:t>
+            </a:r>
+            <a:endParaRPr b="0" lang="pt-BR" sz="1050" strike="noStrike" u="none">
+              <a:solidFill>
+                <a:srgbClr val="000000"/>
+              </a:solidFill>
+              <a:effectLst/>
+              <a:uFillTx/>
+              <a:latin typeface="Arial"/>
+            </a:endParaRPr>
+          </a:p>
+          <a:p>
+            <a:pPr defTabSz="914400">
+              <a:lnSpc>
+                <a:spcPct val="100000"/>
+              </a:lnSpc>
+            </a:pPr>
+            <a:r>
+              <a:rPr b="0" lang="en-US" sz="1050" strike="noStrike" u="none">
                 <a:solidFill>
                   <a:srgbClr val="243447"/>
                 </a:solidFill>
@@ -15038,9 +15693,9 @@
                 <a:latin typeface="Aptos"/>
                 <a:ea typeface="Aptos"/>
               </a:rPr>
-              <a:t>• Wessels: atividades planejadas desenvolvem representação e pensamento de ordem superior.</a:t>
-            </a:r>
-            <a:endParaRPr b="0" lang="pt-BR" sz="1100" strike="noStrike" u="none">
+              <a:t>• Wessels: respostas idiossincráticas também revelam modos de pensar.</a:t>
+            </a:r>
+            <a:endParaRPr b="0" lang="pt-BR" sz="1050" strike="noStrike" u="none">
               <a:solidFill>
                 <a:srgbClr val="000000"/>
               </a:solidFill>
@@ -15060,7 +15715,7 @@
         <p:spPr>
           <a:xfrm>
             <a:off x="594360" y="5074920"/>
-            <a:ext cx="11018160" cy="255600"/>
+            <a:ext cx="11017800" cy="255240"/>
           </a:xfrm>
           <a:prstGeom prst="rect">
             <a:avLst/>
@@ -15121,7 +15776,7 @@
         <p:spPr>
           <a:xfrm>
             <a:off x="594360" y="5376600"/>
-            <a:ext cx="11018160" cy="658080"/>
+            <a:ext cx="11017800" cy="657720"/>
           </a:xfrm>
           <a:prstGeom prst="rect">
             <a:avLst/>
@@ -15151,7 +15806,7 @@
               </a:tabLst>
             </a:pPr>
             <a:r>
-              <a:rPr b="0" lang="en-US" sz="1100" strike="noStrike" u="none">
+              <a:rPr b="0" lang="en-US" sz="1010" strike="noStrike" u="none">
                 <a:solidFill>
                   <a:srgbClr val="243447"/>
                 </a:solidFill>
@@ -15160,19 +15815,7 @@
                 <a:latin typeface="Aptos"/>
                 <a:ea typeface="Aptos"/>
               </a:rPr>
-              <a:t>A avaliação inicial observa como o estudante descreve e reorganiza a tarefa, não apenas se o código exec</a:t>
-            </a:r>
-            <a:r>
-              <a:rPr b="0" lang="en-US" sz="1010" strike="noStrike" u="none">
-                <a:solidFill>
-                  <a:srgbClr val="243447"/>
-                </a:solidFill>
-                <a:effectLst/>
-                <a:uFillTx/>
-                <a:latin typeface="Aptos"/>
-                <a:ea typeface="Aptos"/>
-              </a:rPr>
-              <a:t>utou.</a:t>
+              <a:t>O erro revela dependências ausentes e ajuda a discutir a estrutura necessária para o modelo funcionar.</a:t>
             </a:r>
             <a:endParaRPr b="0" lang="pt-BR" sz="1010" strike="noStrike" u="none">
               <a:solidFill>
@@ -15194,7 +15837,7 @@
         <p:spPr>
           <a:xfrm>
             <a:off x="594360" y="6263640"/>
-            <a:ext cx="11018160" cy="319680"/>
+            <a:ext cx="11017800" cy="319320"/>
           </a:xfrm>
           <a:prstGeom prst="rect">
             <a:avLst/>
@@ -15292,7 +15935,7 @@
         <p:spPr>
           <a:xfrm>
             <a:off x="502920" y="164520"/>
-            <a:ext cx="7131960" cy="228240"/>
+            <a:ext cx="7131600" cy="227880"/>
           </a:xfrm>
           <a:prstGeom prst="rect">
             <a:avLst/>
@@ -15353,7 +15996,7 @@
         <p:spPr>
           <a:xfrm>
             <a:off x="7955280" y="164520"/>
-            <a:ext cx="2925720" cy="228240"/>
+            <a:ext cx="2925360" cy="227880"/>
           </a:xfrm>
           <a:prstGeom prst="rect">
             <a:avLst/>
@@ -15414,7 +16057,7 @@
         <p:spPr>
           <a:xfrm>
             <a:off x="11064240" y="109800"/>
-            <a:ext cx="731160" cy="319680"/>
+            <a:ext cx="730800" cy="319320"/>
           </a:xfrm>
           <a:prstGeom prst="rect">
             <a:avLst/>
@@ -15518,7 +16161,7 @@
         <p:spPr>
           <a:xfrm>
             <a:off x="594360" y="713160"/>
-            <a:ext cx="10972440" cy="548280"/>
+            <a:ext cx="10972080" cy="547920"/>
           </a:xfrm>
           <a:prstGeom prst="rect">
             <a:avLst/>
@@ -15579,7 +16222,7 @@
         <p:spPr>
           <a:xfrm>
             <a:off x="777240" y="1554480"/>
-            <a:ext cx="5257440" cy="3931560"/>
+            <a:ext cx="5257080" cy="3931200"/>
           </a:xfrm>
           <a:prstGeom prst="rect">
             <a:avLst/>
@@ -15760,7 +16403,7 @@
         <p:spPr>
           <a:xfrm>
             <a:off x="6400800" y="1554480"/>
-            <a:ext cx="5257440" cy="3931560"/>
+            <a:ext cx="5257080" cy="3931200"/>
           </a:xfrm>
           <a:prstGeom prst="rect">
             <a:avLst/>
@@ -15911,7 +16554,7 @@
         <p:spPr>
           <a:xfrm>
             <a:off x="594360" y="6263640"/>
-            <a:ext cx="11018160" cy="319680"/>
+            <a:ext cx="11017800" cy="319320"/>
           </a:xfrm>
           <a:prstGeom prst="rect">
             <a:avLst/>
@@ -15951,6 +16594,1198 @@
                 <a:ea typeface="Aptos"/>
               </a:rPr>
               <a:t>Cada bloco contém 10 tarefas em Pluto, sempre em formato de pergunta.</a:t>
+            </a:r>
+            <a:endParaRPr b="0" lang="pt-BR" sz="850" strike="noStrike" u="none">
+              <a:solidFill>
+                <a:srgbClr val="000000"/>
+              </a:solidFill>
+              <a:effectLst/>
+              <a:uFillTx/>
+              <a:latin typeface="Arial"/>
+            </a:endParaRPr>
+          </a:p>
+        </p:txBody>
+      </p:sp>
+    </p:spTree>
+  </p:cSld>
+  <mc:AlternateContent>
+    <mc:Choice Requires="p14">
+      <p:transition spd="slow" p14:dur="2000"/>
+    </mc:Choice>
+    <mc:Fallback>
+      <p:transition spd="slow"/>
+    </mc:Fallback>
+  </mc:AlternateContent>
+</p:sld>
+</file>
+
+<file path=ppt/slides/slide20.xml><?xml version="1.0" encoding="utf-8"?>
+<p:sld xmlns:a="http://schemas.openxmlformats.org/drawingml/2006/main" xmlns:p="http://schemas.openxmlformats.org/presentationml/2006/main" xmlns:r="http://schemas.openxmlformats.org/officeDocument/2006/relationships" xmlns:p14="http://schemas.microsoft.com/office/powerpoint/2010/main" xmlns:p15="http://schemas.microsoft.com/office/powerpoint/2012/main" xmlns:mc="http://schemas.openxmlformats.org/markup-compatibility/2006">
+  <p:cSld>
+    <p:bg>
+      <p:bgPr>
+        <a:solidFill>
+          <a:srgbClr val="f7f9fc"/>
+        </a:solidFill>
+      </p:bgPr>
+    </p:bg>
+    <p:spTree>
+      <p:nvGrpSpPr>
+        <p:cNvPr id="1" name=""/>
+        <p:cNvGrpSpPr/>
+        <p:nvPr/>
+      </p:nvGrpSpPr>
+      <p:grpSpPr>
+        <a:xfrm>
+          <a:off x="0" y="0"/>
+          <a:ext cx="0" cy="0"/>
+          <a:chOff x="0" y="0"/>
+          <a:chExt cx="0" cy="0"/>
+        </a:xfrm>
+      </p:grpSpPr>
+      <p:sp>
+        <p:nvSpPr>
+          <p:cNvPr id="241" name="Text 0"/>
+          <p:cNvSpPr/>
+          <p:nvPr/>
+        </p:nvSpPr>
+        <p:spPr>
+          <a:xfrm>
+            <a:off x="502920" y="164520"/>
+            <a:ext cx="7131600" cy="227880"/>
+          </a:xfrm>
+          <a:prstGeom prst="rect">
+            <a:avLst/>
+          </a:prstGeom>
+          <a:noFill/>
+          <a:ln w="0">
+            <a:noFill/>
+          </a:ln>
+        </p:spPr>
+        <p:style>
+          <a:lnRef idx="0"/>
+          <a:fillRef idx="0"/>
+          <a:effectRef idx="0"/>
+          <a:fontRef idx="minor"/>
+        </p:style>
+        <p:txBody>
+          <a:bodyPr lIns="0" rIns="0" tIns="0" bIns="0" anchor="ctr">
+            <a:noAutofit/>
+          </a:bodyPr>
+          <a:p>
+            <a:pPr defTabSz="914400">
+              <a:lnSpc>
+                <a:spcPct val="100000"/>
+              </a:lnSpc>
+              <a:tabLst>
+                <a:tab algn="l" pos="0"/>
+              </a:tabLst>
+            </a:pPr>
+            <a:r>
+              <a:rPr b="1" lang="en-US" sz="780" strike="noStrike" u="none">
+                <a:solidFill>
+                  <a:srgbClr val="64748b"/>
+                </a:solidFill>
+                <a:effectLst/>
+                <a:uFillTx/>
+                <a:latin typeface="Aptos"/>
+                <a:ea typeface="Aptos"/>
+              </a:rPr>
+              <a:t>PROFCOMP • Pensamento Computacional • Julia + Pluto</a:t>
+            </a:r>
+            <a:endParaRPr b="0" lang="pt-BR" sz="780" strike="noStrike" u="none">
+              <a:solidFill>
+                <a:srgbClr val="000000"/>
+              </a:solidFill>
+              <a:effectLst/>
+              <a:uFillTx/>
+              <a:latin typeface="Arial"/>
+            </a:endParaRPr>
+          </a:p>
+        </p:txBody>
+      </p:sp>
+      <p:sp>
+        <p:nvSpPr>
+          <p:cNvPr id="242" name="Text 1"/>
+          <p:cNvSpPr/>
+          <p:nvPr/>
+        </p:nvSpPr>
+        <p:spPr>
+          <a:xfrm>
+            <a:off x="7955280" y="164520"/>
+            <a:ext cx="2925360" cy="227880"/>
+          </a:xfrm>
+          <a:prstGeom prst="rect">
+            <a:avLst/>
+          </a:prstGeom>
+          <a:noFill/>
+          <a:ln w="0">
+            <a:noFill/>
+          </a:ln>
+        </p:spPr>
+        <p:style>
+          <a:lnRef idx="0"/>
+          <a:fillRef idx="0"/>
+          <a:effectRef idx="0"/>
+          <a:fontRef idx="minor"/>
+        </p:style>
+        <p:txBody>
+          <a:bodyPr lIns="0" rIns="0" tIns="0" bIns="0" anchor="ctr">
+            <a:noAutofit/>
+          </a:bodyPr>
+          <a:p>
+            <a:pPr algn="r" defTabSz="914400">
+              <a:lnSpc>
+                <a:spcPct val="100000"/>
+              </a:lnSpc>
+              <a:tabLst>
+                <a:tab algn="l" pos="0"/>
+              </a:tabLst>
+            </a:pPr>
+            <a:r>
+              <a:rPr b="0" lang="en-US" sz="760" strike="noStrike" u="none">
+                <a:solidFill>
+                  <a:srgbClr val="64748b"/>
+                </a:solidFill>
+                <a:effectLst/>
+                <a:uFillTx/>
+                <a:latin typeface="Aptos"/>
+                <a:ea typeface="Aptos"/>
+              </a:rPr>
+              <a:t>1 • Introdução</a:t>
+            </a:r>
+            <a:endParaRPr b="0" lang="pt-BR" sz="760" strike="noStrike" u="none">
+              <a:solidFill>
+                <a:srgbClr val="000000"/>
+              </a:solidFill>
+              <a:effectLst/>
+              <a:uFillTx/>
+              <a:latin typeface="Arial"/>
+            </a:endParaRPr>
+          </a:p>
+        </p:txBody>
+      </p:sp>
+      <p:sp>
+        <p:nvSpPr>
+          <p:cNvPr id="243" name="Text 2"/>
+          <p:cNvSpPr/>
+          <p:nvPr/>
+        </p:nvSpPr>
+        <p:spPr>
+          <a:xfrm>
+            <a:off x="11064240" y="109800"/>
+            <a:ext cx="730800" cy="319320"/>
+          </a:xfrm>
+          <a:prstGeom prst="rect">
+            <a:avLst/>
+          </a:prstGeom>
+          <a:noFill/>
+          <a:ln w="0">
+            <a:noFill/>
+          </a:ln>
+        </p:spPr>
+        <p:style>
+          <a:lnRef idx="0"/>
+          <a:fillRef idx="0"/>
+          <a:effectRef idx="0"/>
+          <a:fontRef idx="minor"/>
+        </p:style>
+        <p:txBody>
+          <a:bodyPr lIns="0" rIns="0" tIns="0" bIns="0" anchor="ctr">
+            <a:noAutofit/>
+          </a:bodyPr>
+          <a:p>
+            <a:pPr algn="r" defTabSz="914400">
+              <a:lnSpc>
+                <a:spcPct val="100000"/>
+              </a:lnSpc>
+              <a:tabLst>
+                <a:tab algn="l" pos="0"/>
+              </a:tabLst>
+            </a:pPr>
+            <a:r>
+              <a:rPr b="1" lang="en-US" sz="1200" strike="noStrike" u="none">
+                <a:solidFill>
+                  <a:srgbClr val="243447"/>
+                </a:solidFill>
+                <a:effectLst/>
+                <a:uFillTx/>
+                <a:latin typeface="Aptos Display"/>
+                <a:ea typeface="Aptos Display"/>
+              </a:rPr>
+              <a:t>19</a:t>
+            </a:r>
+            <a:endParaRPr b="0" lang="pt-BR" sz="1200" strike="noStrike" u="none">
+              <a:solidFill>
+                <a:srgbClr val="000000"/>
+              </a:solidFill>
+              <a:effectLst/>
+              <a:uFillTx/>
+              <a:latin typeface="Arial"/>
+            </a:endParaRPr>
+          </a:p>
+        </p:txBody>
+      </p:sp>
+      <p:sp>
+        <p:nvSpPr>
+          <p:cNvPr id="244" name="Shape 3"/>
+          <p:cNvSpPr/>
+          <p:nvPr/>
+        </p:nvSpPr>
+        <p:spPr>
+          <a:xfrm>
+            <a:off x="502920" y="502920"/>
+            <a:ext cx="11247120" cy="360"/>
+          </a:xfrm>
+          <a:prstGeom prst="line">
+            <a:avLst/>
+          </a:prstGeom>
+          <a:ln w="7620">
+            <a:solidFill>
+              <a:srgbClr val="d7dee9"/>
+            </a:solidFill>
+            <a:round/>
+          </a:ln>
+        </p:spPr>
+        <p:style>
+          <a:lnRef idx="0"/>
+          <a:fillRef idx="0"/>
+          <a:effectRef idx="0"/>
+          <a:fontRef idx="minor"/>
+        </p:style>
+        <p:txBody>
+          <a:bodyPr lIns="90000" rIns="90000" tIns="-44640" bIns="-44640" anchor="t" anchorCtr="1">
+            <a:noAutofit/>
+          </a:bodyPr>
+          <a:p>
+            <a:endParaRPr b="0" lang="pt-BR" sz="1800" strike="noStrike" u="none">
+              <a:solidFill>
+                <a:srgbClr val="000000"/>
+              </a:solidFill>
+              <a:effectLst/>
+              <a:uFillTx/>
+              <a:latin typeface="Arial"/>
+            </a:endParaRPr>
+          </a:p>
+        </p:txBody>
+      </p:sp>
+      <p:sp>
+        <p:nvSpPr>
+          <p:cNvPr id="245" name="Text 4"/>
+          <p:cNvSpPr/>
+          <p:nvPr/>
+        </p:nvSpPr>
+        <p:spPr>
+          <a:xfrm>
+            <a:off x="530280" y="749880"/>
+            <a:ext cx="410760" cy="502200"/>
+          </a:xfrm>
+          <a:prstGeom prst="rect">
+            <a:avLst/>
+          </a:prstGeom>
+          <a:noFill/>
+          <a:ln w="0">
+            <a:noFill/>
+          </a:ln>
+        </p:spPr>
+        <p:style>
+          <a:lnRef idx="0"/>
+          <a:fillRef idx="0"/>
+          <a:effectRef idx="0"/>
+          <a:fontRef idx="minor"/>
+        </p:style>
+        <p:txBody>
+          <a:bodyPr lIns="0" rIns="0" tIns="0" bIns="0" anchor="ctr">
+            <a:noAutofit/>
+          </a:bodyPr>
+          <a:p>
+            <a:pPr algn="ctr" defTabSz="914400">
+              <a:lnSpc>
+                <a:spcPct val="100000"/>
+              </a:lnSpc>
+              <a:tabLst>
+                <a:tab algn="l" pos="0"/>
+              </a:tabLst>
+            </a:pPr>
+            <a:r>
+              <a:rPr b="1" lang="en-US" sz="2800" strike="noStrike" u="none">
+                <a:solidFill>
+                  <a:srgbClr val="5b6cff"/>
+                </a:solidFill>
+                <a:effectLst/>
+                <a:uFillTx/>
+                <a:latin typeface="Aptos Display"/>
+                <a:ea typeface="Aptos Display"/>
+              </a:rPr>
+              <a:t>?</a:t>
+            </a:r>
+            <a:endParaRPr b="0" lang="pt-BR" sz="2800" strike="noStrike" u="none">
+              <a:solidFill>
+                <a:srgbClr val="000000"/>
+              </a:solidFill>
+              <a:effectLst/>
+              <a:uFillTx/>
+              <a:latin typeface="Arial"/>
+            </a:endParaRPr>
+          </a:p>
+        </p:txBody>
+      </p:sp>
+      <p:sp>
+        <p:nvSpPr>
+          <p:cNvPr id="246" name="Text 5"/>
+          <p:cNvSpPr/>
+          <p:nvPr/>
+        </p:nvSpPr>
+        <p:spPr>
+          <a:xfrm>
+            <a:off x="960120" y="859680"/>
+            <a:ext cx="730800" cy="227880"/>
+          </a:xfrm>
+          <a:prstGeom prst="rect">
+            <a:avLst/>
+          </a:prstGeom>
+          <a:noFill/>
+          <a:ln w="0">
+            <a:noFill/>
+          </a:ln>
+        </p:spPr>
+        <p:style>
+          <a:lnRef idx="0"/>
+          <a:fillRef idx="0"/>
+          <a:effectRef idx="0"/>
+          <a:fontRef idx="minor"/>
+        </p:style>
+        <p:txBody>
+          <a:bodyPr lIns="0" rIns="0" tIns="0" bIns="0" anchor="ctr">
+            <a:noAutofit/>
+          </a:bodyPr>
+          <a:p>
+            <a:pPr defTabSz="914400">
+              <a:lnSpc>
+                <a:spcPct val="100000"/>
+              </a:lnSpc>
+              <a:tabLst>
+                <a:tab algn="l" pos="0"/>
+              </a:tabLst>
+            </a:pPr>
+            <a:r>
+              <a:rPr b="1" lang="en-US" sz="850" strike="noStrike" u="none">
+                <a:solidFill>
+                  <a:srgbClr val="5b6cff"/>
+                </a:solidFill>
+                <a:effectLst/>
+                <a:uFillTx/>
+                <a:latin typeface="Aptos"/>
+                <a:ea typeface="Aptos"/>
+              </a:rPr>
+              <a:t>1.10</a:t>
+            </a:r>
+            <a:endParaRPr b="0" lang="pt-BR" sz="850" strike="noStrike" u="none">
+              <a:solidFill>
+                <a:srgbClr val="000000"/>
+              </a:solidFill>
+              <a:effectLst/>
+              <a:uFillTx/>
+              <a:latin typeface="Arial"/>
+            </a:endParaRPr>
+          </a:p>
+        </p:txBody>
+      </p:sp>
+      <p:sp>
+        <p:nvSpPr>
+          <p:cNvPr id="247" name="Text 6"/>
+          <p:cNvSpPr/>
+          <p:nvPr/>
+        </p:nvSpPr>
+        <p:spPr>
+          <a:xfrm>
+            <a:off x="960120" y="667440"/>
+            <a:ext cx="10697760" cy="639360"/>
+          </a:xfrm>
+          <a:prstGeom prst="rect">
+            <a:avLst/>
+          </a:prstGeom>
+          <a:noFill/>
+          <a:ln w="0">
+            <a:noFill/>
+          </a:ln>
+        </p:spPr>
+        <p:style>
+          <a:lnRef idx="0"/>
+          <a:fillRef idx="0"/>
+          <a:effectRef idx="0"/>
+          <a:fontRef idx="minor"/>
+        </p:style>
+        <p:txBody>
+          <a:bodyPr lIns="0" rIns="0" tIns="0" bIns="0" anchor="ctr">
+            <a:normAutofit/>
+          </a:bodyPr>
+          <a:p>
+            <a:pPr defTabSz="914400">
+              <a:lnSpc>
+                <a:spcPct val="100000"/>
+              </a:lnSpc>
+              <a:tabLst>
+                <a:tab algn="l" pos="0"/>
+              </a:tabLst>
+            </a:pPr>
+            <a:r>
+              <a:rPr b="1" lang="en-US" sz="2350" strike="noStrike" u="none">
+                <a:solidFill>
+                  <a:srgbClr val="243447"/>
+                </a:solidFill>
+                <a:effectLst/>
+                <a:uFillTx/>
+                <a:latin typeface="Aptos Display"/>
+                <a:ea typeface="Aptos Display"/>
+              </a:rPr>
+              <a:t>Como avaliar a primeira experiência com Pluto?</a:t>
+            </a:r>
+            <a:endParaRPr b="0" lang="pt-BR" sz="2350" strike="noStrike" u="none">
+              <a:solidFill>
+                <a:srgbClr val="000000"/>
+              </a:solidFill>
+              <a:effectLst/>
+              <a:uFillTx/>
+              <a:latin typeface="Arial"/>
+            </a:endParaRPr>
+          </a:p>
+        </p:txBody>
+      </p:sp>
+      <p:sp>
+        <p:nvSpPr>
+          <p:cNvPr id="248" name="Text 7"/>
+          <p:cNvSpPr/>
+          <p:nvPr/>
+        </p:nvSpPr>
+        <p:spPr>
+          <a:xfrm>
+            <a:off x="594360" y="1481400"/>
+            <a:ext cx="5119920" cy="255240"/>
+          </a:xfrm>
+          <a:prstGeom prst="rect">
+            <a:avLst/>
+          </a:prstGeom>
+          <a:noFill/>
+          <a:ln w="0">
+            <a:noFill/>
+          </a:ln>
+        </p:spPr>
+        <p:style>
+          <a:lnRef idx="0"/>
+          <a:fillRef idx="0"/>
+          <a:effectRef idx="0"/>
+          <a:fontRef idx="minor"/>
+        </p:style>
+        <p:txBody>
+          <a:bodyPr lIns="0" rIns="0" tIns="0" bIns="0" anchor="ctr">
+            <a:noAutofit/>
+          </a:bodyPr>
+          <a:p>
+            <a:pPr defTabSz="914400">
+              <a:lnSpc>
+                <a:spcPct val="100000"/>
+              </a:lnSpc>
+              <a:tabLst>
+                <a:tab algn="l" pos="0"/>
+              </a:tabLst>
+            </a:pPr>
+            <a:r>
+              <a:rPr b="1" lang="en-US" sz="950" strike="noStrike" u="none">
+                <a:solidFill>
+                  <a:srgbClr val="5b6cff"/>
+                </a:solidFill>
+                <a:effectLst/>
+                <a:uFillTx/>
+                <a:latin typeface="Aptos Display"/>
+                <a:ea typeface="Aptos Display"/>
+              </a:rPr>
+              <a:t>TAREFA BREVE NO PLUTO</a:t>
+            </a:r>
+            <a:endParaRPr b="0" lang="pt-BR" sz="950" strike="noStrike" u="none">
+              <a:solidFill>
+                <a:srgbClr val="000000"/>
+              </a:solidFill>
+              <a:effectLst/>
+              <a:uFillTx/>
+              <a:latin typeface="Arial"/>
+            </a:endParaRPr>
+          </a:p>
+        </p:txBody>
+      </p:sp>
+      <p:sp>
+        <p:nvSpPr>
+          <p:cNvPr id="249" name="Text 8"/>
+          <p:cNvSpPr/>
+          <p:nvPr/>
+        </p:nvSpPr>
+        <p:spPr>
+          <a:xfrm>
+            <a:off x="594360" y="1783080"/>
+            <a:ext cx="5074200" cy="1233720"/>
+          </a:xfrm>
+          <a:prstGeom prst="rect">
+            <a:avLst/>
+          </a:prstGeom>
+          <a:noFill/>
+          <a:ln w="0">
+            <a:noFill/>
+          </a:ln>
+        </p:spPr>
+        <p:style>
+          <a:lnRef idx="0"/>
+          <a:fillRef idx="0"/>
+          <a:effectRef idx="0"/>
+          <a:fontRef idx="minor"/>
+        </p:style>
+        <p:txBody>
+          <a:bodyPr lIns="90000" rIns="90000" tIns="45000" bIns="45000" anchor="t">
+            <a:normAutofit/>
+          </a:bodyPr>
+          <a:p>
+            <a:pPr defTabSz="914400">
+              <a:lnSpc>
+                <a:spcPct val="100000"/>
+              </a:lnSpc>
+            </a:pPr>
+            <a:r>
+              <a:rPr b="0" lang="en-US" sz="1020" strike="noStrike" u="none">
+                <a:solidFill>
+                  <a:srgbClr val="243447"/>
+                </a:solidFill>
+                <a:effectLst/>
+                <a:uFillTx/>
+                <a:latin typeface="Aptos"/>
+                <a:ea typeface="Aptos"/>
+              </a:rPr>
+              <a:t>• </a:t>
+            </a:r>
+            <a:r>
+              <a:rPr b="0" lang="en-US" sz="1100" strike="noStrike" u="none">
+                <a:solidFill>
+                  <a:srgbClr val="243447"/>
+                </a:solidFill>
+                <a:effectLst/>
+                <a:uFillTx/>
+                <a:latin typeface="Aptos"/>
+                <a:ea typeface="Aptos"/>
+              </a:rPr>
+              <a:t>Peça um registro curto.</a:t>
+            </a:r>
+            <a:endParaRPr b="0" lang="pt-BR" sz="1100" strike="noStrike" u="none">
+              <a:solidFill>
+                <a:srgbClr val="000000"/>
+              </a:solidFill>
+              <a:effectLst/>
+              <a:uFillTx/>
+              <a:latin typeface="Arial"/>
+            </a:endParaRPr>
+          </a:p>
+          <a:p>
+            <a:pPr defTabSz="914400">
+              <a:lnSpc>
+                <a:spcPct val="100000"/>
+              </a:lnSpc>
+            </a:pPr>
+            <a:r>
+              <a:rPr b="0" lang="en-US" sz="1100" strike="noStrike" u="none">
+                <a:solidFill>
+                  <a:srgbClr val="243447"/>
+                </a:solidFill>
+                <a:effectLst/>
+                <a:uFillTx/>
+                <a:latin typeface="Aptos"/>
+                <a:ea typeface="Aptos"/>
+              </a:rPr>
+              <a:t>• Liste o que ficou visível.</a:t>
+            </a:r>
+            <a:endParaRPr b="0" lang="pt-BR" sz="1100" strike="noStrike" u="none">
+              <a:solidFill>
+                <a:srgbClr val="000000"/>
+              </a:solidFill>
+              <a:effectLst/>
+              <a:uFillTx/>
+              <a:latin typeface="Arial"/>
+            </a:endParaRPr>
+          </a:p>
+          <a:p>
+            <a:pPr defTabSz="914400">
+              <a:lnSpc>
+                <a:spcPct val="100000"/>
+              </a:lnSpc>
+            </a:pPr>
+            <a:r>
+              <a:rPr b="0" lang="en-US" sz="1100" strike="noStrike" u="none">
+                <a:solidFill>
+                  <a:srgbClr val="243447"/>
+                </a:solidFill>
+                <a:effectLst/>
+                <a:uFillTx/>
+                <a:latin typeface="Aptos"/>
+                <a:ea typeface="Aptos"/>
+              </a:rPr>
+              <a:t>• Classifique uma dificuldade como dado, regra ou saída.</a:t>
+            </a:r>
+            <a:endParaRPr b="0" lang="pt-BR" sz="1100" strike="noStrike" u="none">
+              <a:solidFill>
+                <a:srgbClr val="000000"/>
+              </a:solidFill>
+              <a:effectLst/>
+              <a:uFillTx/>
+              <a:latin typeface="Arial"/>
+            </a:endParaRPr>
+          </a:p>
+        </p:txBody>
+      </p:sp>
+      <p:sp>
+        <p:nvSpPr>
+          <p:cNvPr id="250" name="Text 9"/>
+          <p:cNvSpPr/>
+          <p:nvPr/>
+        </p:nvSpPr>
+        <p:spPr>
+          <a:xfrm>
+            <a:off x="5925240" y="1481400"/>
+            <a:ext cx="5622840" cy="255240"/>
+          </a:xfrm>
+          <a:prstGeom prst="rect">
+            <a:avLst/>
+          </a:prstGeom>
+          <a:noFill/>
+          <a:ln w="0">
+            <a:noFill/>
+          </a:ln>
+        </p:spPr>
+        <p:style>
+          <a:lnRef idx="0"/>
+          <a:fillRef idx="0"/>
+          <a:effectRef idx="0"/>
+          <a:fontRef idx="minor"/>
+        </p:style>
+        <p:txBody>
+          <a:bodyPr lIns="0" rIns="0" tIns="0" bIns="0" anchor="ctr">
+            <a:noAutofit/>
+          </a:bodyPr>
+          <a:p>
+            <a:pPr defTabSz="914400">
+              <a:lnSpc>
+                <a:spcPct val="100000"/>
+              </a:lnSpc>
+              <a:tabLst>
+                <a:tab algn="l" pos="0"/>
+              </a:tabLst>
+            </a:pPr>
+            <a:r>
+              <a:rPr b="1" lang="en-US" sz="950" strike="noStrike" u="none">
+                <a:solidFill>
+                  <a:srgbClr val="5b6cff"/>
+                </a:solidFill>
+                <a:effectLst/>
+                <a:uFillTx/>
+                <a:latin typeface="Aptos Display"/>
+                <a:ea typeface="Aptos Display"/>
+              </a:rPr>
+              <a:t>EXEMPLO EM JULIA</a:t>
+            </a:r>
+            <a:endParaRPr b="0" lang="pt-BR" sz="950" strike="noStrike" u="none">
+              <a:solidFill>
+                <a:srgbClr val="000000"/>
+              </a:solidFill>
+              <a:effectLst/>
+              <a:uFillTx/>
+              <a:latin typeface="Arial"/>
+            </a:endParaRPr>
+          </a:p>
+        </p:txBody>
+      </p:sp>
+      <p:sp>
+        <p:nvSpPr>
+          <p:cNvPr id="251" name="Text 10"/>
+          <p:cNvSpPr/>
+          <p:nvPr/>
+        </p:nvSpPr>
+        <p:spPr>
+          <a:xfrm>
+            <a:off x="5925240" y="1755720"/>
+            <a:ext cx="5622840" cy="1370880"/>
+          </a:xfrm>
+          <a:prstGeom prst="rect">
+            <a:avLst/>
+          </a:prstGeom>
+          <a:solidFill>
+            <a:srgbClr val="111827"/>
+          </a:solidFill>
+          <a:ln w="0">
+            <a:noFill/>
+          </a:ln>
+        </p:spPr>
+        <p:style>
+          <a:lnRef idx="0"/>
+          <a:fillRef idx="0"/>
+          <a:effectRef idx="0"/>
+          <a:fontRef idx="minor"/>
+        </p:style>
+        <p:txBody>
+          <a:bodyPr lIns="90000" rIns="90000" tIns="45000" bIns="45000" anchor="ctr">
+            <a:normAutofit/>
+          </a:bodyPr>
+          <a:p>
+            <a:pPr defTabSz="914400">
+              <a:lnSpc>
+                <a:spcPct val="100000"/>
+              </a:lnSpc>
+              <a:tabLst>
+                <a:tab algn="l" pos="0"/>
+              </a:tabLst>
+            </a:pPr>
+            <a:r>
+              <a:rPr b="0" lang="en-US" sz="970" strike="noStrike" u="none">
+                <a:solidFill>
+                  <a:srgbClr val="f9fafb"/>
+                </a:solidFill>
+                <a:effectLst/>
+                <a:uFillTx/>
+                <a:latin typeface="Cascadia Mono"/>
+                <a:ea typeface="Cascadia Mono"/>
+              </a:rPr>
+              <a:t>reflexao = "Expliquei a relação entre dados e saída"</a:t>
+            </a:r>
+            <a:endParaRPr b="0" lang="pt-BR" sz="970" strike="noStrike" u="none">
+              <a:solidFill>
+                <a:srgbClr val="ffffff"/>
+              </a:solidFill>
+              <a:effectLst/>
+              <a:uFillTx/>
+              <a:latin typeface="Arial"/>
+            </a:endParaRPr>
+          </a:p>
+          <a:p>
+            <a:pPr defTabSz="914400">
+              <a:lnSpc>
+                <a:spcPct val="100000"/>
+              </a:lnSpc>
+              <a:tabLst>
+                <a:tab algn="l" pos="0"/>
+              </a:tabLst>
+            </a:pPr>
+            <a:r>
+              <a:rPr b="0" lang="en-US" sz="970" strike="noStrike" u="none">
+                <a:solidFill>
+                  <a:srgbClr val="f9fafb"/>
+                </a:solidFill>
+                <a:effectLst/>
+                <a:uFillTx/>
+                <a:latin typeface="Cascadia Mono"/>
+                <a:ea typeface="Cascadia Mono"/>
+              </a:rPr>
+              <a:t>length(reflexao)</a:t>
+            </a:r>
+            <a:endParaRPr b="0" lang="pt-BR" sz="970" strike="noStrike" u="none">
+              <a:solidFill>
+                <a:srgbClr val="ffffff"/>
+              </a:solidFill>
+              <a:effectLst/>
+              <a:uFillTx/>
+              <a:latin typeface="Arial"/>
+            </a:endParaRPr>
+          </a:p>
+        </p:txBody>
+      </p:sp>
+      <p:sp>
+        <p:nvSpPr>
+          <p:cNvPr id="252" name="Text 11"/>
+          <p:cNvSpPr/>
+          <p:nvPr/>
+        </p:nvSpPr>
+        <p:spPr>
+          <a:xfrm>
+            <a:off x="594360" y="3364920"/>
+            <a:ext cx="11017800" cy="255240"/>
+          </a:xfrm>
+          <a:prstGeom prst="rect">
+            <a:avLst/>
+          </a:prstGeom>
+          <a:noFill/>
+          <a:ln w="0">
+            <a:noFill/>
+          </a:ln>
+        </p:spPr>
+        <p:style>
+          <a:lnRef idx="0"/>
+          <a:fillRef idx="0"/>
+          <a:effectRef idx="0"/>
+          <a:fontRef idx="minor"/>
+        </p:style>
+        <p:txBody>
+          <a:bodyPr lIns="0" rIns="0" tIns="0" bIns="0" anchor="ctr">
+            <a:noAutofit/>
+          </a:bodyPr>
+          <a:p>
+            <a:pPr defTabSz="914400">
+              <a:lnSpc>
+                <a:spcPct val="100000"/>
+              </a:lnSpc>
+              <a:tabLst>
+                <a:tab algn="l" pos="0"/>
+              </a:tabLst>
+            </a:pPr>
+            <a:r>
+              <a:rPr b="1" lang="en-US" sz="950" strike="noStrike" u="none">
+                <a:solidFill>
+                  <a:srgbClr val="5b6cff"/>
+                </a:solidFill>
+                <a:effectLst/>
+                <a:uFillTx/>
+                <a:latin typeface="Aptos Display"/>
+                <a:ea typeface="Aptos Display"/>
+              </a:rPr>
+              <a:t>ASPECTOS QUALITATIVOS DA ANÁLISE</a:t>
+            </a:r>
+            <a:endParaRPr b="0" lang="pt-BR" sz="950" strike="noStrike" u="none">
+              <a:solidFill>
+                <a:srgbClr val="000000"/>
+              </a:solidFill>
+              <a:effectLst/>
+              <a:uFillTx/>
+              <a:latin typeface="Arial"/>
+            </a:endParaRPr>
+          </a:p>
+        </p:txBody>
+      </p:sp>
+      <p:sp>
+        <p:nvSpPr>
+          <p:cNvPr id="253" name="Text 12"/>
+          <p:cNvSpPr/>
+          <p:nvPr/>
+        </p:nvSpPr>
+        <p:spPr>
+          <a:xfrm>
+            <a:off x="594360" y="3675960"/>
+            <a:ext cx="11017800" cy="1233720"/>
+          </a:xfrm>
+          <a:prstGeom prst="rect">
+            <a:avLst/>
+          </a:prstGeom>
+          <a:noFill/>
+          <a:ln w="0">
+            <a:noFill/>
+          </a:ln>
+        </p:spPr>
+        <p:style>
+          <a:lnRef idx="0"/>
+          <a:fillRef idx="0"/>
+          <a:effectRef idx="0"/>
+          <a:fontRef idx="minor"/>
+        </p:style>
+        <p:txBody>
+          <a:bodyPr lIns="90000" rIns="90000" tIns="45000" bIns="45000" anchor="t">
+            <a:normAutofit/>
+          </a:bodyPr>
+          <a:p>
+            <a:pPr defTabSz="914400">
+              <a:lnSpc>
+                <a:spcPct val="100000"/>
+              </a:lnSpc>
+            </a:pPr>
+            <a:r>
+              <a:rPr b="0" lang="en-US" sz="939" strike="noStrike" u="none">
+                <a:solidFill>
+                  <a:srgbClr val="243447"/>
+                </a:solidFill>
+                <a:effectLst/>
+                <a:uFillTx/>
+                <a:latin typeface="Aptos"/>
+                <a:ea typeface="Aptos"/>
+              </a:rPr>
+              <a:t>• </a:t>
+            </a:r>
+            <a:r>
+              <a:rPr b="0" lang="en-US" sz="1100" strike="noStrike" u="none">
+                <a:solidFill>
+                  <a:srgbClr val="243447"/>
+                </a:solidFill>
+                <a:effectLst/>
+                <a:uFillTx/>
+                <a:latin typeface="Aptos"/>
+                <a:ea typeface="Aptos"/>
+              </a:rPr>
+              <a:t>Reflexão metaconceitual sobre o percurso.</a:t>
+            </a:r>
+            <a:endParaRPr b="0" lang="pt-BR" sz="1100" strike="noStrike" u="none">
+              <a:solidFill>
+                <a:srgbClr val="000000"/>
+              </a:solidFill>
+              <a:effectLst/>
+              <a:uFillTx/>
+              <a:latin typeface="Arial"/>
+            </a:endParaRPr>
+          </a:p>
+          <a:p>
+            <a:pPr defTabSz="914400">
+              <a:lnSpc>
+                <a:spcPct val="100000"/>
+              </a:lnSpc>
+            </a:pPr>
+            <a:r>
+              <a:rPr b="0" lang="en-US" sz="1100" strike="noStrike" u="none">
+                <a:solidFill>
+                  <a:srgbClr val="243447"/>
+                </a:solidFill>
+                <a:effectLst/>
+                <a:uFillTx/>
+                <a:latin typeface="Aptos"/>
+                <a:ea typeface="Aptos"/>
+              </a:rPr>
+              <a:t>• Relato: avaliar o percurso de pensamento, não apenas o código final.</a:t>
+            </a:r>
+            <a:endParaRPr b="0" lang="pt-BR" sz="1100" strike="noStrike" u="none">
+              <a:solidFill>
+                <a:srgbClr val="000000"/>
+              </a:solidFill>
+              <a:effectLst/>
+              <a:uFillTx/>
+              <a:latin typeface="Arial"/>
+            </a:endParaRPr>
+          </a:p>
+          <a:p>
+            <a:pPr defTabSz="914400">
+              <a:lnSpc>
+                <a:spcPct val="100000"/>
+              </a:lnSpc>
+            </a:pPr>
+            <a:r>
+              <a:rPr b="0" lang="en-US" sz="1100" strike="noStrike" u="none">
+                <a:solidFill>
+                  <a:srgbClr val="243447"/>
+                </a:solidFill>
+                <a:effectLst/>
+                <a:uFillTx/>
+                <a:latin typeface="Aptos"/>
+                <a:ea typeface="Aptos"/>
+              </a:rPr>
+              <a:t>• Queiroz: o percurso da tarefa revela mudanças no discurso e na ação.</a:t>
+            </a:r>
+            <a:endParaRPr b="0" lang="pt-BR" sz="1100" strike="noStrike" u="none">
+              <a:solidFill>
+                <a:srgbClr val="000000"/>
+              </a:solidFill>
+              <a:effectLst/>
+              <a:uFillTx/>
+              <a:latin typeface="Arial"/>
+            </a:endParaRPr>
+          </a:p>
+          <a:p>
+            <a:pPr defTabSz="914400">
+              <a:lnSpc>
+                <a:spcPct val="100000"/>
+              </a:lnSpc>
+            </a:pPr>
+            <a:r>
+              <a:rPr b="0" lang="en-US" sz="1100" strike="noStrike" u="none">
+                <a:solidFill>
+                  <a:srgbClr val="243447"/>
+                </a:solidFill>
+                <a:effectLst/>
+                <a:uFillTx/>
+                <a:latin typeface="Aptos"/>
+                <a:ea typeface="Aptos"/>
+              </a:rPr>
+              <a:t>• Wessels: atividades planejadas desenvolvem representação e pensamento de ordem superior.</a:t>
+            </a:r>
+            <a:endParaRPr b="0" lang="pt-BR" sz="1100" strike="noStrike" u="none">
+              <a:solidFill>
+                <a:srgbClr val="000000"/>
+              </a:solidFill>
+              <a:effectLst/>
+              <a:uFillTx/>
+              <a:latin typeface="Arial"/>
+            </a:endParaRPr>
+          </a:p>
+        </p:txBody>
+      </p:sp>
+      <p:sp>
+        <p:nvSpPr>
+          <p:cNvPr id="254" name="Text 13"/>
+          <p:cNvSpPr/>
+          <p:nvPr/>
+        </p:nvSpPr>
+        <p:spPr>
+          <a:xfrm>
+            <a:off x="594360" y="5074920"/>
+            <a:ext cx="11017800" cy="255240"/>
+          </a:xfrm>
+          <a:prstGeom prst="rect">
+            <a:avLst/>
+          </a:prstGeom>
+          <a:noFill/>
+          <a:ln w="0">
+            <a:noFill/>
+          </a:ln>
+        </p:spPr>
+        <p:style>
+          <a:lnRef idx="0"/>
+          <a:fillRef idx="0"/>
+          <a:effectRef idx="0"/>
+          <a:fontRef idx="minor"/>
+        </p:style>
+        <p:txBody>
+          <a:bodyPr lIns="0" rIns="0" tIns="0" bIns="0" anchor="ctr">
+            <a:noAutofit/>
+          </a:bodyPr>
+          <a:p>
+            <a:pPr defTabSz="914400">
+              <a:lnSpc>
+                <a:spcPct val="100000"/>
+              </a:lnSpc>
+              <a:tabLst>
+                <a:tab algn="l" pos="0"/>
+              </a:tabLst>
+            </a:pPr>
+            <a:r>
+              <a:rPr b="1" lang="en-US" sz="950" strike="noStrike" u="none">
+                <a:solidFill>
+                  <a:srgbClr val="5b6cff"/>
+                </a:solidFill>
+                <a:effectLst/>
+                <a:uFillTx/>
+                <a:latin typeface="Aptos Display"/>
+                <a:ea typeface="Aptos Display"/>
+              </a:rPr>
+              <a:t>IMPORTÂNCIA NA APRENDIZAGEM DE CONCEITOS E RELAÇÕES</a:t>
+            </a:r>
+            <a:endParaRPr b="0" lang="pt-BR" sz="950" strike="noStrike" u="none">
+              <a:solidFill>
+                <a:srgbClr val="000000"/>
+              </a:solidFill>
+              <a:effectLst/>
+              <a:uFillTx/>
+              <a:latin typeface="Arial"/>
+            </a:endParaRPr>
+          </a:p>
+        </p:txBody>
+      </p:sp>
+      <p:sp>
+        <p:nvSpPr>
+          <p:cNvPr id="255" name="Text 14"/>
+          <p:cNvSpPr/>
+          <p:nvPr/>
+        </p:nvSpPr>
+        <p:spPr>
+          <a:xfrm>
+            <a:off x="594360" y="5376600"/>
+            <a:ext cx="11017800" cy="657720"/>
+          </a:xfrm>
+          <a:prstGeom prst="rect">
+            <a:avLst/>
+          </a:prstGeom>
+          <a:noFill/>
+          <a:ln w="0">
+            <a:noFill/>
+          </a:ln>
+        </p:spPr>
+        <p:style>
+          <a:lnRef idx="0"/>
+          <a:fillRef idx="0"/>
+          <a:effectRef idx="0"/>
+          <a:fontRef idx="minor"/>
+        </p:style>
+        <p:txBody>
+          <a:bodyPr lIns="0" rIns="0" tIns="0" bIns="0" anchor="ctr">
+            <a:normAutofit/>
+          </a:bodyPr>
+          <a:p>
+            <a:pPr defTabSz="914400">
+              <a:lnSpc>
+                <a:spcPct val="100000"/>
+              </a:lnSpc>
+              <a:tabLst>
+                <a:tab algn="l" pos="0"/>
+              </a:tabLst>
+            </a:pPr>
+            <a:r>
+              <a:rPr b="0" lang="en-US" sz="1100" strike="noStrike" u="none">
+                <a:solidFill>
+                  <a:srgbClr val="243447"/>
+                </a:solidFill>
+                <a:effectLst/>
+                <a:uFillTx/>
+                <a:latin typeface="Aptos"/>
+                <a:ea typeface="Aptos"/>
+              </a:rPr>
+              <a:t>A avaliação inicial observa como o estudante descreve e reorganiza a tarefa, não apenas se o código exec</a:t>
+            </a:r>
+            <a:r>
+              <a:rPr b="0" lang="en-US" sz="1010" strike="noStrike" u="none">
+                <a:solidFill>
+                  <a:srgbClr val="243447"/>
+                </a:solidFill>
+                <a:effectLst/>
+                <a:uFillTx/>
+                <a:latin typeface="Aptos"/>
+                <a:ea typeface="Aptos"/>
+              </a:rPr>
+              <a:t>utou.</a:t>
+            </a:r>
+            <a:endParaRPr b="0" lang="pt-BR" sz="1010" strike="noStrike" u="none">
+              <a:solidFill>
+                <a:srgbClr val="000000"/>
+              </a:solidFill>
+              <a:effectLst/>
+              <a:uFillTx/>
+              <a:latin typeface="Arial"/>
+            </a:endParaRPr>
+          </a:p>
+        </p:txBody>
+      </p:sp>
+      <p:sp>
+        <p:nvSpPr>
+          <p:cNvPr id="256" name="Text 15"/>
+          <p:cNvSpPr/>
+          <p:nvPr/>
+        </p:nvSpPr>
+        <p:spPr>
+          <a:xfrm>
+            <a:off x="594360" y="6263640"/>
+            <a:ext cx="11017800" cy="319320"/>
+          </a:xfrm>
+          <a:prstGeom prst="rect">
+            <a:avLst/>
+          </a:prstGeom>
+          <a:noFill/>
+          <a:ln w="0">
+            <a:noFill/>
+          </a:ln>
+        </p:spPr>
+        <p:style>
+          <a:lnRef idx="0"/>
+          <a:fillRef idx="0"/>
+          <a:effectRef idx="0"/>
+          <a:fontRef idx="minor"/>
+        </p:style>
+        <p:txBody>
+          <a:bodyPr lIns="0" rIns="0" tIns="0" bIns="0" anchor="ctr">
+            <a:normAutofit/>
+          </a:bodyPr>
+          <a:p>
+            <a:pPr defTabSz="914400">
+              <a:lnSpc>
+                <a:spcPct val="100000"/>
+              </a:lnSpc>
+              <a:tabLst>
+                <a:tab algn="l" pos="0"/>
+              </a:tabLst>
+            </a:pPr>
+            <a:r>
+              <a:rPr b="0" lang="en-US" sz="850" strike="noStrike" u="none">
+                <a:solidFill>
+                  <a:srgbClr val="64748b"/>
+                </a:solidFill>
+                <a:effectLst/>
+                <a:uFillTx/>
+                <a:latin typeface="Aptos"/>
+                <a:ea typeface="Aptos"/>
+              </a:rPr>
+              <a:t>Critérios recorrentes: representação, manipulação, feedback, investigação, transnumeração, reflexão metaconceitual e limites do modelo.</a:t>
             </a:r>
             <a:endParaRPr b="0" lang="pt-BR" sz="850" strike="noStrike" u="none">
               <a:solidFill>
@@ -16009,7 +17844,7 @@
         <p:spPr>
           <a:xfrm>
             <a:off x="502920" y="164520"/>
-            <a:ext cx="7131960" cy="228240"/>
+            <a:ext cx="7131600" cy="227880"/>
           </a:xfrm>
           <a:prstGeom prst="rect">
             <a:avLst/>
@@ -16070,7 +17905,7 @@
         <p:spPr>
           <a:xfrm>
             <a:off x="7955280" y="164520"/>
-            <a:ext cx="2925720" cy="228240"/>
+            <a:ext cx="2925360" cy="227880"/>
           </a:xfrm>
           <a:prstGeom prst="rect">
             <a:avLst/>
@@ -16131,7 +17966,7 @@
         <p:spPr>
           <a:xfrm>
             <a:off x="11064240" y="109800"/>
-            <a:ext cx="731160" cy="319680"/>
+            <a:ext cx="730800" cy="319320"/>
           </a:xfrm>
           <a:prstGeom prst="rect">
             <a:avLst/>
@@ -16235,7 +18070,7 @@
         <p:spPr>
           <a:xfrm>
             <a:off x="594360" y="713160"/>
-            <a:ext cx="10972440" cy="548280"/>
+            <a:ext cx="10972080" cy="547920"/>
           </a:xfrm>
           <a:prstGeom prst="rect">
             <a:avLst/>
@@ -16296,7 +18131,7 @@
         <p:spPr>
           <a:xfrm>
             <a:off x="777240" y="1554480"/>
-            <a:ext cx="5257440" cy="3931560"/>
+            <a:ext cx="5257080" cy="3931200"/>
           </a:xfrm>
           <a:prstGeom prst="rect">
             <a:avLst/>
@@ -16417,7 +18252,7 @@
         <p:spPr>
           <a:xfrm>
             <a:off x="6400800" y="1554480"/>
-            <a:ext cx="5257440" cy="3931560"/>
+            <a:ext cx="5257080" cy="3931200"/>
           </a:xfrm>
           <a:prstGeom prst="rect">
             <a:avLst/>
@@ -16538,7 +18373,7 @@
         <p:spPr>
           <a:xfrm>
             <a:off x="594360" y="6263640"/>
-            <a:ext cx="11018160" cy="319680"/>
+            <a:ext cx="11017800" cy="319320"/>
           </a:xfrm>
           <a:prstGeom prst="rect">
             <a:avLst/>
@@ -16636,7 +18471,7 @@
         <p:spPr>
           <a:xfrm>
             <a:off x="502920" y="164520"/>
-            <a:ext cx="7131960" cy="228240"/>
+            <a:ext cx="7131600" cy="227880"/>
           </a:xfrm>
           <a:prstGeom prst="rect">
             <a:avLst/>
@@ -16697,7 +18532,7 @@
         <p:spPr>
           <a:xfrm>
             <a:off x="7955280" y="164520"/>
-            <a:ext cx="2925720" cy="228240"/>
+            <a:ext cx="2925360" cy="227880"/>
           </a:xfrm>
           <a:prstGeom prst="rect">
             <a:avLst/>
@@ -16758,7 +18593,7 @@
         <p:spPr>
           <a:xfrm>
             <a:off x="11064240" y="109800"/>
-            <a:ext cx="731160" cy="319680"/>
+            <a:ext cx="730800" cy="319320"/>
           </a:xfrm>
           <a:prstGeom prst="rect">
             <a:avLst/>
@@ -16862,7 +18697,7 @@
         <p:spPr>
           <a:xfrm>
             <a:off x="594360" y="713160"/>
-            <a:ext cx="10972440" cy="548280"/>
+            <a:ext cx="10972080" cy="547920"/>
           </a:xfrm>
           <a:prstGeom prst="rect">
             <a:avLst/>
@@ -16923,7 +18758,7 @@
         <p:spPr>
           <a:xfrm>
             <a:off x="777240" y="1554480"/>
-            <a:ext cx="5257440" cy="3931560"/>
+            <a:ext cx="5257080" cy="3931200"/>
           </a:xfrm>
           <a:prstGeom prst="rect">
             <a:avLst/>
@@ -17044,7 +18879,7 @@
         <p:spPr>
           <a:xfrm>
             <a:off x="6400800" y="1554480"/>
-            <a:ext cx="5257440" cy="3931560"/>
+            <a:ext cx="5257080" cy="3931200"/>
           </a:xfrm>
           <a:prstGeom prst="rect">
             <a:avLst/>
@@ -17165,7 +19000,7 @@
         <p:spPr>
           <a:xfrm>
             <a:off x="594360" y="6263640"/>
-            <a:ext cx="11018160" cy="319680"/>
+            <a:ext cx="11017800" cy="319320"/>
           </a:xfrm>
           <a:prstGeom prst="rect">
             <a:avLst/>
@@ -17263,7 +19098,7 @@
         <p:spPr>
           <a:xfrm>
             <a:off x="502920" y="164520"/>
-            <a:ext cx="7131960" cy="228240"/>
+            <a:ext cx="7131600" cy="227880"/>
           </a:xfrm>
           <a:prstGeom prst="rect">
             <a:avLst/>
@@ -17324,7 +19159,7 @@
         <p:spPr>
           <a:xfrm>
             <a:off x="7955280" y="164520"/>
-            <a:ext cx="2925720" cy="228240"/>
+            <a:ext cx="2925360" cy="227880"/>
           </a:xfrm>
           <a:prstGeom prst="rect">
             <a:avLst/>
@@ -17385,7 +19220,7 @@
         <p:spPr>
           <a:xfrm>
             <a:off x="11064240" y="109800"/>
-            <a:ext cx="731160" cy="319680"/>
+            <a:ext cx="730800" cy="319320"/>
           </a:xfrm>
           <a:prstGeom prst="rect">
             <a:avLst/>
@@ -17489,7 +19324,7 @@
         <p:spPr>
           <a:xfrm>
             <a:off x="594360" y="713160"/>
-            <a:ext cx="10972440" cy="548280"/>
+            <a:ext cx="10972080" cy="547920"/>
           </a:xfrm>
           <a:prstGeom prst="rect">
             <a:avLst/>
@@ -17550,7 +19385,7 @@
         <p:spPr>
           <a:xfrm>
             <a:off x="777240" y="1554480"/>
-            <a:ext cx="5257440" cy="3931560"/>
+            <a:ext cx="5257080" cy="3931200"/>
           </a:xfrm>
           <a:prstGeom prst="rect">
             <a:avLst/>
@@ -17641,7 +19476,7 @@
         <p:spPr>
           <a:xfrm>
             <a:off x="6400800" y="1554480"/>
-            <a:ext cx="5257440" cy="3931560"/>
+            <a:ext cx="5257080" cy="3931200"/>
           </a:xfrm>
           <a:prstGeom prst="rect">
             <a:avLst/>
@@ -17762,7 +19597,7 @@
         <p:spPr>
           <a:xfrm>
             <a:off x="594360" y="6263640"/>
-            <a:ext cx="11018160" cy="319680"/>
+            <a:ext cx="11017800" cy="319320"/>
           </a:xfrm>
           <a:prstGeom prst="rect">
             <a:avLst/>
@@ -17860,7 +19695,7 @@
         <p:spPr>
           <a:xfrm>
             <a:off x="502920" y="164520"/>
-            <a:ext cx="7131960" cy="228240"/>
+            <a:ext cx="7131600" cy="227880"/>
           </a:xfrm>
           <a:prstGeom prst="rect">
             <a:avLst/>
@@ -17921,7 +19756,7 @@
         <p:spPr>
           <a:xfrm>
             <a:off x="7955280" y="164520"/>
-            <a:ext cx="2925720" cy="228240"/>
+            <a:ext cx="2925360" cy="227880"/>
           </a:xfrm>
           <a:prstGeom prst="rect">
             <a:avLst/>
@@ -17982,7 +19817,7 @@
         <p:spPr>
           <a:xfrm>
             <a:off x="11064240" y="109800"/>
-            <a:ext cx="731160" cy="319680"/>
+            <a:ext cx="730800" cy="319320"/>
           </a:xfrm>
           <a:prstGeom prst="rect">
             <a:avLst/>
@@ -18086,7 +19921,7 @@
         <p:spPr>
           <a:xfrm>
             <a:off x="594360" y="713160"/>
-            <a:ext cx="10972440" cy="548280"/>
+            <a:ext cx="10972080" cy="547920"/>
           </a:xfrm>
           <a:prstGeom prst="rect">
             <a:avLst/>
@@ -18147,7 +19982,7 @@
         <p:spPr>
           <a:xfrm>
             <a:off x="777240" y="1554480"/>
-            <a:ext cx="5257440" cy="3931560"/>
+            <a:ext cx="5257080" cy="3931200"/>
           </a:xfrm>
           <a:prstGeom prst="rect">
             <a:avLst/>
@@ -18298,7 +20133,7 @@
         <p:spPr>
           <a:xfrm>
             <a:off x="6400800" y="1554480"/>
-            <a:ext cx="5257440" cy="3931560"/>
+            <a:ext cx="5257080" cy="3931200"/>
           </a:xfrm>
           <a:prstGeom prst="rect">
             <a:avLst/>
@@ -18449,7 +20284,7 @@
         <p:spPr>
           <a:xfrm>
             <a:off x="594360" y="6263640"/>
-            <a:ext cx="11018160" cy="319680"/>
+            <a:ext cx="11017800" cy="319320"/>
           </a:xfrm>
           <a:prstGeom prst="rect">
             <a:avLst/>
@@ -18547,7 +20382,7 @@
         <p:spPr>
           <a:xfrm>
             <a:off x="502920" y="164520"/>
-            <a:ext cx="7131960" cy="228240"/>
+            <a:ext cx="7131600" cy="227880"/>
           </a:xfrm>
           <a:prstGeom prst="rect">
             <a:avLst/>
@@ -18608,7 +20443,7 @@
         <p:spPr>
           <a:xfrm>
             <a:off x="7955280" y="164520"/>
-            <a:ext cx="2925720" cy="228240"/>
+            <a:ext cx="2925360" cy="227880"/>
           </a:xfrm>
           <a:prstGeom prst="rect">
             <a:avLst/>
@@ -18669,7 +20504,7 @@
         <p:spPr>
           <a:xfrm>
             <a:off x="11064240" y="109800"/>
-            <a:ext cx="731160" cy="319680"/>
+            <a:ext cx="730800" cy="319320"/>
           </a:xfrm>
           <a:prstGeom prst="rect">
             <a:avLst/>
@@ -18773,7 +20608,7 @@
         <p:spPr>
           <a:xfrm>
             <a:off x="594360" y="713160"/>
-            <a:ext cx="10972440" cy="548280"/>
+            <a:ext cx="10972080" cy="547920"/>
           </a:xfrm>
           <a:prstGeom prst="rect">
             <a:avLst/>
@@ -18834,7 +20669,7 @@
         <p:spPr>
           <a:xfrm>
             <a:off x="777240" y="1554480"/>
-            <a:ext cx="5257440" cy="3931560"/>
+            <a:ext cx="5257080" cy="3931200"/>
           </a:xfrm>
           <a:prstGeom prst="rect">
             <a:avLst/>
@@ -18955,7 +20790,7 @@
         <p:spPr>
           <a:xfrm>
             <a:off x="6400800" y="1554480"/>
-            <a:ext cx="5257440" cy="3931560"/>
+            <a:ext cx="5257080" cy="3931200"/>
           </a:xfrm>
           <a:prstGeom prst="rect">
             <a:avLst/>
@@ -19076,7 +20911,7 @@
         <p:spPr>
           <a:xfrm>
             <a:off x="594360" y="6263640"/>
-            <a:ext cx="11018160" cy="319680"/>
+            <a:ext cx="11017800" cy="319320"/>
           </a:xfrm>
           <a:prstGeom prst="rect">
             <a:avLst/>
@@ -19174,7 +21009,7 @@
         <p:spPr>
           <a:xfrm>
             <a:off x="502920" y="164520"/>
-            <a:ext cx="7131960" cy="228240"/>
+            <a:ext cx="7131600" cy="227880"/>
           </a:xfrm>
           <a:prstGeom prst="rect">
             <a:avLst/>
@@ -19235,7 +21070,7 @@
         <p:spPr>
           <a:xfrm>
             <a:off x="7955280" y="164520"/>
-            <a:ext cx="2925720" cy="228240"/>
+            <a:ext cx="2925360" cy="227880"/>
           </a:xfrm>
           <a:prstGeom prst="rect">
             <a:avLst/>
@@ -19296,7 +21131,7 @@
         <p:spPr>
           <a:xfrm>
             <a:off x="11064240" y="109800"/>
-            <a:ext cx="731160" cy="319680"/>
+            <a:ext cx="730800" cy="319320"/>
           </a:xfrm>
           <a:prstGeom prst="rect">
             <a:avLst/>
@@ -19400,7 +21235,7 @@
         <p:spPr>
           <a:xfrm>
             <a:off x="594360" y="713160"/>
-            <a:ext cx="10972440" cy="548280"/>
+            <a:ext cx="10972080" cy="547920"/>
           </a:xfrm>
           <a:prstGeom prst="rect">
             <a:avLst/>
@@ -19461,7 +21296,7 @@
         <p:spPr>
           <a:xfrm>
             <a:off x="777240" y="1554480"/>
-            <a:ext cx="5257440" cy="3931560"/>
+            <a:ext cx="5257080" cy="3931200"/>
           </a:xfrm>
           <a:prstGeom prst="rect">
             <a:avLst/>
@@ -19612,7 +21447,7 @@
         <p:spPr>
           <a:xfrm>
             <a:off x="6400800" y="1554480"/>
-            <a:ext cx="5257440" cy="3931560"/>
+            <a:ext cx="5257080" cy="3931200"/>
           </a:xfrm>
           <a:prstGeom prst="rect">
             <a:avLst/>
@@ -19733,7 +21568,7 @@
         <p:spPr>
           <a:xfrm>
             <a:off x="594360" y="6263640"/>
-            <a:ext cx="11018160" cy="319680"/>
+            <a:ext cx="11017800" cy="319320"/>
           </a:xfrm>
           <a:prstGeom prst="rect">
             <a:avLst/>
@@ -19831,7 +21666,7 @@
         <p:spPr>
           <a:xfrm>
             <a:off x="502920" y="164520"/>
-            <a:ext cx="7131960" cy="228240"/>
+            <a:ext cx="7131600" cy="227880"/>
           </a:xfrm>
           <a:prstGeom prst="rect">
             <a:avLst/>
@@ -19892,7 +21727,7 @@
         <p:spPr>
           <a:xfrm>
             <a:off x="7955280" y="164520"/>
-            <a:ext cx="2925720" cy="228240"/>
+            <a:ext cx="2925360" cy="227880"/>
           </a:xfrm>
           <a:prstGeom prst="rect">
             <a:avLst/>
@@ -19953,7 +21788,7 @@
         <p:spPr>
           <a:xfrm>
             <a:off x="11064240" y="109800"/>
-            <a:ext cx="731160" cy="319680"/>
+            <a:ext cx="730800" cy="319320"/>
           </a:xfrm>
           <a:prstGeom prst="rect">
             <a:avLst/>
@@ -20057,7 +21892,7 @@
         <p:spPr>
           <a:xfrm>
             <a:off x="594360" y="822960"/>
-            <a:ext cx="1188360" cy="776880"/>
+            <a:ext cx="1188000" cy="776520"/>
           </a:xfrm>
           <a:prstGeom prst="rect">
             <a:avLst/>
@@ -20118,7 +21953,7 @@
         <p:spPr>
           <a:xfrm>
             <a:off x="1828800" y="768240"/>
-            <a:ext cx="9600840" cy="822600"/>
+            <a:ext cx="9600480" cy="822240"/>
           </a:xfrm>
           <a:prstGeom prst="rect">
             <a:avLst/>
@@ -20179,7 +22014,7 @@
         <p:spPr>
           <a:xfrm>
             <a:off x="1828800" y="1691640"/>
-            <a:ext cx="9326520" cy="502560"/>
+            <a:ext cx="9326160" cy="502200"/>
           </a:xfrm>
           <a:prstGeom prst="rect">
             <a:avLst/>
@@ -20240,7 +22075,7 @@
         <p:spPr>
           <a:xfrm>
             <a:off x="685800" y="2743200"/>
-            <a:ext cx="2559960" cy="273960"/>
+            <a:ext cx="2559600" cy="273600"/>
           </a:xfrm>
           <a:prstGeom prst="rect">
             <a:avLst/>
@@ -20301,7 +22136,7 @@
         <p:spPr>
           <a:xfrm>
             <a:off x="685800" y="3108960"/>
-            <a:ext cx="10972440" cy="1096920"/>
+            <a:ext cx="10972080" cy="1096560"/>
           </a:xfrm>
           <a:prstGeom prst="rect">
             <a:avLst/>
@@ -20362,7 +22197,7 @@
         <p:spPr>
           <a:xfrm>
             <a:off x="685800" y="4892040"/>
-            <a:ext cx="10972440" cy="685440"/>
+            <a:ext cx="10972080" cy="685080"/>
           </a:xfrm>
           <a:prstGeom prst="rect">
             <a:avLst/>
@@ -20423,7 +22258,7 @@
         <p:spPr>
           <a:xfrm>
             <a:off x="594360" y="6263640"/>
-            <a:ext cx="11018160" cy="319680"/>
+            <a:ext cx="11017800" cy="319320"/>
           </a:xfrm>
           <a:prstGeom prst="rect">
             <a:avLst/>

--- a/Aula01_Introducao_a_Computacao_e_ao_Pensamento_Computacional/Aula01_Teoria-19-08-26.pptx
+++ b/Aula01_Introducao_a_Computacao_e_ao_Pensamento_Computacional/Aula01_Teoria-19-08-26.pptx
@@ -4461,7 +4461,7 @@
                 <a:latin typeface="Aptos"/>
                 <a:ea typeface="Aptos"/>
               </a:rPr>
-              <a:t>• Relato: deslocar foco da ferramenta para a tarefa.</a:t>
+              <a:t>Deslocar foco da ferramenta para a tarefa.</a:t>
             </a:r>
             <a:endParaRPr b="0" lang="pt-BR" sz="1200" strike="noStrike" u="none">
               <a:solidFill>
@@ -4488,7 +4488,7 @@
                 <a:latin typeface="Aptos"/>
                 <a:ea typeface="Aptos"/>
               </a:rPr>
-              <a:t>• Wessels: organizar dados é componente crítico da representação.</a:t>
+              <a:t>Organizar dados é componente crítico da representação.</a:t>
             </a:r>
             <a:endParaRPr b="0" lang="pt-BR" sz="1200" strike="noStrike" u="none">
               <a:solidFill>
@@ -4515,7 +4515,7 @@
                 <a:latin typeface="Aptos"/>
                 <a:ea typeface="Aptos"/>
               </a:rPr>
-              <a:t>• Queiroz: o resultado final não esgota a aprendizagem do conceito.</a:t>
+              <a:t>O resultado final não esgota a aprendizagem do conceito.</a:t>
             </a:r>
             <a:endParaRPr b="0" lang="pt-BR" sz="1200" strike="noStrike" u="none">
               <a:solidFill>
@@ -5671,7 +5671,7 @@
                 <a:latin typeface="Aptos"/>
                 <a:ea typeface="Aptos"/>
               </a:rPr>
-              <a:t>• Relato: explicitar variáveis, relações e restrições.</a:t>
+              <a:t>Explicitar variáveis, relações e restrições.</a:t>
             </a:r>
             <a:endParaRPr b="0" lang="pt-BR" sz="1050" strike="noStrike" u="none">
               <a:solidFill>
@@ -5698,7 +5698,7 @@
                 <a:latin typeface="Aptos"/>
                 <a:ea typeface="Aptos"/>
               </a:rPr>
-              <a:t>• Queiroz: representações ampliam a percepção de propriedades e relações.</a:t>
+              <a:t>Representações ampliam a percepção de propriedades e relações.</a:t>
             </a:r>
             <a:endParaRPr b="0" lang="pt-BR" sz="1050" strike="noStrike" u="none">
               <a:solidFill>
@@ -5725,7 +5725,7 @@
                 <a:latin typeface="Aptos"/>
                 <a:ea typeface="Aptos"/>
               </a:rPr>
-              <a:t>• Wessels: o contexto e o tipo de dado influenciam a representação escolhida.</a:t>
+              <a:t>O contexto e o tipo de dado influenciam a representação escolhida.</a:t>
             </a:r>
             <a:endParaRPr b="0" lang="pt-BR" sz="1050" strike="noStrike" u="none">
               <a:solidFill>
@@ -6881,7 +6881,7 @@
                 <a:latin typeface="Aptos"/>
                 <a:ea typeface="Aptos"/>
               </a:rPr>
-              <a:t>• Wessels: organizar dados é componente crítico da representação.</a:t>
+              <a:t>Organizar dados é componente crítico da representação.</a:t>
             </a:r>
             <a:endParaRPr b="0" lang="pt-BR" sz="1100" strike="noStrike" u="none">
               <a:solidFill>
@@ -6908,7 +6908,7 @@
                 <a:latin typeface="Aptos"/>
                 <a:ea typeface="Aptos"/>
               </a:rPr>
-              <a:t>• Queiroz: múltiplas expressões exibem aspectos distintos do mesmo conceito.</a:t>
+              <a:t>Múltiplas expressões exibem aspectos distintos do mesmo conceito.</a:t>
             </a:r>
             <a:endParaRPr b="0" lang="pt-BR" sz="1100" strike="noStrike" u="none">
               <a:solidFill>
@@ -6935,7 +6935,7 @@
                 <a:latin typeface="Aptos"/>
                 <a:ea typeface="Aptos"/>
               </a:rPr>
-              <a:t>• Relato: articular código, texto, tabela, gráfico e interpretação.</a:t>
+              <a:t>Articular código, texto, tabela, gráfico e interpretação.</a:t>
             </a:r>
             <a:endParaRPr b="0" lang="pt-BR" sz="1100" strike="noStrike" u="none">
               <a:solidFill>
@@ -8091,7 +8091,7 @@
                 <a:latin typeface="Aptos"/>
                 <a:ea typeface="Aptos"/>
               </a:rPr>
-              <a:t>• Relato: permitir manipulação de parâmetros e comparação de estados.</a:t>
+              <a:t>Permitir manipulação de parâmetros e comparação de estados.</a:t>
             </a:r>
             <a:endParaRPr b="0" lang="pt-BR" sz="1050" strike="noStrike" u="none">
               <a:solidFill>
@@ -8118,7 +8118,7 @@
                 <a:latin typeface="Aptos"/>
                 <a:ea typeface="Aptos"/>
               </a:rPr>
-              <a:t>• Queiroz: a interação consciente com a forma favorece reflexão conceitual.</a:t>
+              <a:t>A interação consciente com a forma favorece reflexão conceitual.</a:t>
             </a:r>
             <a:endParaRPr b="0" lang="pt-BR" sz="1050" strike="noStrike" u="none">
               <a:solidFill>
@@ -8145,7 +8145,7 @@
                 <a:latin typeface="Aptos"/>
                 <a:ea typeface="Aptos"/>
               </a:rPr>
-              <a:t>• Wessels: múltiplas representações indicam modelagem mais bem-sucedida.</a:t>
+              <a:t>Múltiplas representações indicam modelagem mais bem-sucedida.</a:t>
             </a:r>
             <a:endParaRPr b="0" lang="pt-BR" sz="1050" strike="noStrike" u="none">
               <a:solidFill>
@@ -9271,7 +9271,7 @@
                 <a:latin typeface="Aptos"/>
                 <a:ea typeface="Aptos"/>
               </a:rPr>
-              <a:t>• Wessels: múltiplas representações indicam modelagem mais bem-sucedida.</a:t>
+              <a:t>Múltiplas representações indicam modelagem mais bem-sucedida.</a:t>
             </a:r>
             <a:endParaRPr b="0" lang="pt-BR" sz="1050" strike="noStrike" u="none">
               <a:solidFill>
@@ -9298,7 +9298,7 @@
                 <a:latin typeface="Aptos"/>
                 <a:ea typeface="Aptos"/>
               </a:rPr>
-              <a:t>• Queiroz: múltiplas expressões exibem aspectos distintos do mesmo conceito.</a:t>
+              <a:t>Múltiplas expressões exibem aspectos distintos do mesmo conceito.</a:t>
             </a:r>
             <a:endParaRPr b="0" lang="pt-BR" sz="1050" strike="noStrike" u="none">
               <a:solidFill>
@@ -9325,7 +9325,7 @@
                 <a:latin typeface="Aptos"/>
                 <a:ea typeface="Aptos"/>
               </a:rPr>
-              <a:t>• Relato: articular código, texto, tabela, gráfico e interpretação.</a:t>
+              <a:t>Articular código, texto, tabela, gráfico e interpretação.</a:t>
             </a:r>
             <a:endParaRPr b="0" lang="pt-BR" sz="1050" strike="noStrike" u="none">
               <a:solidFill>
@@ -10607,7 +10607,7 @@
                 <a:latin typeface="Aptos"/>
                 <a:ea typeface="Aptos"/>
               </a:rPr>
-              <a:t>• Wessels: transnumeração torna dados interpretáveis em nova forma.</a:t>
+              <a:t>Transnumeração torna dados interpretáveis em nova forma.</a:t>
             </a:r>
             <a:endParaRPr b="0" lang="pt-BR" sz="1050" strike="noStrike" u="none">
               <a:solidFill>
@@ -10634,7 +10634,7 @@
                 <a:latin typeface="Aptos"/>
                 <a:ea typeface="Aptos"/>
               </a:rPr>
-              <a:t>• Queiroz: representações ampliam a percepção de propriedades e relações.</a:t>
+              <a:t>Representações ampliam a percepção de propriedades e relações.</a:t>
             </a:r>
             <a:endParaRPr b="0" lang="pt-BR" sz="1050" strike="noStrike" u="none">
               <a:solidFill>
@@ -10661,7 +10661,7 @@
                 <a:latin typeface="Aptos"/>
                 <a:ea typeface="Aptos"/>
               </a:rPr>
-              <a:t>• Relato: solicitar explicação do raciocínio desenvolvido.</a:t>
+              <a:t>Solicitar explicação do raciocínio desenvolvido.</a:t>
             </a:r>
             <a:endParaRPr b="0" lang="pt-BR" sz="1050" strike="noStrike" u="none">
               <a:solidFill>
@@ -12069,7 +12069,7 @@
                 <a:latin typeface="Aptos"/>
                 <a:ea typeface="Aptos"/>
               </a:rPr>
-              <a:t>• Wessels: transnumeração torna dados interpretáveis em nova forma.</a:t>
+              <a:t>Transnumeração torna dados interpretáveis em nova forma.</a:t>
             </a:r>
             <a:endParaRPr b="0" lang="pt-BR" sz="1050" strike="noStrike" u="none">
               <a:solidFill>
@@ -12096,7 +12096,7 @@
                 <a:latin typeface="Aptos"/>
                 <a:ea typeface="Aptos"/>
               </a:rPr>
-              <a:t>• Queiroz: representações ampliam a percepção de propriedades e relações.</a:t>
+              <a:t>Representações ampliam a percepção de propriedades e relações.</a:t>
             </a:r>
             <a:endParaRPr b="0" lang="pt-BR" sz="1050" strike="noStrike" u="none">
               <a:solidFill>
@@ -12123,7 +12123,7 @@
                 <a:latin typeface="Aptos"/>
                 <a:ea typeface="Aptos"/>
               </a:rPr>
-              <a:t>• Relato: solicitar explicação do raciocínio desenvolvido.</a:t>
+              <a:t>Solicitar explicação do raciocínio desenvolvido.</a:t>
             </a:r>
             <a:endParaRPr b="0" lang="pt-BR" sz="1050" strike="noStrike" u="none">
               <a:solidFill>
@@ -13279,7 +13279,7 @@
                 <a:latin typeface="Aptos"/>
                 <a:ea typeface="Aptos"/>
               </a:rPr>
-              <a:t>• Wessels: níveis SOLO ajudam a observar respostas de menor a maior integração.</a:t>
+              <a:t>Níveis SOLO ajudam a observar respostas de menor a maior integração.</a:t>
             </a:r>
             <a:endParaRPr b="0" lang="pt-BR" sz="1100" strike="noStrike" u="none">
               <a:solidFill>
@@ -13306,7 +13306,7 @@
                 <a:latin typeface="Aptos"/>
                 <a:ea typeface="Aptos"/>
               </a:rPr>
-              <a:t>• Queiroz: a análise qualitativa observa invariantes e relações mobilizadas na ação.</a:t>
+              <a:t>A análise qualitativa observa invariantes e relações mobilizadas na ação.</a:t>
             </a:r>
             <a:endParaRPr b="0" lang="pt-BR" sz="1100" strike="noStrike" u="none">
               <a:solidFill>
@@ -13333,7 +13333,7 @@
                 <a:latin typeface="Aptos"/>
                 <a:ea typeface="Aptos"/>
               </a:rPr>
-              <a:t>• Relato: avaliar o percurso de pensamento, não apenas o código final.</a:t>
+              <a:t>Avaliar o percurso de pensamento, não apenas o código final.</a:t>
             </a:r>
             <a:endParaRPr b="0" lang="pt-BR" sz="1100" strike="noStrike" u="none">
               <a:solidFill>
@@ -14459,7 +14459,7 @@
                 <a:latin typeface="Aptos"/>
                 <a:ea typeface="Aptos"/>
               </a:rPr>
-              <a:t>• Relato: solicitar explicação do raciocínio desenvolvido.</a:t>
+              <a:t>Solicitar explicação do raciocínio desenvolvido.</a:t>
             </a:r>
             <a:endParaRPr b="0" lang="pt-BR" sz="1100" strike="noStrike" u="none">
               <a:solidFill>
@@ -14486,7 +14486,7 @@
                 <a:latin typeface="Aptos"/>
                 <a:ea typeface="Aptos"/>
               </a:rPr>
-              <a:t>• Queiroz: feedback visual/textual deve orientar interpretação, não apenas corrigir.</a:t>
+              <a:t>Feedback visual/textual deve orientar interpretação, não apenas corrigir.</a:t>
             </a:r>
             <a:endParaRPr b="0" lang="pt-BR" sz="1100" strike="noStrike" u="none">
               <a:solidFill>
@@ -14513,7 +14513,7 @@
                 <a:latin typeface="Aptos"/>
                 <a:ea typeface="Aptos"/>
               </a:rPr>
-              <a:t>• Wessels: atividades planejadas desenvolvem representação e pensamento de ordem superior.</a:t>
+              <a:t>Atividades planejadas desenvolvem representação e pensamento de ordem superior.</a:t>
             </a:r>
             <a:endParaRPr b="0" lang="pt-BR" sz="1100" strike="noStrike" u="none">
               <a:solidFill>
@@ -15639,7 +15639,7 @@
                 <a:latin typeface="Aptos"/>
                 <a:ea typeface="Aptos"/>
               </a:rPr>
-              <a:t>• Queiroz: feedback visual/textual deve orientar interpretação, não apenas corrigir.</a:t>
+              <a:t>Feedback visual/textual deve orientar interpretação, não apenas corrigir.</a:t>
             </a:r>
             <a:endParaRPr b="0" lang="pt-BR" sz="1050" strike="noStrike" u="none">
               <a:solidFill>
@@ -15666,7 +15666,7 @@
                 <a:latin typeface="Aptos"/>
                 <a:ea typeface="Aptos"/>
               </a:rPr>
-              <a:t>• Relato: incluir revisão, depuração e reconstrução.</a:t>
+              <a:t>Incluir revisão, depuração e reconstrução.</a:t>
             </a:r>
             <a:endParaRPr b="0" lang="pt-BR" sz="1050" strike="noStrike" u="none">
               <a:solidFill>
@@ -15693,7 +15693,7 @@
                 <a:latin typeface="Aptos"/>
                 <a:ea typeface="Aptos"/>
               </a:rPr>
-              <a:t>• Wessels: respostas idiossincráticas também revelam modos de pensar.</a:t>
+              <a:t>Respostas idiossincráticas também revelam modos de pensar.</a:t>
             </a:r>
             <a:endParaRPr b="0" lang="pt-BR" sz="1050" strike="noStrike" u="none">
               <a:solidFill>
@@ -17536,7 +17536,7 @@
                 <a:latin typeface="Aptos"/>
                 <a:ea typeface="Aptos"/>
               </a:rPr>
-              <a:t>• Relato: avaliar o percurso de pensamento, não apenas o código final.</a:t>
+              <a:t>Avaliar o percurso de pensamento, não apenas o código final.</a:t>
             </a:r>
             <a:endParaRPr b="0" lang="pt-BR" sz="1100" strike="noStrike" u="none">
               <a:solidFill>
@@ -17563,7 +17563,7 @@
                 <a:latin typeface="Aptos"/>
                 <a:ea typeface="Aptos"/>
               </a:rPr>
-              <a:t>• Queiroz: o percurso da tarefa revela mudanças no discurso e na ação.</a:t>
+              <a:t>O percurso da tarefa revela mudanças no discurso e na ação.</a:t>
             </a:r>
             <a:endParaRPr b="0" lang="pt-BR" sz="1100" strike="noStrike" u="none">
               <a:solidFill>
@@ -17590,7 +17590,7 @@
                 <a:latin typeface="Aptos"/>
                 <a:ea typeface="Aptos"/>
               </a:rPr>
-              <a:t>• Wessels: atividades planejadas desenvolvem representação e pensamento de ordem superior.</a:t>
+              <a:t>Atividades planejadas desenvolvem representação e pensamento de ordem superior.</a:t>
             </a:r>
             <a:endParaRPr b="0" lang="pt-BR" sz="1100" strike="noStrike" u="none">
               <a:solidFill>
